--- a/S1-CL1-Cloud-Design-Build/delivery/topic_05/Topic_05_Slides.pptx
+++ b/S1-CL1-Cloud-Design-Build/delivery/topic_05/Topic_05_Slides.pptx
@@ -3684,7 +3684,7 @@
           <a:noFill/>
         </p:spPr>
         <p:txBody>
-          <a:bodyPr wrap="square" anchor="t" lIns="0" rIns="0" tIns="0" bIns="0">
+          <a:bodyPr wrap="square" anchor="ctr" lIns="0" rIns="0" tIns="0" bIns="0">
             <a:spAutoFit/>
           </a:bodyPr>
           <a:lstStyle/>
@@ -3701,7 +3701,7 @@
               </a:spcAft>
             </a:pPr>
             <a:r>
-              <a:rPr sz="1800" b="1" i="0">
+              <a:rPr sz="2400" b="1" i="0">
                 <a:solidFill>
                   <a:srgbClr val="EDAB0C"/>
                 </a:solidFill>
@@ -3710,7 +3710,7 @@
               <a:t>■  </a:t>
             </a:r>
             <a:r>
-              <a:rPr sz="1800" b="0" i="0">
+              <a:rPr sz="2400" b="0" i="0">
                 <a:solidFill>
                   <a:srgbClr val="2A2929"/>
                 </a:solidFill>
@@ -3732,7 +3732,7 @@
               </a:spcAft>
             </a:pPr>
             <a:r>
-              <a:rPr sz="1800" b="1" i="0">
+              <a:rPr sz="2400" b="1" i="0">
                 <a:solidFill>
                   <a:srgbClr val="EDAB0C"/>
                 </a:solidFill>
@@ -3741,7 +3741,7 @@
               <a:t>■  </a:t>
             </a:r>
             <a:r>
-              <a:rPr sz="1800" b="0" i="0">
+              <a:rPr sz="2400" b="0" i="0">
                 <a:solidFill>
                   <a:srgbClr val="2A2929"/>
                 </a:solidFill>
@@ -3763,7 +3763,7 @@
               </a:spcAft>
             </a:pPr>
             <a:r>
-              <a:rPr sz="1800" b="1" i="0">
+              <a:rPr sz="2400" b="1" i="0">
                 <a:solidFill>
                   <a:srgbClr val="27B5CE"/>
                 </a:solidFill>
@@ -3772,7 +3772,7 @@
               <a:t>■  </a:t>
             </a:r>
             <a:r>
-              <a:rPr sz="1800" b="1" i="0">
+              <a:rPr sz="2400" b="1" i="0">
                 <a:solidFill>
                   <a:srgbClr val="27B5CE"/>
                 </a:solidFill>
@@ -4026,7 +4026,7 @@
           <a:noFill/>
         </p:spPr>
         <p:txBody>
-          <a:bodyPr wrap="square" anchor="t" lIns="0" rIns="0" tIns="0" bIns="0">
+          <a:bodyPr wrap="square" anchor="ctr" lIns="0" rIns="0" tIns="0" bIns="0">
             <a:spAutoFit/>
           </a:bodyPr>
           <a:lstStyle/>
@@ -4043,7 +4043,7 @@
               </a:spcAft>
             </a:pPr>
             <a:r>
-              <a:rPr sz="1800" b="1" i="0">
+              <a:rPr sz="2400" b="1" i="0">
                 <a:solidFill>
                   <a:srgbClr val="EDAB0C"/>
                 </a:solidFill>
@@ -4052,7 +4052,7 @@
               <a:t>■  </a:t>
             </a:r>
             <a:r>
-              <a:rPr sz="1800" b="0" i="0">
+              <a:rPr sz="2400" b="0" i="0">
                 <a:solidFill>
                   <a:srgbClr val="2A2929"/>
                 </a:solidFill>
@@ -4074,7 +4074,7 @@
               </a:spcAft>
             </a:pPr>
             <a:r>
-              <a:rPr sz="1800" b="1" i="0">
+              <a:rPr sz="2400" b="1" i="0">
                 <a:solidFill>
                   <a:srgbClr val="EDAB0C"/>
                 </a:solidFill>
@@ -4083,7 +4083,7 @@
               <a:t>■  </a:t>
             </a:r>
             <a:r>
-              <a:rPr sz="1800" b="0" i="0">
+              <a:rPr sz="2400" b="0" i="0">
                 <a:solidFill>
                   <a:srgbClr val="2A2929"/>
                 </a:solidFill>
@@ -4105,7 +4105,7 @@
               </a:spcAft>
             </a:pPr>
             <a:r>
-              <a:rPr sz="1800" b="1" i="0">
+              <a:rPr sz="2400" b="1" i="0">
                 <a:solidFill>
                   <a:srgbClr val="EDAB0C"/>
                 </a:solidFill>
@@ -4114,7 +4114,7 @@
               <a:t>■  </a:t>
             </a:r>
             <a:r>
-              <a:rPr sz="1800" b="0" i="0">
+              <a:rPr sz="2400" b="0" i="0">
                 <a:solidFill>
                   <a:srgbClr val="2A2929"/>
                 </a:solidFill>
@@ -4136,7 +4136,7 @@
               </a:spcAft>
             </a:pPr>
             <a:r>
-              <a:rPr sz="1800" b="1" i="0">
+              <a:rPr sz="2400" b="1" i="0">
                 <a:solidFill>
                   <a:srgbClr val="27B5CE"/>
                 </a:solidFill>
@@ -4145,7 +4145,7 @@
               <a:t>■  </a:t>
             </a:r>
             <a:r>
-              <a:rPr sz="1800" b="1" i="0">
+              <a:rPr sz="2400" b="1" i="0">
                 <a:solidFill>
                   <a:srgbClr val="27B5CE"/>
                 </a:solidFill>
@@ -4399,7 +4399,7 @@
           <a:noFill/>
         </p:spPr>
         <p:txBody>
-          <a:bodyPr wrap="square" anchor="t" lIns="0" rIns="0" tIns="0" bIns="0">
+          <a:bodyPr wrap="square" anchor="ctr" lIns="0" rIns="0" tIns="0" bIns="0">
             <a:spAutoFit/>
           </a:bodyPr>
           <a:lstStyle/>
@@ -4416,7 +4416,7 @@
               </a:spcAft>
             </a:pPr>
             <a:r>
-              <a:rPr sz="1800" b="1" i="0">
+              <a:rPr sz="2400" b="1" i="0">
                 <a:solidFill>
                   <a:srgbClr val="EDAB0C"/>
                 </a:solidFill>
@@ -4425,7 +4425,7 @@
               <a:t>■  </a:t>
             </a:r>
             <a:r>
-              <a:rPr sz="1800" b="0" i="0">
+              <a:rPr sz="2400" b="0" i="0">
                 <a:solidFill>
                   <a:srgbClr val="2A2929"/>
                 </a:solidFill>
@@ -4447,7 +4447,7 @@
               </a:spcAft>
             </a:pPr>
             <a:r>
-              <a:rPr sz="1800" b="1" i="0">
+              <a:rPr sz="2400" b="1" i="0">
                 <a:solidFill>
                   <a:srgbClr val="EDAB0C"/>
                 </a:solidFill>
@@ -4456,7 +4456,7 @@
               <a:t>■  </a:t>
             </a:r>
             <a:r>
-              <a:rPr sz="1800" b="0" i="0">
+              <a:rPr sz="2400" b="0" i="0">
                 <a:solidFill>
                   <a:srgbClr val="2A2929"/>
                 </a:solidFill>
@@ -4478,7 +4478,7 @@
               </a:spcAft>
             </a:pPr>
             <a:r>
-              <a:rPr sz="1800" b="1" i="0">
+              <a:rPr sz="2400" b="1" i="0">
                 <a:solidFill>
                   <a:srgbClr val="EDAB0C"/>
                 </a:solidFill>
@@ -4487,7 +4487,7 @@
               <a:t>■  </a:t>
             </a:r>
             <a:r>
-              <a:rPr sz="1800" b="0" i="0">
+              <a:rPr sz="2400" b="0" i="0">
                 <a:solidFill>
                   <a:srgbClr val="2A2929"/>
                 </a:solidFill>
@@ -4509,7 +4509,7 @@
               </a:spcAft>
             </a:pPr>
             <a:r>
-              <a:rPr sz="1800" b="1" i="0">
+              <a:rPr sz="2400" b="1" i="0">
                 <a:solidFill>
                   <a:srgbClr val="27B5CE"/>
                 </a:solidFill>
@@ -4518,7 +4518,7 @@
               <a:t>■  </a:t>
             </a:r>
             <a:r>
-              <a:rPr sz="1800" b="1" i="0">
+              <a:rPr sz="2400" b="1" i="0">
                 <a:solidFill>
                   <a:srgbClr val="27B5CE"/>
                 </a:solidFill>
@@ -6261,7 +6261,7 @@
           <a:noFill/>
         </p:spPr>
         <p:txBody>
-          <a:bodyPr wrap="square" anchor="t" lIns="0" rIns="0" tIns="0" bIns="0">
+          <a:bodyPr wrap="square" anchor="ctr" lIns="0" rIns="0" tIns="0" bIns="0">
             <a:spAutoFit/>
           </a:bodyPr>
           <a:lstStyle/>
@@ -6278,7 +6278,7 @@
               </a:spcAft>
             </a:pPr>
             <a:r>
-              <a:rPr sz="1800" b="1" i="0">
+              <a:rPr sz="2400" b="1" i="0">
                 <a:solidFill>
                   <a:srgbClr val="EDAB0C"/>
                 </a:solidFill>
@@ -6287,7 +6287,7 @@
               <a:t>■  </a:t>
             </a:r>
             <a:r>
-              <a:rPr sz="1800" b="0" i="0">
+              <a:rPr sz="2400" b="0" i="0">
                 <a:solidFill>
                   <a:srgbClr val="2A2929"/>
                 </a:solidFill>
@@ -6309,7 +6309,7 @@
               </a:spcAft>
             </a:pPr>
             <a:r>
-              <a:rPr sz="1800" b="1" i="0">
+              <a:rPr sz="2400" b="1" i="0">
                 <a:solidFill>
                   <a:srgbClr val="205F61"/>
                 </a:solidFill>
@@ -6318,7 +6318,7 @@
               <a:t>■  </a:t>
             </a:r>
             <a:r>
-              <a:rPr sz="1800" b="1" i="0">
+              <a:rPr sz="2400" b="1" i="0">
                 <a:solidFill>
                   <a:srgbClr val="205F61"/>
                 </a:solidFill>
@@ -6572,7 +6572,7 @@
           <a:noFill/>
         </p:spPr>
         <p:txBody>
-          <a:bodyPr wrap="square" anchor="t" lIns="0" rIns="0" tIns="0" bIns="0">
+          <a:bodyPr wrap="square" anchor="ctr" lIns="0" rIns="0" tIns="0" bIns="0">
             <a:spAutoFit/>
           </a:bodyPr>
           <a:lstStyle/>
@@ -6589,7 +6589,7 @@
               </a:spcAft>
             </a:pPr>
             <a:r>
-              <a:rPr sz="1800" b="1" i="0">
+              <a:rPr sz="2400" b="1" i="0">
                 <a:solidFill>
                   <a:srgbClr val="EDAB0C"/>
                 </a:solidFill>
@@ -6598,7 +6598,7 @@
               <a:t>■  </a:t>
             </a:r>
             <a:r>
-              <a:rPr sz="1800" b="0" i="0">
+              <a:rPr sz="2400" b="0" i="0">
                 <a:solidFill>
                   <a:srgbClr val="2A2929"/>
                 </a:solidFill>
@@ -6620,7 +6620,7 @@
               </a:spcAft>
             </a:pPr>
             <a:r>
-              <a:rPr sz="1800" b="1" i="0">
+              <a:rPr sz="2400" b="1" i="0">
                 <a:solidFill>
                   <a:srgbClr val="EDAB0C"/>
                 </a:solidFill>
@@ -6629,7 +6629,7 @@
               <a:t>■  </a:t>
             </a:r>
             <a:r>
-              <a:rPr sz="1800" b="0" i="0">
+              <a:rPr sz="2400" b="0" i="0">
                 <a:solidFill>
                   <a:srgbClr val="2A2929"/>
                 </a:solidFill>
@@ -6651,7 +6651,7 @@
               </a:spcAft>
             </a:pPr>
             <a:r>
-              <a:rPr sz="1800" b="1" i="0">
+              <a:rPr sz="2400" b="1" i="0">
                 <a:solidFill>
                   <a:srgbClr val="EDAB0C"/>
                 </a:solidFill>
@@ -6660,7 +6660,7 @@
               <a:t>■  </a:t>
             </a:r>
             <a:r>
-              <a:rPr sz="1800" b="0" i="0">
+              <a:rPr sz="2400" b="0" i="0">
                 <a:solidFill>
                   <a:srgbClr val="2A2929"/>
                 </a:solidFill>
@@ -6682,7 +6682,7 @@
               </a:spcAft>
             </a:pPr>
             <a:r>
-              <a:rPr sz="1800" b="1" i="0">
+              <a:rPr sz="2400" b="1" i="0">
                 <a:solidFill>
                   <a:srgbClr val="205F61"/>
                 </a:solidFill>
@@ -6691,7 +6691,7 @@
               <a:t>■  </a:t>
             </a:r>
             <a:r>
-              <a:rPr sz="1800" b="1" i="0">
+              <a:rPr sz="2400" b="1" i="0">
                 <a:solidFill>
                   <a:srgbClr val="205F61"/>
                 </a:solidFill>
@@ -6961,7 +6961,7 @@
           <a:noFill/>
         </p:spPr>
         <p:txBody>
-          <a:bodyPr wrap="square" anchor="t" lIns="0" rIns="0" tIns="0" bIns="0">
+          <a:bodyPr wrap="square" anchor="ctr" lIns="0" rIns="0" tIns="0" bIns="0">
             <a:spAutoFit/>
           </a:bodyPr>
           <a:lstStyle/>
@@ -6978,7 +6978,7 @@
               </a:spcAft>
             </a:pPr>
             <a:r>
-              <a:rPr sz="1800" b="1" i="0">
+              <a:rPr sz="2400" b="1" i="0">
                 <a:solidFill>
                   <a:srgbClr val="EDAB0C"/>
                 </a:solidFill>
@@ -6987,7 +6987,7 @@
               <a:t>■  </a:t>
             </a:r>
             <a:r>
-              <a:rPr sz="1800" b="0" i="0">
+              <a:rPr sz="2400" b="0" i="0">
                 <a:solidFill>
                   <a:srgbClr val="2A2929"/>
                 </a:solidFill>
@@ -7009,7 +7009,7 @@
               </a:spcAft>
             </a:pPr>
             <a:r>
-              <a:rPr sz="1800" b="1" i="0">
+              <a:rPr sz="2400" b="1" i="0">
                 <a:solidFill>
                   <a:srgbClr val="EDAB0C"/>
                 </a:solidFill>
@@ -7018,7 +7018,7 @@
               <a:t>■  </a:t>
             </a:r>
             <a:r>
-              <a:rPr sz="1800" b="0" i="0">
+              <a:rPr sz="2400" b="0" i="0">
                 <a:solidFill>
                   <a:srgbClr val="2A2929"/>
                 </a:solidFill>
@@ -7040,7 +7040,7 @@
               </a:spcAft>
             </a:pPr>
             <a:r>
-              <a:rPr sz="1800" b="1" i="0">
+              <a:rPr sz="2400" b="1" i="0">
                 <a:solidFill>
                   <a:srgbClr val="EDAB0C"/>
                 </a:solidFill>
@@ -7049,7 +7049,7 @@
               <a:t>■  </a:t>
             </a:r>
             <a:r>
-              <a:rPr sz="1800" b="0" i="0">
+              <a:rPr sz="2400" b="0" i="0">
                 <a:solidFill>
                   <a:srgbClr val="2A2929"/>
                 </a:solidFill>
@@ -7071,7 +7071,7 @@
               </a:spcAft>
             </a:pPr>
             <a:r>
-              <a:rPr sz="1800" b="1" i="0">
+              <a:rPr sz="2400" b="1" i="0">
                 <a:solidFill>
                   <a:srgbClr val="EDAB0C"/>
                 </a:solidFill>
@@ -7080,7 +7080,7 @@
               <a:t>■  </a:t>
             </a:r>
             <a:r>
-              <a:rPr sz="1800" b="0" i="0">
+              <a:rPr sz="2400" b="0" i="0">
                 <a:solidFill>
                   <a:srgbClr val="2A2929"/>
                 </a:solidFill>
@@ -7102,7 +7102,7 @@
               </a:spcAft>
             </a:pPr>
             <a:r>
-              <a:rPr sz="1800" b="1" i="0">
+              <a:rPr sz="2400" b="1" i="0">
                 <a:solidFill>
                   <a:srgbClr val="EDAB0C"/>
                 </a:solidFill>
@@ -7111,7 +7111,7 @@
               <a:t>■  </a:t>
             </a:r>
             <a:r>
-              <a:rPr sz="1800" b="0" i="0">
+              <a:rPr sz="2400" b="0" i="0">
                 <a:solidFill>
                   <a:srgbClr val="2A2929"/>
                 </a:solidFill>
@@ -7133,7 +7133,7 @@
               </a:spcAft>
             </a:pPr>
             <a:r>
-              <a:rPr sz="1800" b="1" i="0">
+              <a:rPr sz="2400" b="1" i="0">
                 <a:solidFill>
                   <a:srgbClr val="205F61"/>
                 </a:solidFill>
@@ -7142,7 +7142,7 @@
               <a:t>■  </a:t>
             </a:r>
             <a:r>
-              <a:rPr sz="1800" b="1" i="0">
+              <a:rPr sz="2400" b="1" i="0">
                 <a:solidFill>
                   <a:srgbClr val="205F61"/>
                 </a:solidFill>
@@ -7412,7 +7412,7 @@
           <a:noFill/>
         </p:spPr>
         <p:txBody>
-          <a:bodyPr wrap="square" anchor="t" lIns="0" rIns="0" tIns="0" bIns="0">
+          <a:bodyPr wrap="square" anchor="ctr" lIns="0" rIns="0" tIns="0" bIns="0">
             <a:spAutoFit/>
           </a:bodyPr>
           <a:lstStyle/>
@@ -7429,7 +7429,7 @@
               </a:spcAft>
             </a:pPr>
             <a:r>
-              <a:rPr sz="1800" b="1" i="0">
+              <a:rPr sz="2400" b="1" i="0">
                 <a:solidFill>
                   <a:srgbClr val="EDAB0C"/>
                 </a:solidFill>
@@ -7438,7 +7438,7 @@
               <a:t>■  </a:t>
             </a:r>
             <a:r>
-              <a:rPr sz="1800" b="0" i="0">
+              <a:rPr sz="2400" b="0" i="0">
                 <a:solidFill>
                   <a:srgbClr val="2A2929"/>
                 </a:solidFill>
@@ -7460,7 +7460,7 @@
               </a:spcAft>
             </a:pPr>
             <a:r>
-              <a:rPr sz="1800" b="1" i="0">
+              <a:rPr sz="2400" b="1" i="0">
                 <a:solidFill>
                   <a:srgbClr val="92268F"/>
                 </a:solidFill>
@@ -7469,7 +7469,7 @@
               <a:t>■  </a:t>
             </a:r>
             <a:r>
-              <a:rPr sz="1800" b="1" i="0">
+              <a:rPr sz="2400" b="1" i="0">
                 <a:solidFill>
                   <a:srgbClr val="92268F"/>
                 </a:solidFill>
@@ -7491,7 +7491,7 @@
               </a:spcAft>
             </a:pPr>
             <a:r>
-              <a:rPr sz="1800" b="1" i="0">
+              <a:rPr sz="2400" b="1" i="0">
                 <a:solidFill>
                   <a:srgbClr val="EDAB0C"/>
                 </a:solidFill>
@@ -7500,7 +7500,7 @@
               <a:t>■  </a:t>
             </a:r>
             <a:r>
-              <a:rPr sz="1800" b="0" i="0">
+              <a:rPr sz="2400" b="0" i="0">
                 <a:solidFill>
                   <a:srgbClr val="2A2929"/>
                 </a:solidFill>
@@ -7754,7 +7754,7 @@
           <a:noFill/>
         </p:spPr>
         <p:txBody>
-          <a:bodyPr wrap="square" anchor="t" lIns="0" rIns="0" tIns="0" bIns="0">
+          <a:bodyPr wrap="square" anchor="ctr" lIns="0" rIns="0" tIns="0" bIns="0">
             <a:spAutoFit/>
           </a:bodyPr>
           <a:lstStyle/>
@@ -7771,7 +7771,7 @@
               </a:spcAft>
             </a:pPr>
             <a:r>
-              <a:rPr sz="1800" b="1" i="0">
+              <a:rPr sz="2400" b="1" i="0">
                 <a:solidFill>
                   <a:srgbClr val="EDAB0C"/>
                 </a:solidFill>
@@ -7780,7 +7780,7 @@
               <a:t>■  </a:t>
             </a:r>
             <a:r>
-              <a:rPr sz="1800" b="0" i="0">
+              <a:rPr sz="2400" b="0" i="0">
                 <a:solidFill>
                   <a:srgbClr val="2A2929"/>
                 </a:solidFill>
@@ -7802,7 +7802,7 @@
               </a:spcAft>
             </a:pPr>
             <a:r>
-              <a:rPr sz="1800" b="1" i="0">
+              <a:rPr sz="2400" b="1" i="0">
                 <a:solidFill>
                   <a:srgbClr val="EDAB0C"/>
                 </a:solidFill>
@@ -7811,7 +7811,7 @@
               <a:t>■  </a:t>
             </a:r>
             <a:r>
-              <a:rPr sz="1800" b="0" i="0">
+              <a:rPr sz="2400" b="0" i="0">
                 <a:solidFill>
                   <a:srgbClr val="2A2929"/>
                 </a:solidFill>
@@ -7833,7 +7833,7 @@
               </a:spcAft>
             </a:pPr>
             <a:r>
-              <a:rPr sz="1800" b="1" i="0">
+              <a:rPr sz="2400" b="1" i="0">
                 <a:solidFill>
                   <a:srgbClr val="EDAB0C"/>
                 </a:solidFill>
@@ -7842,7 +7842,7 @@
               <a:t>■  </a:t>
             </a:r>
             <a:r>
-              <a:rPr sz="1800" b="0" i="0">
+              <a:rPr sz="2400" b="0" i="0">
                 <a:solidFill>
                   <a:srgbClr val="2A2929"/>
                 </a:solidFill>
@@ -7864,7 +7864,7 @@
               </a:spcAft>
             </a:pPr>
             <a:r>
-              <a:rPr sz="1800" b="1" i="0">
+              <a:rPr sz="2400" b="1" i="0">
                 <a:solidFill>
                   <a:srgbClr val="205F61"/>
                 </a:solidFill>
@@ -7873,7 +7873,7 @@
               <a:t>■  </a:t>
             </a:r>
             <a:r>
-              <a:rPr sz="1800" b="1" i="0">
+              <a:rPr sz="2400" b="1" i="0">
                 <a:solidFill>
                   <a:srgbClr val="205F61"/>
                 </a:solidFill>
@@ -9734,7 +9734,7 @@
           <a:noFill/>
         </p:spPr>
         <p:txBody>
-          <a:bodyPr wrap="square" anchor="t" lIns="0" rIns="0" tIns="0" bIns="0">
+          <a:bodyPr wrap="square" anchor="ctr" lIns="0" rIns="0" tIns="0" bIns="0">
             <a:spAutoFit/>
           </a:bodyPr>
           <a:lstStyle/>
@@ -9751,7 +9751,7 @@
               </a:spcAft>
             </a:pPr>
             <a:r>
-              <a:rPr sz="1800" b="1" i="0">
+              <a:rPr sz="2400" b="1" i="0">
                 <a:solidFill>
                   <a:srgbClr val="EDAB0C"/>
                 </a:solidFill>
@@ -9760,7 +9760,7 @@
               <a:t>■  </a:t>
             </a:r>
             <a:r>
-              <a:rPr sz="1800" b="0" i="0">
+              <a:rPr sz="2400" b="0" i="0">
                 <a:solidFill>
                   <a:srgbClr val="2A2929"/>
                 </a:solidFill>
@@ -9782,7 +9782,7 @@
               </a:spcAft>
             </a:pPr>
             <a:r>
-              <a:rPr sz="1800" b="1" i="0">
+              <a:rPr sz="2400" b="1" i="0">
                 <a:solidFill>
                   <a:srgbClr val="EDAB0C"/>
                 </a:solidFill>
@@ -9791,7 +9791,7 @@
               <a:t>■  </a:t>
             </a:r>
             <a:r>
-              <a:rPr sz="1800" b="0" i="0">
+              <a:rPr sz="2400" b="0" i="0">
                 <a:solidFill>
                   <a:srgbClr val="2A2929"/>
                 </a:solidFill>
@@ -9813,7 +9813,7 @@
               </a:spcAft>
             </a:pPr>
             <a:r>
-              <a:rPr sz="1800" b="1" i="0">
+              <a:rPr sz="2400" b="1" i="0">
                 <a:solidFill>
                   <a:srgbClr val="92268F"/>
                 </a:solidFill>
@@ -9822,7 +9822,7 @@
               <a:t>■  </a:t>
             </a:r>
             <a:r>
-              <a:rPr sz="1800" b="1" i="0">
+              <a:rPr sz="2400" b="1" i="0">
                 <a:solidFill>
                   <a:srgbClr val="92268F"/>
                 </a:solidFill>
@@ -10092,7 +10092,7 @@
           <a:noFill/>
         </p:spPr>
         <p:txBody>
-          <a:bodyPr wrap="square" anchor="t" lIns="0" rIns="0" tIns="0" bIns="0">
+          <a:bodyPr wrap="square" anchor="ctr" lIns="0" rIns="0" tIns="0" bIns="0">
             <a:spAutoFit/>
           </a:bodyPr>
           <a:lstStyle/>
@@ -10109,7 +10109,7 @@
               </a:spcAft>
             </a:pPr>
             <a:r>
-              <a:rPr sz="1800" b="1" i="0">
+              <a:rPr sz="2400" b="1" i="0">
                 <a:solidFill>
                   <a:srgbClr val="EDAB0C"/>
                 </a:solidFill>
@@ -10118,7 +10118,7 @@
               <a:t>■  </a:t>
             </a:r>
             <a:r>
-              <a:rPr sz="1800" b="0" i="0">
+              <a:rPr sz="2400" b="0" i="0">
                 <a:solidFill>
                   <a:srgbClr val="2A2929"/>
                 </a:solidFill>
@@ -10140,7 +10140,7 @@
               </a:spcAft>
             </a:pPr>
             <a:r>
-              <a:rPr sz="1800" b="1" i="0">
+              <a:rPr sz="2400" b="1" i="0">
                 <a:solidFill>
                   <a:srgbClr val="EDAB0C"/>
                 </a:solidFill>
@@ -10149,7 +10149,7 @@
               <a:t>■  </a:t>
             </a:r>
             <a:r>
-              <a:rPr sz="1800" b="0" i="0">
+              <a:rPr sz="2400" b="0" i="0">
                 <a:solidFill>
                   <a:srgbClr val="2A2929"/>
                 </a:solidFill>
@@ -10171,7 +10171,7 @@
               </a:spcAft>
             </a:pPr>
             <a:r>
-              <a:rPr sz="1800" b="1" i="0">
+              <a:rPr sz="2400" b="1" i="0">
                 <a:solidFill>
                   <a:srgbClr val="92268F"/>
                 </a:solidFill>
@@ -10180,7 +10180,7 @@
               <a:t>■  </a:t>
             </a:r>
             <a:r>
-              <a:rPr sz="1800" b="1" i="0">
+              <a:rPr sz="2400" b="1" i="0">
                 <a:solidFill>
                   <a:srgbClr val="92268F"/>
                 </a:solidFill>
@@ -10434,7 +10434,7 @@
           <a:noFill/>
         </p:spPr>
         <p:txBody>
-          <a:bodyPr wrap="square" anchor="t" lIns="0" rIns="0" tIns="0" bIns="0">
+          <a:bodyPr wrap="square" anchor="ctr" lIns="0" rIns="0" tIns="0" bIns="0">
             <a:spAutoFit/>
           </a:bodyPr>
           <a:lstStyle/>
@@ -10451,7 +10451,7 @@
               </a:spcAft>
             </a:pPr>
             <a:r>
-              <a:rPr sz="1800" b="1" i="0">
+              <a:rPr sz="2400" b="1" i="0">
                 <a:solidFill>
                   <a:srgbClr val="EDAB0C"/>
                 </a:solidFill>
@@ -10460,7 +10460,7 @@
               <a:t>■  </a:t>
             </a:r>
             <a:r>
-              <a:rPr sz="1800" b="1" i="0">
+              <a:rPr sz="2400" b="1" i="0">
                 <a:solidFill>
                   <a:srgbClr val="2A2929"/>
                 </a:solidFill>
@@ -10482,7 +10482,7 @@
               </a:spcAft>
             </a:pPr>
             <a:r>
-              <a:rPr sz="1800" b="1" i="0">
+              <a:rPr sz="2400" b="1" i="0">
                 <a:solidFill>
                   <a:srgbClr val="EDAB0C"/>
                 </a:solidFill>
@@ -10491,7 +10491,7 @@
               <a:t>■  </a:t>
             </a:r>
             <a:r>
-              <a:rPr sz="1800" b="1" i="0">
+              <a:rPr sz="2400" b="1" i="0">
                 <a:solidFill>
                   <a:srgbClr val="2A2929"/>
                 </a:solidFill>
@@ -10513,7 +10513,7 @@
               </a:spcAft>
             </a:pPr>
             <a:r>
-              <a:rPr sz="1800" b="1" i="0">
+              <a:rPr sz="2400" b="1" i="0">
                 <a:solidFill>
                   <a:srgbClr val="92268F"/>
                 </a:solidFill>
@@ -10522,7 +10522,7 @@
               <a:t>■  </a:t>
             </a:r>
             <a:r>
-              <a:rPr sz="1800" b="1" i="0">
+              <a:rPr sz="2400" b="1" i="0">
                 <a:solidFill>
                   <a:srgbClr val="92268F"/>
                 </a:solidFill>
@@ -10776,7 +10776,7 @@
           <a:noFill/>
         </p:spPr>
         <p:txBody>
-          <a:bodyPr wrap="square" anchor="t" lIns="0" rIns="0" tIns="0" bIns="0">
+          <a:bodyPr wrap="square" anchor="ctr" lIns="0" rIns="0" tIns="0" bIns="0">
             <a:spAutoFit/>
           </a:bodyPr>
           <a:lstStyle/>
@@ -10793,7 +10793,7 @@
               </a:spcAft>
             </a:pPr>
             <a:r>
-              <a:rPr sz="1800" b="1" i="0">
+              <a:rPr sz="2400" b="1" i="0">
                 <a:solidFill>
                   <a:srgbClr val="EDAB0C"/>
                 </a:solidFill>
@@ -10802,7 +10802,7 @@
               <a:t>■  </a:t>
             </a:r>
             <a:r>
-              <a:rPr sz="1800" b="0" i="0">
+              <a:rPr sz="2400" b="0" i="0">
                 <a:solidFill>
                   <a:srgbClr val="2A2929"/>
                 </a:solidFill>
@@ -10824,7 +10824,7 @@
               </a:spcAft>
             </a:pPr>
             <a:r>
-              <a:rPr sz="1500" b="0" i="0">
+              <a:rPr sz="2100" b="0" i="0">
                 <a:solidFill>
                   <a:srgbClr val="7A7A7A"/>
                 </a:solidFill>
@@ -10833,7 +10833,7 @@
               <a:t>–  </a:t>
             </a:r>
             <a:r>
-              <a:rPr sz="1500" b="0" i="0">
+              <a:rPr sz="2100" b="0" i="0">
                 <a:solidFill>
                   <a:srgbClr val="2A2929"/>
                 </a:solidFill>
@@ -10855,7 +10855,7 @@
               </a:spcAft>
             </a:pPr>
             <a:r>
-              <a:rPr sz="1500" b="0" i="0">
+              <a:rPr sz="2100" b="0" i="0">
                 <a:solidFill>
                   <a:srgbClr val="7A7A7A"/>
                 </a:solidFill>
@@ -10864,7 +10864,7 @@
               <a:t>–  </a:t>
             </a:r>
             <a:r>
-              <a:rPr sz="1500" b="0" i="0">
+              <a:rPr sz="2100" b="0" i="0">
                 <a:solidFill>
                   <a:srgbClr val="2A2929"/>
                 </a:solidFill>
@@ -10886,7 +10886,7 @@
               </a:spcAft>
             </a:pPr>
             <a:r>
-              <a:rPr sz="1500" b="0" i="0">
+              <a:rPr sz="2100" b="0" i="0">
                 <a:solidFill>
                   <a:srgbClr val="7A7A7A"/>
                 </a:solidFill>
@@ -10895,7 +10895,7 @@
               <a:t>–  </a:t>
             </a:r>
             <a:r>
-              <a:rPr sz="1500" b="0" i="0">
+              <a:rPr sz="2100" b="0" i="0">
                 <a:solidFill>
                   <a:srgbClr val="2A2929"/>
                 </a:solidFill>
@@ -10917,7 +10917,7 @@
               </a:spcAft>
             </a:pPr>
             <a:r>
-              <a:rPr sz="1500" b="0" i="0">
+              <a:rPr sz="2100" b="0" i="0">
                 <a:solidFill>
                   <a:srgbClr val="7A7A7A"/>
                 </a:solidFill>
@@ -10926,7 +10926,7 @@
               <a:t>–  </a:t>
             </a:r>
             <a:r>
-              <a:rPr sz="1500" b="0" i="0">
+              <a:rPr sz="2100" b="0" i="0">
                 <a:solidFill>
                   <a:srgbClr val="2A2929"/>
                 </a:solidFill>
@@ -10948,7 +10948,7 @@
               </a:spcAft>
             </a:pPr>
             <a:r>
-              <a:rPr sz="1800" b="1" i="0">
+              <a:rPr sz="2400" b="1" i="0">
                 <a:solidFill>
                   <a:srgbClr val="92268F"/>
                 </a:solidFill>
@@ -10957,7 +10957,7 @@
               <a:t>■  </a:t>
             </a:r>
             <a:r>
-              <a:rPr sz="1800" b="1" i="0">
+              <a:rPr sz="2400" b="1" i="0">
                 <a:solidFill>
                   <a:srgbClr val="92268F"/>
                 </a:solidFill>

--- a/S1-CL1-Cloud-Design-Build/delivery/topic_05/Topic_05_Slides.pptx
+++ b/S1-CL1-Cloud-Design-Build/delivery/topic_05/Topic_05_Slides.pptx
@@ -7,27 +7,27 @@
   <p:sldIdLst>
     <p:sldId id="256" r:id="rId7"/>
     <p:sldId id="257" r:id="rId8"/>
-    <p:sldId id="258" r:id="rId9"/>
-    <p:sldId id="259" r:id="rId10"/>
-    <p:sldId id="260" r:id="rId11"/>
-    <p:sldId id="261" r:id="rId12"/>
-    <p:sldId id="262" r:id="rId13"/>
-    <p:sldId id="263" r:id="rId14"/>
-    <p:sldId id="264" r:id="rId15"/>
-    <p:sldId id="265" r:id="rId16"/>
-    <p:sldId id="266" r:id="rId17"/>
-    <p:sldId id="267" r:id="rId18"/>
-    <p:sldId id="268" r:id="rId19"/>
-    <p:sldId id="269" r:id="rId20"/>
-    <p:sldId id="270" r:id="rId21"/>
-    <p:sldId id="271" r:id="rId22"/>
-    <p:sldId id="272" r:id="rId23"/>
-    <p:sldId id="273" r:id="rId24"/>
-    <p:sldId id="274" r:id="rId25"/>
-    <p:sldId id="275" r:id="rId26"/>
-    <p:sldId id="276" r:id="rId27"/>
-    <p:sldId id="277" r:id="rId28"/>
-    <p:sldId id="278" r:id="rId29"/>
+    <p:sldId id="258" r:id="rId10"/>
+    <p:sldId id="259" r:id="rId11"/>
+    <p:sldId id="260" r:id="rId12"/>
+    <p:sldId id="261" r:id="rId13"/>
+    <p:sldId id="262" r:id="rId14"/>
+    <p:sldId id="263" r:id="rId15"/>
+    <p:sldId id="264" r:id="rId16"/>
+    <p:sldId id="265" r:id="rId17"/>
+    <p:sldId id="266" r:id="rId18"/>
+    <p:sldId id="267" r:id="rId19"/>
+    <p:sldId id="268" r:id="rId20"/>
+    <p:sldId id="269" r:id="rId21"/>
+    <p:sldId id="270" r:id="rId22"/>
+    <p:sldId id="271" r:id="rId23"/>
+    <p:sldId id="272" r:id="rId24"/>
+    <p:sldId id="273" r:id="rId25"/>
+    <p:sldId id="274" r:id="rId26"/>
+    <p:sldId id="275" r:id="rId27"/>
+    <p:sldId id="276" r:id="rId28"/>
+    <p:sldId id="277" r:id="rId29"/>
+    <p:sldId id="278" r:id="rId30"/>
   </p:sldIdLst>
   <p:sldSz cx="12191695" cy="6858000" type="screen4x3"/>
   <p:notesSz cx="6858000" cy="9144000"/>
@@ -127,6 +127,2461 @@
     </a:lvl9pPr>
   </p:defaultTextStyle>
 </p:presentation>
+</file>
+
+<file path=ppt/notesMasters/notesMaster1.xml><?xml version="1.0" encoding="utf-8"?>
+<p:notesMaster xmlns:a="http://schemas.openxmlformats.org/drawingml/2006/main" xmlns:p="http://schemas.openxmlformats.org/presentationml/2006/main" xmlns:r="http://schemas.openxmlformats.org/officeDocument/2006/relationships">
+  <p:cSld>
+    <p:bg>
+      <p:bgRef idx="1001">
+        <a:schemeClr val="bg1"/>
+      </p:bgRef>
+    </p:bg>
+    <p:spTree>
+      <p:nvGrpSpPr>
+        <p:cNvPr id="1" name=""/>
+        <p:cNvGrpSpPr/>
+        <p:nvPr/>
+      </p:nvGrpSpPr>
+      <p:grpSpPr>
+        <a:xfrm>
+          <a:off x="0" y="0"/>
+          <a:ext cx="0" cy="0"/>
+          <a:chOff x="0" y="0"/>
+          <a:chExt cx="0" cy="0"/>
+        </a:xfrm>
+      </p:grpSpPr>
+      <p:sp>
+        <p:nvSpPr>
+          <p:cNvPr id="2" name="Header Placeholder 1"/>
+          <p:cNvSpPr>
+            <a:spLocks noGrp="1"/>
+          </p:cNvSpPr>
+          <p:nvPr>
+            <p:ph type="hdr" sz="quarter"/>
+          </p:nvPr>
+        </p:nvSpPr>
+        <p:spPr>
+          <a:xfrm>
+            <a:off x="0" y="0"/>
+            <a:ext cx="2971800" cy="457200"/>
+          </a:xfrm>
+          <a:prstGeom prst="rect">
+            <a:avLst/>
+          </a:prstGeom>
+        </p:spPr>
+        <p:txBody>
+          <a:bodyPr vert="horz" lIns="91440" tIns="45720" rIns="91440" bIns="45720" rtlCol="0"/>
+          <a:lstStyle>
+            <a:lvl1pPr algn="l">
+              <a:defRPr sz="1200"/>
+            </a:lvl1pPr>
+          </a:lstStyle>
+          <a:p>
+            <a:endParaRPr lang="en-US"/>
+          </a:p>
+        </p:txBody>
+      </p:sp>
+      <p:sp>
+        <p:nvSpPr>
+          <p:cNvPr id="3" name="Date Placeholder 2"/>
+          <p:cNvSpPr>
+            <a:spLocks noGrp="1"/>
+          </p:cNvSpPr>
+          <p:nvPr>
+            <p:ph type="dt" idx="1"/>
+          </p:nvPr>
+        </p:nvSpPr>
+        <p:spPr>
+          <a:xfrm>
+            <a:off x="3884613" y="0"/>
+            <a:ext cx="2971800" cy="457200"/>
+          </a:xfrm>
+          <a:prstGeom prst="rect">
+            <a:avLst/>
+          </a:prstGeom>
+        </p:spPr>
+        <p:txBody>
+          <a:bodyPr vert="horz" lIns="91440" tIns="45720" rIns="91440" bIns="45720" rtlCol="0"/>
+          <a:lstStyle>
+            <a:lvl1pPr algn="r">
+              <a:defRPr sz="1200"/>
+            </a:lvl1pPr>
+          </a:lstStyle>
+          <a:p>
+            <a:fld id="{0F89C1C7-3DCD-1040-A9CF-14679D8B5DDD}" type="datetimeFigureOut">
+              <a:rPr lang="en-US" smtClean="0"/>
+              <a:t>10/17/16</a:t>
+            </a:fld>
+            <a:endParaRPr lang="en-US"/>
+          </a:p>
+        </p:txBody>
+      </p:sp>
+      <p:sp>
+        <p:nvSpPr>
+          <p:cNvPr id="4" name="Slide Image Placeholder 3"/>
+          <p:cNvSpPr>
+            <a:spLocks noGrp="1" noRot="1" noChangeAspect="1"/>
+          </p:cNvSpPr>
+          <p:nvPr>
+            <p:ph type="sldImg" idx="2"/>
+          </p:nvPr>
+        </p:nvSpPr>
+        <p:spPr>
+          <a:xfrm>
+            <a:off x="1143000" y="685800"/>
+            <a:ext cx="4572000" cy="3429000"/>
+          </a:xfrm>
+          <a:prstGeom prst="rect">
+            <a:avLst/>
+          </a:prstGeom>
+          <a:noFill/>
+          <a:ln w="12700">
+            <a:solidFill>
+              <a:prstClr val="black"/>
+            </a:solidFill>
+          </a:ln>
+        </p:spPr>
+        <p:txBody>
+          <a:bodyPr vert="horz" lIns="91440" tIns="45720" rIns="91440" bIns="45720" rtlCol="0" anchor="ctr"/>
+          <a:lstStyle/>
+          <a:p>
+            <a:endParaRPr lang="en-US"/>
+          </a:p>
+        </p:txBody>
+      </p:sp>
+      <p:sp>
+        <p:nvSpPr>
+          <p:cNvPr id="5" name="Notes Placeholder 4"/>
+          <p:cNvSpPr>
+            <a:spLocks noGrp="1"/>
+          </p:cNvSpPr>
+          <p:nvPr>
+            <p:ph type="body" sz="quarter" idx="3"/>
+          </p:nvPr>
+        </p:nvSpPr>
+        <p:spPr>
+          <a:xfrm>
+            <a:off x="685800" y="4343400"/>
+            <a:ext cx="5486400" cy="4114800"/>
+          </a:xfrm>
+          <a:prstGeom prst="rect">
+            <a:avLst/>
+          </a:prstGeom>
+        </p:spPr>
+        <p:txBody>
+          <a:bodyPr vert="horz" lIns="91440" tIns="45720" rIns="91440" bIns="45720" rtlCol="0"/>
+          <a:lstStyle/>
+          <a:p>
+            <a:pPr lvl="0"/>
+            <a:r>
+              <a:rPr lang="en-US" smtClean="0"/>
+              <a:t>Click to edit Master text styles</a:t>
+            </a:r>
+          </a:p>
+          <a:p>
+            <a:pPr lvl="1"/>
+            <a:r>
+              <a:rPr lang="en-US" smtClean="0"/>
+              <a:t>Second level</a:t>
+            </a:r>
+          </a:p>
+          <a:p>
+            <a:pPr lvl="2"/>
+            <a:r>
+              <a:rPr lang="en-US" smtClean="0"/>
+              <a:t>Third level</a:t>
+            </a:r>
+          </a:p>
+          <a:p>
+            <a:pPr lvl="3"/>
+            <a:r>
+              <a:rPr lang="en-US" smtClean="0"/>
+              <a:t>Fourth level</a:t>
+            </a:r>
+          </a:p>
+          <a:p>
+            <a:pPr lvl="4"/>
+            <a:r>
+              <a:rPr lang="en-US" smtClean="0"/>
+              <a:t>Fifth level</a:t>
+            </a:r>
+            <a:endParaRPr lang="en-US"/>
+          </a:p>
+        </p:txBody>
+      </p:sp>
+      <p:sp>
+        <p:nvSpPr>
+          <p:cNvPr id="6" name="Footer Placeholder 5"/>
+          <p:cNvSpPr>
+            <a:spLocks noGrp="1"/>
+          </p:cNvSpPr>
+          <p:nvPr>
+            <p:ph type="ftr" sz="quarter" idx="4"/>
+          </p:nvPr>
+        </p:nvSpPr>
+        <p:spPr>
+          <a:xfrm>
+            <a:off x="0" y="8685213"/>
+            <a:ext cx="2971800" cy="457200"/>
+          </a:xfrm>
+          <a:prstGeom prst="rect">
+            <a:avLst/>
+          </a:prstGeom>
+        </p:spPr>
+        <p:txBody>
+          <a:bodyPr vert="horz" lIns="91440" tIns="45720" rIns="91440" bIns="45720" rtlCol="0" anchor="b"/>
+          <a:lstStyle>
+            <a:lvl1pPr algn="l">
+              <a:defRPr sz="1200"/>
+            </a:lvl1pPr>
+          </a:lstStyle>
+          <a:p>
+            <a:endParaRPr lang="en-US"/>
+          </a:p>
+        </p:txBody>
+      </p:sp>
+      <p:sp>
+        <p:nvSpPr>
+          <p:cNvPr id="7" name="Slide Number Placeholder 6"/>
+          <p:cNvSpPr>
+            <a:spLocks noGrp="1"/>
+          </p:cNvSpPr>
+          <p:nvPr>
+            <p:ph type="sldNum" sz="quarter" idx="5"/>
+          </p:nvPr>
+        </p:nvSpPr>
+        <p:spPr>
+          <a:xfrm>
+            <a:off x="3884613" y="8685213"/>
+            <a:ext cx="2971800" cy="457200"/>
+          </a:xfrm>
+          <a:prstGeom prst="rect">
+            <a:avLst/>
+          </a:prstGeom>
+        </p:spPr>
+        <p:txBody>
+          <a:bodyPr vert="horz" lIns="91440" tIns="45720" rIns="91440" bIns="45720" rtlCol="0" anchor="b"/>
+          <a:lstStyle>
+            <a:lvl1pPr algn="r">
+              <a:defRPr sz="1200"/>
+            </a:lvl1pPr>
+          </a:lstStyle>
+          <a:p>
+            <a:fld id="{BB5E49A5-4136-284D-997B-48E1D791AD67}" type="slidenum">
+              <a:rPr lang="en-US" smtClean="0"/>
+              <a:t>‹#›</a:t>
+            </a:fld>
+            <a:endParaRPr lang="en-US"/>
+          </a:p>
+        </p:txBody>
+      </p:sp>
+    </p:spTree>
+    <p:extLst>
+      <p:ext uri="{BB962C8B-B14F-4D97-AF65-F5344CB8AC3E}">
+        <p14:creationId xmlns:p14="http://schemas.microsoft.com/office/powerpoint/2010/main" val="2623252185"/>
+      </p:ext>
+    </p:extLst>
+  </p:cSld>
+  <p:clrMap bg1="lt1" tx1="dk1" bg2="lt2" tx2="dk2" accent1="accent1" accent2="accent2" accent3="accent3" accent4="accent4" accent5="accent5" accent6="accent6" hlink="hlink" folHlink="folHlink"/>
+  <p:notesStyle>
+    <a:lvl1pPr marL="0" algn="l" defTabSz="457200" rtl="0" eaLnBrk="1" latinLnBrk="0" hangingPunct="1">
+      <a:defRPr sz="1200" kern="1200">
+        <a:solidFill>
+          <a:schemeClr val="tx1"/>
+        </a:solidFill>
+        <a:latin typeface="+mn-lt"/>
+        <a:ea typeface="+mn-ea"/>
+        <a:cs typeface="+mn-cs"/>
+      </a:defRPr>
+    </a:lvl1pPr>
+    <a:lvl2pPr marL="457200" algn="l" defTabSz="457200" rtl="0" eaLnBrk="1" latinLnBrk="0" hangingPunct="1">
+      <a:defRPr sz="1200" kern="1200">
+        <a:solidFill>
+          <a:schemeClr val="tx1"/>
+        </a:solidFill>
+        <a:latin typeface="+mn-lt"/>
+        <a:ea typeface="+mn-ea"/>
+        <a:cs typeface="+mn-cs"/>
+      </a:defRPr>
+    </a:lvl2pPr>
+    <a:lvl3pPr marL="914400" algn="l" defTabSz="457200" rtl="0" eaLnBrk="1" latinLnBrk="0" hangingPunct="1">
+      <a:defRPr sz="1200" kern="1200">
+        <a:solidFill>
+          <a:schemeClr val="tx1"/>
+        </a:solidFill>
+        <a:latin typeface="+mn-lt"/>
+        <a:ea typeface="+mn-ea"/>
+        <a:cs typeface="+mn-cs"/>
+      </a:defRPr>
+    </a:lvl3pPr>
+    <a:lvl4pPr marL="1371600" algn="l" defTabSz="457200" rtl="0" eaLnBrk="1" latinLnBrk="0" hangingPunct="1">
+      <a:defRPr sz="1200" kern="1200">
+        <a:solidFill>
+          <a:schemeClr val="tx1"/>
+        </a:solidFill>
+        <a:latin typeface="+mn-lt"/>
+        <a:ea typeface="+mn-ea"/>
+        <a:cs typeface="+mn-cs"/>
+      </a:defRPr>
+    </a:lvl4pPr>
+    <a:lvl5pPr marL="1828800" algn="l" defTabSz="457200" rtl="0" eaLnBrk="1" latinLnBrk="0" hangingPunct="1">
+      <a:defRPr sz="1200" kern="1200">
+        <a:solidFill>
+          <a:schemeClr val="tx1"/>
+        </a:solidFill>
+        <a:latin typeface="+mn-lt"/>
+        <a:ea typeface="+mn-ea"/>
+        <a:cs typeface="+mn-cs"/>
+      </a:defRPr>
+    </a:lvl5pPr>
+    <a:lvl6pPr marL="2286000" algn="l" defTabSz="457200" rtl="0" eaLnBrk="1" latinLnBrk="0" hangingPunct="1">
+      <a:defRPr sz="1200" kern="1200">
+        <a:solidFill>
+          <a:schemeClr val="tx1"/>
+        </a:solidFill>
+        <a:latin typeface="+mn-lt"/>
+        <a:ea typeface="+mn-ea"/>
+        <a:cs typeface="+mn-cs"/>
+      </a:defRPr>
+    </a:lvl6pPr>
+    <a:lvl7pPr marL="2743200" algn="l" defTabSz="457200" rtl="0" eaLnBrk="1" latinLnBrk="0" hangingPunct="1">
+      <a:defRPr sz="1200" kern="1200">
+        <a:solidFill>
+          <a:schemeClr val="tx1"/>
+        </a:solidFill>
+        <a:latin typeface="+mn-lt"/>
+        <a:ea typeface="+mn-ea"/>
+        <a:cs typeface="+mn-cs"/>
+      </a:defRPr>
+    </a:lvl7pPr>
+    <a:lvl8pPr marL="3200400" algn="l" defTabSz="457200" rtl="0" eaLnBrk="1" latinLnBrk="0" hangingPunct="1">
+      <a:defRPr sz="1200" kern="1200">
+        <a:solidFill>
+          <a:schemeClr val="tx1"/>
+        </a:solidFill>
+        <a:latin typeface="+mn-lt"/>
+        <a:ea typeface="+mn-ea"/>
+        <a:cs typeface="+mn-cs"/>
+      </a:defRPr>
+    </a:lvl8pPr>
+    <a:lvl9pPr marL="3657600" algn="l" defTabSz="457200" rtl="0" eaLnBrk="1" latinLnBrk="0" hangingPunct="1">
+      <a:defRPr sz="1200" kern="1200">
+        <a:solidFill>
+          <a:schemeClr val="tx1"/>
+        </a:solidFill>
+        <a:latin typeface="+mn-lt"/>
+        <a:ea typeface="+mn-ea"/>
+        <a:cs typeface="+mn-cs"/>
+      </a:defRPr>
+    </a:lvl9pPr>
+  </p:notesStyle>
+</p:notesMaster>
+</file>
+
+<file path=ppt/notesSlides/notesSlide1.xml><?xml version="1.0" encoding="utf-8"?>
+<p:notes xmlns:a="http://schemas.openxmlformats.org/drawingml/2006/main" xmlns:p="http://schemas.openxmlformats.org/presentationml/2006/main" xmlns:r="http://schemas.openxmlformats.org/officeDocument/2006/relationships">
+  <p:cSld>
+    <p:spTree>
+      <p:nvGrpSpPr>
+        <p:cNvPr id="1" name=""/>
+        <p:cNvGrpSpPr/>
+        <p:nvPr/>
+      </p:nvGrpSpPr>
+      <p:grpSpPr>
+        <a:xfrm>
+          <a:off x="0" y="0"/>
+          <a:ext cx="0" cy="0"/>
+          <a:chOff x="0" y="0"/>
+          <a:chExt cx="0" cy="0"/>
+        </a:xfrm>
+      </p:grpSpPr>
+      <p:sp>
+        <p:nvSpPr>
+          <p:cNvPr id="2" name="Slide Image Placeholder 1"/>
+          <p:cNvSpPr>
+            <a:spLocks noGrp="1"/>
+          </p:cNvSpPr>
+          <p:nvPr>
+            <p:ph type="sldImg" idx="2"/>
+          </p:nvPr>
+        </p:nvSpPr>
+        <p:spPr/>
+      </p:sp>
+      <p:sp>
+        <p:nvSpPr>
+          <p:cNvPr id="3" name="Notes Placeholder 2"/>
+          <p:cNvSpPr>
+            <a:spLocks noGrp="1"/>
+          </p:cNvSpPr>
+          <p:nvPr>
+            <p:ph type="body" idx="3" sz="quarter"/>
+          </p:nvPr>
+        </p:nvSpPr>
+        <p:spPr/>
+        <p:txBody>
+          <a:bodyPr/>
+          <a:lstStyle/>
+          <a:p>
+            <a:r>
+              <a:t>Frame this as the map for the whole Topic — set expectations before teaching. This Topic is</a:t>
+            </a:r>
+          </a:p>
+          <a:p>
+            <a:r>
+              <a:t>different from 2–4: no new analysis, all communication.</a:t>
+            </a:r>
+          </a:p>
+          <a:p>
+            <a:r>
+              <a:t>• The written business case is DONE (Topics 2–4). Today is about selling it: preparing,</a:t>
+            </a:r>
+          </a:p>
+          <a:p>
+            <a:r>
+              <a:t>  delivering, and defending it in the room.</a:t>
+            </a:r>
+          </a:p>
+          <a:p>
+            <a:r>
+              <a:t>• Three moves (the bolded line) — prepare &amp; rehearse → deliver → handle the room; each is a</a:t>
+            </a:r>
+          </a:p>
+          <a:p>
+            <a:r>
+              <a:t>  section today and each maps to a phase of the real event.</a:t>
+            </a:r>
+          </a:p>
+          <a:p>
+            <a:r>
+              <a:t>• Stress the assessment framing (last bullet): this is the presentation EVENT — an OBSERVED</a:t>
+            </a:r>
+          </a:p>
+          <a:p>
+            <a:r>
+              <a:t>  assessment. HOW you present is marked, not just what you built. A brilliant case badly pitched</a:t>
+            </a:r>
+          </a:p>
+          <a:p>
+            <a:r>
+              <a:t>  still fails Part B.</a:t>
+            </a:r>
+          </a:p>
+          <a:p>
+            <a:r>
+              <a:t>Misconception to pre-empt: "the marks are all in the document." No — Part B assesses the live</a:t>
+            </a:r>
+          </a:p>
+          <a:p>
+            <a:r>
+              <a:t>delivery and Q&amp;A; a strong writer who can't present loses those criteria.</a:t>
+            </a:r>
+          </a:p>
+          <a:p>
+            <a:r>
+              <a:t>Question to pose: "Your business case is written and correct. What could still go wrong in the</a:t>
+            </a:r>
+          </a:p>
+          <a:p>
+            <a:r>
+              <a:t>boardroom?" — surfaces that communication is a separate, assessed skill.</a:t>
+            </a:r>
+          </a:p>
+          <a:p>
+            <a:r>
+              <a:t>UoC/AT1 tie: the whole Topic prepares AT1 Part B (board presentation, criteria B1–B9); today</a:t>
+            </a:r>
+          </a:p>
+          <a:p>
+            <a:r>
+              <a:t>rehearses on Ledgerline what AT1 assesses on the LMS.</a:t>
+            </a:r>
+          </a:p>
+        </p:txBody>
+      </p:sp>
+      <p:sp>
+        <p:nvSpPr>
+          <p:cNvPr id="4" name="Slide Number Placeholder 3"/>
+          <p:cNvSpPr>
+            <a:spLocks noGrp="1"/>
+          </p:cNvSpPr>
+          <p:nvPr>
+            <p:ph type="sldNum" idx="5" sz="quarter"/>
+          </p:nvPr>
+        </p:nvSpPr>
+        <p:spPr/>
+      </p:sp>
+    </p:spTree>
+  </p:cSld>
+  <p:clrMapOvr>
+    <a:masterClrMapping/>
+  </p:clrMapOvr>
+</p:notes>
+</file>
+
+<file path=ppt/notesSlides/notesSlide10.xml><?xml version="1.0" encoding="utf-8"?>
+<p:notes xmlns:a="http://schemas.openxmlformats.org/drawingml/2006/main" xmlns:p="http://schemas.openxmlformats.org/presentationml/2006/main" xmlns:r="http://schemas.openxmlformats.org/officeDocument/2006/relationships">
+  <p:cSld>
+    <p:spTree>
+      <p:nvGrpSpPr>
+        <p:cNvPr id="1" name=""/>
+        <p:cNvGrpSpPr/>
+        <p:nvPr/>
+      </p:nvGrpSpPr>
+      <p:grpSpPr>
+        <a:xfrm>
+          <a:off x="0" y="0"/>
+          <a:ext cx="0" cy="0"/>
+          <a:chOff x="0" y="0"/>
+          <a:chExt cx="0" cy="0"/>
+        </a:xfrm>
+      </p:grpSpPr>
+      <p:sp>
+        <p:nvSpPr>
+          <p:cNvPr id="2" name="Slide Image Placeholder 1"/>
+          <p:cNvSpPr>
+            <a:spLocks noGrp="1"/>
+          </p:cNvSpPr>
+          <p:nvPr>
+            <p:ph type="sldImg" idx="2"/>
+          </p:nvPr>
+        </p:nvSpPr>
+        <p:spPr/>
+      </p:sp>
+      <p:sp>
+        <p:nvSpPr>
+          <p:cNvPr id="3" name="Notes Placeholder 2"/>
+          <p:cNvSpPr>
+            <a:spLocks noGrp="1"/>
+          </p:cNvSpPr>
+          <p:nvPr>
+            <p:ph type="body" idx="3" sz="quarter"/>
+          </p:nvPr>
+        </p:nvSpPr>
+        <p:spPr/>
+        <p:txBody>
+          <a:bodyPr/>
+          <a:lstStyle/>
+          <a:p>
+            <a:r>
+              <a:t>Facilitation — the Section 2 practice: students present their rehearsed deck to a mock board. This</a:t>
+            </a:r>
+          </a:p>
+          <a:p>
+            <a:r>
+              <a:t>is the closest rehearsal for AT1 Part B; run it like the real event.</a:t>
+            </a:r>
+          </a:p>
+          <a:p>
+            <a:r>
+              <a:t>Tell students: "You're up. Present your board deck to the mock board — that's your peers plus me</a:t>
+            </a:r>
+          </a:p>
+          <a:p>
+            <a:r>
+              <a:t>role-playing Sam Walker and Pat Lin. Ten to fifteen minutes. Open with the ask, walk us through</a:t>
+            </a:r>
+          </a:p>
+          <a:p>
+            <a:r>
+              <a:t>it, and speak to us as a non-technical board — we're deciding, not marking your cloud knowledge."</a:t>
+            </a:r>
+          </a:p>
+          <a:p>
+            <a:r>
+              <a:t>Steps:</a:t>
+            </a:r>
+          </a:p>
+          <a:p>
+            <a:r>
+              <a:t>1. Open with the ask — name the decision you're seeking.</a:t>
+            </a:r>
+          </a:p>
+          <a:p>
+            <a:r>
+              <a:t>2. Walk context → gap → options → recommendation → cost/risk → plan.</a:t>
+            </a:r>
+          </a:p>
+          <a:p>
+            <a:r>
+              <a:t>3. Translate technical terms as you go; eyes on the room, not the slides.</a:t>
+            </a:r>
+          </a:p>
+          <a:p>
+            <a:r>
+              <a:t>Must produce: a delivered 10–15 min board presentation of their practice BC, presented to persuade.</a:t>
+            </a:r>
+          </a:p>
+          <a:p>
+            <a:r>
+              <a:t>Timing: 10–15 min each, then feedback. Where they get stuck: reading off the slides (remind them</a:t>
+            </a:r>
+          </a:p>
+          <a:p>
+            <a:r>
+              <a:t>the deck is a prompt, they rehearsed for this); running over time (call time at 15); dropping into</a:t>
+            </a:r>
+          </a:p>
+          <a:p>
+            <a:r>
+              <a:t>jargon (flag it live as a board member would — "what's an ALB?").</a:t>
+            </a:r>
+          </a:p>
+          <a:p>
+            <a:r>
+              <a:t>Share-back: peers + trainer give quick feedback after each; the Q&amp;A is the NEXT activity — keep</a:t>
+            </a:r>
+          </a:p>
+          <a:p>
+            <a:r>
+              <a:t>this one to the presentation itself.</a:t>
+            </a:r>
+          </a:p>
+          <a:p>
+            <a:r>
+              <a:t>No-leakage note: practice delivery on Ledgerline; AT1 Part B is the same event on the LMS. Board</a:t>
+            </a:r>
+          </a:p>
+          <a:p>
+            <a:r>
+              <a:t>roles (Sam Walker / Pat Lin) mirror the AT1 panel — comparable, not identical.</a:t>
+            </a:r>
+          </a:p>
+        </p:txBody>
+      </p:sp>
+      <p:sp>
+        <p:nvSpPr>
+          <p:cNvPr id="4" name="Slide Number Placeholder 3"/>
+          <p:cNvSpPr>
+            <a:spLocks noGrp="1"/>
+          </p:cNvSpPr>
+          <p:nvPr>
+            <p:ph type="sldNum" idx="5" sz="quarter"/>
+          </p:nvPr>
+        </p:nvSpPr>
+        <p:spPr/>
+      </p:sp>
+    </p:spTree>
+  </p:cSld>
+  <p:clrMapOvr>
+    <a:masterClrMapping/>
+  </p:clrMapOvr>
+</p:notes>
+</file>
+
+<file path=ppt/notesSlides/notesSlide11.xml><?xml version="1.0" encoding="utf-8"?>
+<p:notes xmlns:a="http://schemas.openxmlformats.org/drawingml/2006/main" xmlns:p="http://schemas.openxmlformats.org/presentationml/2006/main" xmlns:r="http://schemas.openxmlformats.org/officeDocument/2006/relationships">
+  <p:cSld>
+    <p:spTree>
+      <p:nvGrpSpPr>
+        <p:cNvPr id="1" name=""/>
+        <p:cNvGrpSpPr/>
+        <p:nvPr/>
+      </p:nvGrpSpPr>
+      <p:grpSpPr>
+        <a:xfrm>
+          <a:off x="0" y="0"/>
+          <a:ext cx="0" cy="0"/>
+          <a:chOff x="0" y="0"/>
+          <a:chExt cx="0" cy="0"/>
+        </a:xfrm>
+      </p:grpSpPr>
+      <p:sp>
+        <p:nvSpPr>
+          <p:cNvPr id="2" name="Slide Image Placeholder 1"/>
+          <p:cNvSpPr>
+            <a:spLocks noGrp="1"/>
+          </p:cNvSpPr>
+          <p:nvPr>
+            <p:ph type="sldImg" idx="2"/>
+          </p:nvPr>
+        </p:nvSpPr>
+        <p:spPr/>
+      </p:sp>
+      <p:sp>
+        <p:nvSpPr>
+          <p:cNvPr id="3" name="Notes Placeholder 2"/>
+          <p:cNvSpPr>
+            <a:spLocks noGrp="1"/>
+          </p:cNvSpPr>
+          <p:nvPr>
+            <p:ph type="body" idx="3" sz="quarter"/>
+          </p:nvPr>
+        </p:nvSpPr>
+        <p:spPr/>
+        <p:txBody>
+          <a:bodyPr/>
+          <a:lstStyle/>
+          <a:p>
+            <a:r>
+              <a:t>Open Section 3 — reset expectations about Q&amp;A. Students treat it as a formality to survive; it's</a:t>
+            </a:r>
+          </a:p>
+          <a:p>
+            <a:r>
+              <a:t>an assessed test of whether they own their analysis.</a:t>
+            </a:r>
+          </a:p>
+          <a:p>
+            <a:r>
+              <a:t>• The point: the board's questions PROBE whether you understand your own case and the principles</a:t>
+            </a:r>
+          </a:p>
+          <a:p>
+            <a:r>
+              <a:t>  behind it. They're not small talk — they're where the analysis knowledge (Topics 1–4) is</a:t>
+            </a:r>
+          </a:p>
+          <a:p>
+            <a:r>
+              <a:t>  examined live.</a:t>
+            </a:r>
+          </a:p>
+          <a:p>
+            <a:r>
+              <a:t>• The rule (accent bold): defend your case FROM YOUR EVIDENCE — your CBA, your risk register —</a:t>
+            </a:r>
+          </a:p>
+          <a:p>
+            <a:r>
+              <a:t>  don't bluff. A confident wrong answer is worse than "let me point you to the numbers".</a:t>
+            </a:r>
+          </a:p>
+          <a:p>
+            <a:r>
+              <a:t>Misconception to pre-empt: "Q&amp;A is just wrapping up." No — it's a graded part of Part B; the board</a:t>
+            </a:r>
+          </a:p>
+          <a:p>
+            <a:r>
+              <a:t>deliberately tests the reasoning behind your recommendation. Under-preparing for it forfeits marks.</a:t>
+            </a:r>
+          </a:p>
+          <a:p>
+            <a:r>
+              <a:t>Question to pose: "The board asks 'why PaaS for the database and not IaaS?' — is that a hostile</a:t>
+            </a:r>
+          </a:p>
+          <a:p>
+            <a:r>
+              <a:t>question or an assessment?" (an assessment — they're checking you understand your own design</a:t>
+            </a:r>
+          </a:p>
+          <a:p>
+            <a:r>
+              <a:t>choice).</a:t>
+            </a:r>
+          </a:p>
+          <a:p>
+            <a:r>
+              <a:t>UoC/AT1 tie: 502 FS Oral communication → B9 (articulate complex concepts under questioning); Q&amp;A</a:t>
+            </a:r>
+          </a:p>
+          <a:p>
+            <a:r>
+              <a:t>is where the probed knowledge from Topics 1–4 is defended, not re-taught.</a:t>
+            </a:r>
+          </a:p>
+        </p:txBody>
+      </p:sp>
+      <p:sp>
+        <p:nvSpPr>
+          <p:cNvPr id="4" name="Slide Number Placeholder 3"/>
+          <p:cNvSpPr>
+            <a:spLocks noGrp="1"/>
+          </p:cNvSpPr>
+          <p:nvPr>
+            <p:ph type="sldNum" idx="5" sz="quarter"/>
+          </p:nvPr>
+        </p:nvSpPr>
+        <p:spPr/>
+      </p:sp>
+    </p:spTree>
+  </p:cSld>
+  <p:clrMapOvr>
+    <a:masterClrMapping/>
+  </p:clrMapOvr>
+</p:notes>
+</file>
+
+<file path=ppt/notesSlides/notesSlide12.xml><?xml version="1.0" encoding="utf-8"?>
+<p:notes xmlns:a="http://schemas.openxmlformats.org/drawingml/2006/main" xmlns:p="http://schemas.openxmlformats.org/presentationml/2006/main" xmlns:r="http://schemas.openxmlformats.org/officeDocument/2006/relationships">
+  <p:cSld>
+    <p:spTree>
+      <p:nvGrpSpPr>
+        <p:cNvPr id="1" name=""/>
+        <p:cNvGrpSpPr/>
+        <p:nvPr/>
+      </p:nvGrpSpPr>
+      <p:grpSpPr>
+        <a:xfrm>
+          <a:off x="0" y="0"/>
+          <a:ext cx="0" cy="0"/>
+          <a:chOff x="0" y="0"/>
+          <a:chExt cx="0" cy="0"/>
+        </a:xfrm>
+      </p:grpSpPr>
+      <p:sp>
+        <p:nvSpPr>
+          <p:cNvPr id="2" name="Slide Image Placeholder 1"/>
+          <p:cNvSpPr>
+            <a:spLocks noGrp="1"/>
+          </p:cNvSpPr>
+          <p:nvPr>
+            <p:ph type="sldImg" idx="2"/>
+          </p:nvPr>
+        </p:nvSpPr>
+        <p:spPr/>
+      </p:sp>
+      <p:sp>
+        <p:nvSpPr>
+          <p:cNvPr id="3" name="Notes Placeholder 2"/>
+          <p:cNvSpPr>
+            <a:spLocks noGrp="1"/>
+          </p:cNvSpPr>
+          <p:nvPr>
+            <p:ph type="body" idx="3" sz="quarter"/>
+          </p:nvPr>
+        </p:nvSpPr>
+        <p:spPr/>
+        <p:txBody>
+          <a:bodyPr/>
+          <a:lstStyle/>
+          <a:p>
+            <a:r>
+              <a:t>Teach the Q&amp;A technique — listening and questioning is itself an assessed skill (B8), not just</a:t>
+            </a:r>
+          </a:p>
+          <a:p>
+            <a:r>
+              <a:t>getting the answer right.</a:t>
+            </a:r>
+          </a:p>
+          <a:p>
+            <a:r>
+              <a:t>• The sequence: let the question LAND; clarify if unsure — "do you mean cost or risk?"; answer</a:t>
+            </a:r>
+          </a:p>
+          <a:p>
+            <a:r>
+              <a:t>  DIRECTLY, pointing to your evidence; then CHECK it landed before moving on.</a:t>
+            </a:r>
+          </a:p>
+          <a:p>
+            <a:r>
+              <a:t>• Model each move. Clarifying isn't weakness — it shows you're listening and stops you answering</a:t>
+            </a:r>
+          </a:p>
+          <a:p>
+            <a:r>
+              <a:t>  the wrong question. Pointing to evidence (your CBA, your risk register) beats asserting.</a:t>
+            </a:r>
+          </a:p>
+          <a:p>
+            <a:r>
+              <a:t>• The contrast (accent bold): a crisp "good question — here's the data" beats a long ramble. Length</a:t>
+            </a:r>
+          </a:p>
+          <a:p>
+            <a:r>
+              <a:t>  isn't authority; precision is.</a:t>
+            </a:r>
+          </a:p>
+          <a:p>
+            <a:r>
+              <a:t>Misconception to pre-empt: "answer immediately and at length to look confident." Rambling reads as</a:t>
+            </a:r>
+          </a:p>
+          <a:p>
+            <a:r>
+              <a:t>not knowing; a clarify-then-evidence answer reads as command of the material.</a:t>
+            </a:r>
+          </a:p>
+          <a:p>
+            <a:r>
+              <a:t>Question to pose: "The board asks something ambiguous — what do you do before answering?" (clarify</a:t>
+            </a:r>
+          </a:p>
+          <a:p>
+            <a:r>
+              <a:t>what they're really asking, so you answer the right question).</a:t>
+            </a:r>
+          </a:p>
+          <a:p>
+            <a:r>
+              <a:t>UoC/AT1 tie: 517 FS Oral Communication → B8 (elicit information with effective listening/questioning)</a:t>
+            </a:r>
+          </a:p>
+          <a:p>
+            <a:r>
+              <a:t>and 502 FS → B9; the listen-clarify-answer-check loop is exactly what B8/B9 assess.</a:t>
+            </a:r>
+          </a:p>
+        </p:txBody>
+      </p:sp>
+      <p:sp>
+        <p:nvSpPr>
+          <p:cNvPr id="4" name="Slide Number Placeholder 3"/>
+          <p:cNvSpPr>
+            <a:spLocks noGrp="1"/>
+          </p:cNvSpPr>
+          <p:nvPr>
+            <p:ph type="sldNum" idx="5" sz="quarter"/>
+          </p:nvPr>
+        </p:nvSpPr>
+        <p:spPr/>
+      </p:sp>
+    </p:spTree>
+  </p:cSld>
+  <p:clrMapOvr>
+    <a:masterClrMapping/>
+  </p:clrMapOvr>
+</p:notes>
+</file>
+
+<file path=ppt/notesSlides/notesSlide13.xml><?xml version="1.0" encoding="utf-8"?>
+<p:notes xmlns:a="http://schemas.openxmlformats.org/drawingml/2006/main" xmlns:p="http://schemas.openxmlformats.org/presentationml/2006/main" xmlns:r="http://schemas.openxmlformats.org/officeDocument/2006/relationships">
+  <p:cSld>
+    <p:spTree>
+      <p:nvGrpSpPr>
+        <p:cNvPr id="1" name=""/>
+        <p:cNvGrpSpPr/>
+        <p:nvPr/>
+      </p:nvGrpSpPr>
+      <p:grpSpPr>
+        <a:xfrm>
+          <a:off x="0" y="0"/>
+          <a:ext cx="0" cy="0"/>
+          <a:chOff x="0" y="0"/>
+          <a:chExt cx="0" cy="0"/>
+        </a:xfrm>
+      </p:grpSpPr>
+      <p:sp>
+        <p:nvSpPr>
+          <p:cNvPr id="2" name="Slide Image Placeholder 1"/>
+          <p:cNvSpPr>
+            <a:spLocks noGrp="1"/>
+          </p:cNvSpPr>
+          <p:nvPr>
+            <p:ph type="sldImg" idx="2"/>
+          </p:nvPr>
+        </p:nvSpPr>
+        <p:spPr/>
+      </p:sp>
+      <p:sp>
+        <p:nvSpPr>
+          <p:cNvPr id="3" name="Notes Placeholder 2"/>
+          <p:cNvSpPr>
+            <a:spLocks noGrp="1"/>
+          </p:cNvSpPr>
+          <p:nvPr>
+            <p:ph type="body" idx="3" sz="quarter"/>
+          </p:nvPr>
+        </p:nvSpPr>
+        <p:spPr/>
+        <p:txBody>
+          <a:bodyPr/>
+          <a:lstStyle/>
+          <a:p>
+            <a:r>
+              <a:t>Practical prep slide — name the dimensions boards probe so students can pre-arm answers in their</a:t>
+            </a:r>
+          </a:p>
+          <a:p>
+            <a:r>
+              <a:t>rehearsal. These questions come from THEIR OWN Topics 1–4 work.</a:t>
+            </a:r>
+          </a:p>
+          <a:p>
+            <a:r>
+              <a:t>• Walk the dimensions: cost assumptions (what if pricing changes?); risk (the single biggest reason</a:t>
+            </a:r>
+          </a:p>
+          <a:p>
+            <a:r>
+              <a:t>  to say no?); prioritisation (which change carries the most risk?); strategic fit (what if YAT</a:t>
+            </a:r>
+          </a:p>
+          <a:p>
+            <a:r>
+              <a:t>  opens a second campus in Year 3?); service models &amp; standards (why IaaS/PaaS here? which</a:t>
+            </a:r>
+          </a:p>
+          <a:p>
+            <a:r>
+              <a:t>  standards informed it?).</a:t>
+            </a:r>
+          </a:p>
+          <a:p>
+            <a:r>
+              <a:t>• The key line (accent bold): these come from your own Topics 1–4 work — DEFEND, don't re-derive.</a:t>
+            </a:r>
+          </a:p>
+          <a:p>
+            <a:r>
+              <a:t>  The answer already exists in your analysis; your job is to retrieve and state it, not rebuild it</a:t>
+            </a:r>
+          </a:p>
+          <a:p>
+            <a:r>
+              <a:t>  live.</a:t>
+            </a:r>
+          </a:p>
+          <a:p>
+            <a:r>
+              <a:t>Misconception to pre-empt: "they'll ask something I've never thought about." Almost never — the</a:t>
+            </a:r>
+          </a:p>
+          <a:p>
+            <a:r>
+              <a:t>probes track your own case; if you know your analysis, you have the answers. The panic comes from</a:t>
+            </a:r>
+          </a:p>
+          <a:p>
+            <a:r>
+              <a:t>not having reviewed your own reasoning.</a:t>
+            </a:r>
+          </a:p>
+          <a:p>
+            <a:r>
+              <a:t>Question to pose: "Pick one of these and answer it for Ledgerline right now — from what you already</a:t>
+            </a:r>
+          </a:p>
+          <a:p>
+            <a:r>
+              <a:t>analysed." (proves the answer is already in their work).</a:t>
+            </a:r>
+          </a:p>
+          <a:p>
+            <a:r>
+              <a:t>UoC/AT1 tie: defends the probed knowledge (517 PC 1.1–3.2, 401 KE 1/3, 502 PC 1.1/1.2) → B8/B9;</a:t>
+            </a:r>
+          </a:p>
+          <a:p>
+            <a:r>
+              <a:t>this is the applied-from-earlier content the coverage spec flags as defended, not re-taught.</a:t>
+            </a:r>
+          </a:p>
+        </p:txBody>
+      </p:sp>
+      <p:sp>
+        <p:nvSpPr>
+          <p:cNvPr id="4" name="Slide Number Placeholder 3"/>
+          <p:cNvSpPr>
+            <a:spLocks noGrp="1"/>
+          </p:cNvSpPr>
+          <p:nvPr>
+            <p:ph type="sldNum" idx="5" sz="quarter"/>
+          </p:nvPr>
+        </p:nvSpPr>
+        <p:spPr/>
+      </p:sp>
+    </p:spTree>
+  </p:cSld>
+  <p:clrMapOvr>
+    <a:masterClrMapping/>
+  </p:clrMapOvr>
+</p:notes>
+</file>
+
+<file path=ppt/notesSlides/notesSlide14.xml><?xml version="1.0" encoding="utf-8"?>
+<p:notes xmlns:a="http://schemas.openxmlformats.org/drawingml/2006/main" xmlns:p="http://schemas.openxmlformats.org/presentationml/2006/main" xmlns:r="http://schemas.openxmlformats.org/officeDocument/2006/relationships">
+  <p:cSld>
+    <p:spTree>
+      <p:nvGrpSpPr>
+        <p:cNvPr id="1" name=""/>
+        <p:cNvGrpSpPr/>
+        <p:nvPr/>
+      </p:nvGrpSpPr>
+      <p:grpSpPr>
+        <a:xfrm>
+          <a:off x="0" y="0"/>
+          <a:ext cx="0" cy="0"/>
+          <a:chOff x="0" y="0"/>
+          <a:chExt cx="0" cy="0"/>
+        </a:xfrm>
+      </p:grpSpPr>
+      <p:sp>
+        <p:nvSpPr>
+          <p:cNvPr id="2" name="Slide Image Placeholder 1"/>
+          <p:cNvSpPr>
+            <a:spLocks noGrp="1"/>
+          </p:cNvSpPr>
+          <p:nvPr>
+            <p:ph type="sldImg" idx="2"/>
+          </p:nvPr>
+        </p:nvSpPr>
+        <p:spPr/>
+      </p:sp>
+      <p:sp>
+        <p:nvSpPr>
+          <p:cNvPr id="3" name="Notes Placeholder 2"/>
+          <p:cNvSpPr>
+            <a:spLocks noGrp="1"/>
+          </p:cNvSpPr>
+          <p:nvPr>
+            <p:ph type="body" idx="3" sz="quarter"/>
+          </p:nvPr>
+        </p:nvSpPr>
+        <p:spPr/>
+        <p:txBody>
+          <a:bodyPr/>
+          <a:lstStyle/>
+          <a:p>
+            <a:r>
+              <a:t>Teach the close of the event — the part students forget under pressure. Seeking feedback and</a:t>
+            </a:r>
+          </a:p>
+          <a:p>
+            <a:r>
+              <a:t>obtaining sign-off are distinct assessed acts (B5/B6), and the sign-off is the whole point.</a:t>
+            </a:r>
+          </a:p>
+          <a:p>
+            <a:r>
+              <a:t>• Walk the closing moves: explicitly SEEK and RESPOND to the board's feedback (confirm you've</a:t>
+            </a:r>
+          </a:p>
+          <a:p>
+            <a:r>
+              <a:t>  understood it — reflect it back); CAPTURE it in the Feedback Record; OBTAIN the board's sign-off</a:t>
+            </a:r>
+          </a:p>
+          <a:p>
+            <a:r>
+              <a:t>  on the action plan.</a:t>
+            </a:r>
+          </a:p>
+          <a:p>
+            <a:r>
+              <a:t>• The message (accent bold): the decision is the point of the whole exercise — ASK for it. A</a:t>
+            </a:r>
+          </a:p>
+          <a:p>
+            <a:r>
+              <a:t>  presentation that ends without securing sign-off hasn't finished the job.</a:t>
+            </a:r>
+          </a:p>
+          <a:p>
+            <a:r>
+              <a:t>Misconception to pre-empt: "if the board seems happy, sign-off is implied." No — you must explicitly</a:t>
+            </a:r>
+          </a:p>
+          <a:p>
+            <a:r>
+              <a:t>seek it and capture the feedback; an assumed decision isn't evidenced. The words "can I have your</a:t>
+            </a:r>
+          </a:p>
+          <a:p>
+            <a:r>
+              <a:t>approval to proceed?" have to be said.</a:t>
+            </a:r>
+          </a:p>
+          <a:p>
+            <a:r>
+              <a:t>Question to pose: "The board nods and says 'good work' — are you done?" (no — seek feedback,</a:t>
+            </a:r>
+          </a:p>
+          <a:p>
+            <a:r>
+              <a:t>confirm understanding, capture it, and explicitly obtain sign-off).</a:t>
+            </a:r>
+          </a:p>
+          <a:p>
+            <a:r>
+              <a:t>UoC/AT1 tie: 401 PC 4.2 → B5 (seek/respond to feedback), 502 PC 5.2 → B6 (confirm/seek/respond with</a:t>
+            </a:r>
+          </a:p>
+          <a:p>
+            <a:r>
+              <a:t>required personnel); securing sign-off is the closing Part-B act.</a:t>
+            </a:r>
+          </a:p>
+        </p:txBody>
+      </p:sp>
+      <p:sp>
+        <p:nvSpPr>
+          <p:cNvPr id="4" name="Slide Number Placeholder 3"/>
+          <p:cNvSpPr>
+            <a:spLocks noGrp="1"/>
+          </p:cNvSpPr>
+          <p:nvPr>
+            <p:ph type="sldNum" idx="5" sz="quarter"/>
+          </p:nvPr>
+        </p:nvSpPr>
+        <p:spPr/>
+      </p:sp>
+    </p:spTree>
+  </p:cSld>
+  <p:clrMapOvr>
+    <a:masterClrMapping/>
+  </p:clrMapOvr>
+</p:notes>
+</file>
+
+<file path=ppt/notesSlides/notesSlide15.xml><?xml version="1.0" encoding="utf-8"?>
+<p:notes xmlns:a="http://schemas.openxmlformats.org/drawingml/2006/main" xmlns:p="http://schemas.openxmlformats.org/presentationml/2006/main" xmlns:r="http://schemas.openxmlformats.org/officeDocument/2006/relationships">
+  <p:cSld>
+    <p:spTree>
+      <p:nvGrpSpPr>
+        <p:cNvPr id="1" name=""/>
+        <p:cNvGrpSpPr/>
+        <p:nvPr/>
+      </p:nvGrpSpPr>
+      <p:grpSpPr>
+        <a:xfrm>
+          <a:off x="0" y="0"/>
+          <a:ext cx="0" cy="0"/>
+          <a:chOff x="0" y="0"/>
+          <a:chExt cx="0" cy="0"/>
+        </a:xfrm>
+      </p:grpSpPr>
+      <p:sp>
+        <p:nvSpPr>
+          <p:cNvPr id="2" name="Slide Image Placeholder 1"/>
+          <p:cNvSpPr>
+            <a:spLocks noGrp="1"/>
+          </p:cNvSpPr>
+          <p:nvPr>
+            <p:ph type="sldImg" idx="2"/>
+          </p:nvPr>
+        </p:nvSpPr>
+        <p:spPr/>
+      </p:sp>
+      <p:sp>
+        <p:nvSpPr>
+          <p:cNvPr id="3" name="Notes Placeholder 2"/>
+          <p:cNvSpPr>
+            <a:spLocks noGrp="1"/>
+          </p:cNvSpPr>
+          <p:nvPr>
+            <p:ph type="body" idx="3" sz="quarter"/>
+          </p:nvPr>
+        </p:nvSpPr>
+        <p:spPr/>
+        <p:txBody>
+          <a:bodyPr/>
+          <a:lstStyle/>
+          <a:p>
+            <a:r>
+              <a:t>Facilitation — the Section 3 practice: after each pitch the mock board runs Q&amp;A, gives feedback,</a:t>
+            </a:r>
+          </a:p>
+          <a:p>
+            <a:r>
+              <a:t>and signs off. This completes the Part-B rehearsal. Run it straight after each presenter delivers.</a:t>
+            </a:r>
+          </a:p>
+          <a:p>
+            <a:r>
+              <a:t>Tell students: "After you present, the board asks three to five questions, gives feedback, and</a:t>
+            </a:r>
+          </a:p>
+          <a:p>
+            <a:r>
+              <a:t>makes a decision. Presenter — your job is to handle the room: clarify, answer from your evidence,</a:t>
+            </a:r>
+          </a:p>
+          <a:p>
+            <a:r>
+              <a:t>seek and respond to the feedback, capture it, and close by asking for sign-off. Board — probe</a:t>
+            </a:r>
+          </a:p>
+          <a:p>
+            <a:r>
+              <a:t>across the dimensions we listed."</a:t>
+            </a:r>
+          </a:p>
+          <a:p>
+            <a:r>
+              <a:t>Steps:</a:t>
+            </a:r>
+          </a:p>
+          <a:p>
+            <a:r>
+              <a:t>1. Presenter: clarify → answer from your evidence → seek/respond to feedback → capture it in the</a:t>
+            </a:r>
+          </a:p>
+          <a:p>
+            <a:r>
+              <a:t>   Feedback Record → obtain the sign-off.</a:t>
+            </a:r>
+          </a:p>
+          <a:p>
+            <a:r>
+              <a:t>2. Board: probe across cost, risk, prioritisation, strategic fit, service models/standards.</a:t>
+            </a:r>
+          </a:p>
+          <a:p>
+            <a:r>
+              <a:t>Must produce: a handled Q&amp;A with feedback captured and an explicit sign-off asked for and recorded.</a:t>
+            </a:r>
+          </a:p>
+          <a:p>
+            <a:r>
+              <a:t>Timing: ~5 min each, then debrief. Where they get stuck: presenters answer then forget to ask for</a:t>
+            </a:r>
+          </a:p>
+          <a:p>
+            <a:r>
+              <a:t>the decision — prompt them ("how do you close?"); and they get defensive under probing — coach</a:t>
+            </a:r>
+          </a:p>
+          <a:p>
+            <a:r>
+              <a:t>clarify-then-evidence, not argue. Boards go too soft — push them to actually probe.</a:t>
+            </a:r>
+          </a:p>
+          <a:p>
+            <a:r>
+              <a:t>Share-back: quick debrief after each — what defence landed, where the close was missed.</a:t>
+            </a:r>
+          </a:p>
+          <a:p>
+            <a:r>
+              <a:t>No-leakage note: practice Q&amp;A on the Ledgerline case; AT1 Part B Q&amp;A is the same skill on the LMS</a:t>
+            </a:r>
+          </a:p>
+          <a:p>
+            <a:r>
+              <a:t>presentation. The board dimensions and roles mirror AT1 — comparable, not identical.</a:t>
+            </a:r>
+          </a:p>
+        </p:txBody>
+      </p:sp>
+      <p:sp>
+        <p:nvSpPr>
+          <p:cNvPr id="4" name="Slide Number Placeholder 3"/>
+          <p:cNvSpPr>
+            <a:spLocks noGrp="1"/>
+          </p:cNvSpPr>
+          <p:nvPr>
+            <p:ph type="sldNum" idx="5" sz="quarter"/>
+          </p:nvPr>
+        </p:nvSpPr>
+        <p:spPr/>
+      </p:sp>
+    </p:spTree>
+  </p:cSld>
+  <p:clrMapOvr>
+    <a:masterClrMapping/>
+  </p:clrMapOvr>
+</p:notes>
+</file>
+
+<file path=ppt/notesSlides/notesSlide2.xml><?xml version="1.0" encoding="utf-8"?>
+<p:notes xmlns:a="http://schemas.openxmlformats.org/drawingml/2006/main" xmlns:p="http://schemas.openxmlformats.org/presentationml/2006/main" xmlns:r="http://schemas.openxmlformats.org/officeDocument/2006/relationships">
+  <p:cSld>
+    <p:spTree>
+      <p:nvGrpSpPr>
+        <p:cNvPr id="1" name=""/>
+        <p:cNvGrpSpPr/>
+        <p:nvPr/>
+      </p:nvGrpSpPr>
+      <p:grpSpPr>
+        <a:xfrm>
+          <a:off x="0" y="0"/>
+          <a:ext cx="0" cy="0"/>
+          <a:chOff x="0" y="0"/>
+          <a:chExt cx="0" cy="0"/>
+        </a:xfrm>
+      </p:grpSpPr>
+      <p:sp>
+        <p:nvSpPr>
+          <p:cNvPr id="2" name="Slide Image Placeholder 1"/>
+          <p:cNvSpPr>
+            <a:spLocks noGrp="1"/>
+          </p:cNvSpPr>
+          <p:nvPr>
+            <p:ph type="sldImg" idx="2"/>
+          </p:nvPr>
+        </p:nvSpPr>
+        <p:spPr/>
+      </p:sp>
+      <p:sp>
+        <p:nvSpPr>
+          <p:cNvPr id="3" name="Notes Placeholder 2"/>
+          <p:cNvSpPr>
+            <a:spLocks noGrp="1"/>
+          </p:cNvSpPr>
+          <p:nvPr>
+            <p:ph type="body" idx="3" sz="quarter"/>
+          </p:nvPr>
+        </p:nvSpPr>
+        <p:spPr/>
+        <p:txBody>
+          <a:bodyPr/>
+          <a:lstStyle/>
+          <a:p>
+            <a:r>
+              <a:t>Open Section 1 — the core mindset for the prepare phase. Give it weight; students default to</a:t>
+            </a:r>
+          </a:p>
+          <a:p>
+            <a:r>
+              <a:t>pasting their document onto slides.</a:t>
+            </a:r>
+          </a:p>
+          <a:p>
+            <a:r>
+              <a:t>• The board ALREADY READ the document — so a board deck isn't the business case with slide</a:t>
+            </a:r>
+          </a:p>
+          <a:p>
+            <a:r>
+              <a:t>  borders. Reading it back to them wastes the room's time.</a:t>
+            </a:r>
+          </a:p>
+          <a:p>
+            <a:r>
+              <a:t>• The deck carries the SPINE only — the ask, the money, the risk, the plan; you fill the detail</a:t>
+            </a:r>
+          </a:p>
+          <a:p>
+            <a:r>
+              <a:t>  verbally. The slides prompt you; they aren't the script.</a:t>
+            </a:r>
+          </a:p>
+          <a:p>
+            <a:r>
+              <a:t>• The format target (bolded): 8–10 slides, one section each, with speaker notes, on the YAT Board</a:t>
+            </a:r>
+          </a:p>
+          <a:p>
+            <a:r>
+              <a:t>  Presentation Deck template — the exact shape AT1 Part B requires.</a:t>
+            </a:r>
+          </a:p>
+          <a:p>
+            <a:r>
+              <a:t>Misconception to pre-empt: "more slides / more text = more thorough." The opposite — a dense deck</a:t>
+            </a:r>
+          </a:p>
+          <a:p>
+            <a:r>
+              <a:t>signals you can't distil. The skill is choosing what earns a slide.</a:t>
+            </a:r>
+          </a:p>
+          <a:p>
+            <a:r>
+              <a:t>Question to pose: "If the board has read every word already, what is the deck actually FOR?" (to</a:t>
+            </a:r>
+          </a:p>
+          <a:p>
+            <a:r>
+              <a:t>steer the decision — a spine to talk to, not a re-read).</a:t>
+            </a:r>
+          </a:p>
+          <a:p>
+            <a:r>
+              <a:t>UoC/AT1 tie: 517 PC 2.4 / PC 3.3 (provide the evaluation and action plan to a superior) → B2/B3;</a:t>
+            </a:r>
+          </a:p>
+          <a:p>
+            <a:r>
+              <a:t>the deck is the vehicle for both.</a:t>
+            </a:r>
+          </a:p>
+        </p:txBody>
+      </p:sp>
+      <p:sp>
+        <p:nvSpPr>
+          <p:cNvPr id="4" name="Slide Number Placeholder 3"/>
+          <p:cNvSpPr>
+            <a:spLocks noGrp="1"/>
+          </p:cNvSpPr>
+          <p:nvPr>
+            <p:ph type="sldNum" idx="5" sz="quarter"/>
+          </p:nvPr>
+        </p:nvSpPr>
+        <p:spPr/>
+      </p:sp>
+    </p:spTree>
+  </p:cSld>
+  <p:clrMapOvr>
+    <a:masterClrMapping/>
+  </p:clrMapOvr>
+</p:notes>
+</file>
+
+<file path=ppt/notesSlides/notesSlide3.xml><?xml version="1.0" encoding="utf-8"?>
+<p:notes xmlns:a="http://schemas.openxmlformats.org/drawingml/2006/main" xmlns:p="http://schemas.openxmlformats.org/presentationml/2006/main" xmlns:r="http://schemas.openxmlformats.org/officeDocument/2006/relationships">
+  <p:cSld>
+    <p:spTree>
+      <p:nvGrpSpPr>
+        <p:cNvPr id="1" name=""/>
+        <p:cNvGrpSpPr/>
+        <p:nvPr/>
+      </p:nvGrpSpPr>
+      <p:grpSpPr>
+        <a:xfrm>
+          <a:off x="0" y="0"/>
+          <a:ext cx="0" cy="0"/>
+          <a:chOff x="0" y="0"/>
+          <a:chExt cx="0" cy="0"/>
+        </a:xfrm>
+      </p:grpSpPr>
+      <p:sp>
+        <p:nvSpPr>
+          <p:cNvPr id="2" name="Slide Image Placeholder 1"/>
+          <p:cNvSpPr>
+            <a:spLocks noGrp="1"/>
+          </p:cNvSpPr>
+          <p:nvPr>
+            <p:ph type="sldImg" idx="2"/>
+          </p:nvPr>
+        </p:nvSpPr>
+        <p:spPr/>
+      </p:sp>
+      <p:sp>
+        <p:nvSpPr>
+          <p:cNvPr id="3" name="Notes Placeholder 2"/>
+          <p:cNvSpPr>
+            <a:spLocks noGrp="1"/>
+          </p:cNvSpPr>
+          <p:nvPr>
+            <p:ph type="body" idx="3" sz="quarter"/>
+          </p:nvPr>
+        </p:nvSpPr>
+        <p:spPr/>
+        <p:txBody>
+          <a:bodyPr/>
+          <a:lstStyle/>
+          <a:p>
+            <a:r>
+              <a:t>Teach the running order — boards decide in a predictable sequence, so structure the deck to it.</a:t>
+            </a:r>
+          </a:p>
+          <a:p>
+            <a:r>
+              <a:t>Walk the arc slowly; this is the skeleton every student's deck should share.</a:t>
+            </a:r>
+          </a:p>
+          <a:p>
+            <a:r>
+              <a:t>• First half: agenda → strategic context → current state → the gap → options → recommendation.</a:t>
+            </a:r>
+          </a:p>
+          <a:p>
+            <a:r>
+              <a:t>  You're building to the recommendation, not burying it.</a:t>
+            </a:r>
+          </a:p>
+          <a:p>
+            <a:r>
+              <a:t>• Second half: cost summary → benefits → risks → implementation plan → the decision → Q&amp;A. The</a:t>
+            </a:r>
+          </a:p>
+          <a:p>
+            <a:r>
+              <a:t>  recommendation and the PLAN get the airtime (bolded) — that's what the board acts on.</a:t>
+            </a:r>
+          </a:p>
+          <a:p>
+            <a:r>
+              <a:t>• One section per slide: headline + a few points. Everything else is verbal or in the appendix.</a:t>
+            </a:r>
+          </a:p>
+          <a:p>
+            <a:r>
+              <a:t>Misconception to pre-empt: "tell the story chronologically / how I did the work." No — order it the</a:t>
+            </a:r>
+          </a:p>
+          <a:p>
+            <a:r>
+              <a:t>way a board DECIDES, not the way you analysed. They want the recommendation early, then the</a:t>
+            </a:r>
+          </a:p>
+          <a:p>
+            <a:r>
+              <a:t>justification.</a:t>
+            </a:r>
+          </a:p>
+          <a:p>
+            <a:r>
+              <a:t>Question to pose: "Where in this arc does the ask belong — and why not save it for the end?"</a:t>
+            </a:r>
+          </a:p>
+          <a:p>
+            <a:r>
+              <a:t>(early and again at the decision; a board listens better knowing what you want).</a:t>
+            </a:r>
+          </a:p>
+          <a:p>
+            <a:r>
+              <a:t>UoC/AT1 tie: 401 PC 4.1 (document and communicate work) → B4; the arc is how the communication is</a:t>
+            </a:r>
+          </a:p>
+          <a:p>
+            <a:r>
+              <a:t>structured for the assessed presentation.</a:t>
+            </a:r>
+          </a:p>
+        </p:txBody>
+      </p:sp>
+      <p:sp>
+        <p:nvSpPr>
+          <p:cNvPr id="4" name="Slide Number Placeholder 3"/>
+          <p:cNvSpPr>
+            <a:spLocks noGrp="1"/>
+          </p:cNvSpPr>
+          <p:nvPr>
+            <p:ph type="sldNum" idx="5" sz="quarter"/>
+          </p:nvPr>
+        </p:nvSpPr>
+        <p:spPr/>
+      </p:sp>
+    </p:spTree>
+  </p:cSld>
+  <p:clrMapOvr>
+    <a:masterClrMapping/>
+  </p:clrMapOvr>
+</p:notes>
+</file>
+
+<file path=ppt/notesSlides/notesSlide4.xml><?xml version="1.0" encoding="utf-8"?>
+<p:notes xmlns:a="http://schemas.openxmlformats.org/drawingml/2006/main" xmlns:p="http://schemas.openxmlformats.org/presentationml/2006/main" xmlns:r="http://schemas.openxmlformats.org/officeDocument/2006/relationships">
+  <p:cSld>
+    <p:spTree>
+      <p:nvGrpSpPr>
+        <p:cNvPr id="1" name=""/>
+        <p:cNvGrpSpPr/>
+        <p:nvPr/>
+      </p:nvGrpSpPr>
+      <p:grpSpPr>
+        <a:xfrm>
+          <a:off x="0" y="0"/>
+          <a:ext cx="0" cy="0"/>
+          <a:chOff x="0" y="0"/>
+          <a:chExt cx="0" cy="0"/>
+        </a:xfrm>
+      </p:grpSpPr>
+      <p:sp>
+        <p:nvSpPr>
+          <p:cNvPr id="2" name="Slide Image Placeholder 1"/>
+          <p:cNvSpPr>
+            <a:spLocks noGrp="1"/>
+          </p:cNvSpPr>
+          <p:nvPr>
+            <p:ph type="sldImg" idx="2"/>
+          </p:nvPr>
+        </p:nvSpPr>
+        <p:spPr/>
+      </p:sp>
+      <p:sp>
+        <p:nvSpPr>
+          <p:cNvPr id="3" name="Notes Placeholder 2"/>
+          <p:cNvSpPr>
+            <a:spLocks noGrp="1"/>
+          </p:cNvSpPr>
+          <p:nvPr>
+            <p:ph type="body" idx="3" sz="quarter"/>
+          </p:nvPr>
+        </p:nvSpPr>
+        <p:spPr/>
+        <p:txBody>
+          <a:bodyPr/>
+          <a:lstStyle/>
+          <a:p>
+            <a:r>
+              <a:t>Practical filtering slide — turn the "distillation" principle into a keep/cut rule students can</a:t>
+            </a:r>
+          </a:p>
+          <a:p>
+            <a:r>
+              <a:t>apply to their own deck in the next activity.</a:t>
+            </a:r>
+          </a:p>
+          <a:p>
+            <a:r>
+              <a:t>• KEEP (bolded): the ask · the cost comparison · key risks + mitigations · the plan · the strategic</a:t>
+            </a:r>
+          </a:p>
+          <a:p>
+            <a:r>
+              <a:t>  fit. These drive the decision, so they earn a slide.</a:t>
+            </a:r>
+          </a:p>
+          <a:p>
+            <a:r>
+              <a:t>• CUT (bolded): line-item detail · method explanations · anything that lives in the appendices.</a:t>
+            </a:r>
+          </a:p>
+          <a:p>
+            <a:r>
+              <a:t>  The board doesn't decide on your method — it decides on your recommendation.</a:t>
+            </a:r>
+          </a:p>
+          <a:p>
+            <a:r>
+              <a:t>• The test (accent bold): if a slide doesn't help the DECISION, it's a handout, not a pitch slide.</a:t>
+            </a:r>
+          </a:p>
+          <a:p>
+            <a:r>
+              <a:t>Misconception to pre-empt: "cutting detail means I look unprepared." No — the detail lives in the</a:t>
+            </a:r>
+          </a:p>
+          <a:p>
+            <a:r>
+              <a:t>appendices you can turn to in Q&amp;A; a clean pitch reads as MORE prepared, not less.</a:t>
+            </a:r>
+          </a:p>
+          <a:p>
+            <a:r>
+              <a:t>Question to pose: "You spent hours on the CBA method — should that be a slide? Why or why not?"</a:t>
+            </a:r>
+          </a:p>
+          <a:p>
+            <a:r>
+              <a:t>(no — the RESULT and comparison are the pitch; the method is appendix/Q&amp;A material).</a:t>
+            </a:r>
+          </a:p>
+          <a:p>
+            <a:r>
+              <a:t>UoC/AT1 tie: 517 PC 2.4 → B2 (walk the evaluation through for feedback); knowing what to table vs</a:t>
+            </a:r>
+          </a:p>
+          <a:p>
+            <a:r>
+              <a:t>keep in reserve is part of communicating the evaluation.</a:t>
+            </a:r>
+          </a:p>
+        </p:txBody>
+      </p:sp>
+      <p:sp>
+        <p:nvSpPr>
+          <p:cNvPr id="4" name="Slide Number Placeholder 3"/>
+          <p:cNvSpPr>
+            <a:spLocks noGrp="1"/>
+          </p:cNvSpPr>
+          <p:nvPr>
+            <p:ph type="sldNum" idx="5" sz="quarter"/>
+          </p:nvPr>
+        </p:nvSpPr>
+        <p:spPr/>
+      </p:sp>
+    </p:spTree>
+  </p:cSld>
+  <p:clrMapOvr>
+    <a:masterClrMapping/>
+  </p:clrMapOvr>
+</p:notes>
+</file>
+
+<file path=ppt/notesSlides/notesSlide5.xml><?xml version="1.0" encoding="utf-8"?>
+<p:notes xmlns:a="http://schemas.openxmlformats.org/drawingml/2006/main" xmlns:p="http://schemas.openxmlformats.org/presentationml/2006/main" xmlns:r="http://schemas.openxmlformats.org/officeDocument/2006/relationships">
+  <p:cSld>
+    <p:spTree>
+      <p:nvGrpSpPr>
+        <p:cNvPr id="1" name=""/>
+        <p:cNvGrpSpPr/>
+        <p:nvPr/>
+      </p:nvGrpSpPr>
+      <p:grpSpPr>
+        <a:xfrm>
+          <a:off x="0" y="0"/>
+          <a:ext cx="0" cy="0"/>
+          <a:chOff x="0" y="0"/>
+          <a:chExt cx="0" cy="0"/>
+        </a:xfrm>
+      </p:grpSpPr>
+      <p:sp>
+        <p:nvSpPr>
+          <p:cNvPr id="2" name="Slide Image Placeholder 1"/>
+          <p:cNvSpPr>
+            <a:spLocks noGrp="1"/>
+          </p:cNvSpPr>
+          <p:nvPr>
+            <p:ph type="sldImg" idx="2"/>
+          </p:nvPr>
+        </p:nvSpPr>
+        <p:spPr/>
+      </p:sp>
+      <p:sp>
+        <p:nvSpPr>
+          <p:cNvPr id="3" name="Notes Placeholder 2"/>
+          <p:cNvSpPr>
+            <a:spLocks noGrp="1"/>
+          </p:cNvSpPr>
+          <p:nvPr>
+            <p:ph type="body" idx="3" sz="quarter"/>
+          </p:nvPr>
+        </p:nvSpPr>
+        <p:spPr/>
+        <p:txBody>
+          <a:bodyPr/>
+          <a:lstStyle/>
+          <a:p>
+            <a:r>
+              <a:t>High-leverage slide — the coverage spec singles rehearsal out as a MUST, and it's the step</a:t>
+            </a:r>
+          </a:p>
+          <a:p>
+            <a:r>
+              <a:t>students skip. Give it real weight and model that preparation isn't done when the deck is built.</a:t>
+            </a:r>
+          </a:p>
+          <a:p>
+            <a:r>
+              <a:t>• The message: a built deck is not a ready pitch. Rehearsal is where a pitch is won or lost.</a:t>
+            </a:r>
+          </a:p>
+          <a:p>
+            <a:r>
+              <a:t>• Walk the four rehearsal moves: run it ALOUD (walk the board through each slide, don't read it);</a:t>
+            </a:r>
+          </a:p>
+          <a:p>
+            <a:r>
+              <a:t>  TIME it to 10–15 min and cut if long; ANTICIPATE the board's questions and prepare answers;</a:t>
+            </a:r>
+          </a:p>
+          <a:p>
+            <a:r>
+              <a:t>  practise stating the ask and asking for sign-off — the bit most often fumbled.</a:t>
+            </a:r>
+          </a:p>
+          <a:p>
+            <a:r>
+              <a:t>• The contrast (accent bold): a rehearsed pitch sounds confident; an unrehearsed one reads off the</a:t>
+            </a:r>
+          </a:p>
+          <a:p>
+            <a:r>
+              <a:t>  slides. The board can tell instantly.</a:t>
+            </a:r>
+          </a:p>
+          <a:p>
+            <a:r>
+              <a:t>Misconception to pre-empt: "I know my case, so I don't need to rehearse." Knowing the content ≠</a:t>
+            </a:r>
+          </a:p>
+          <a:p>
+            <a:r>
+              <a:t>being able to present it to time under questioning; those are separate skills that only rehearsal</a:t>
+            </a:r>
+          </a:p>
+          <a:p>
+            <a:r>
+              <a:t>builds.</a:t>
+            </a:r>
+          </a:p>
+          <a:p>
+            <a:r>
+              <a:t>Question to pose: "Which part of a pitch do people fumble most — and how would rehearsal fix it?"</a:t>
+            </a:r>
+          </a:p>
+          <a:p>
+            <a:r>
+              <a:t>(stating the ask / handling the awkward question; rehearsing both removes the wobble).</a:t>
+            </a:r>
+          </a:p>
+          <a:p>
+            <a:r>
+              <a:t>UoC/AT1 tie: prepares every Part-B delivery criterion (B1–B4, B7); rehearsal is the practice that</a:t>
+            </a:r>
+          </a:p>
+          <a:p>
+            <a:r>
+              <a:t>turns a written case into a deliverable AT1 presentation.</a:t>
+            </a:r>
+          </a:p>
+        </p:txBody>
+      </p:sp>
+      <p:sp>
+        <p:nvSpPr>
+          <p:cNvPr id="4" name="Slide Number Placeholder 3"/>
+          <p:cNvSpPr>
+            <a:spLocks noGrp="1"/>
+          </p:cNvSpPr>
+          <p:nvPr>
+            <p:ph type="sldNum" idx="5" sz="quarter"/>
+          </p:nvPr>
+        </p:nvSpPr>
+        <p:spPr/>
+      </p:sp>
+    </p:spTree>
+  </p:cSld>
+  <p:clrMapOvr>
+    <a:masterClrMapping/>
+  </p:clrMapOvr>
+</p:notes>
+</file>
+
+<file path=ppt/notesSlides/notesSlide6.xml><?xml version="1.0" encoding="utf-8"?>
+<p:notes xmlns:a="http://schemas.openxmlformats.org/drawingml/2006/main" xmlns:p="http://schemas.openxmlformats.org/presentationml/2006/main" xmlns:r="http://schemas.openxmlformats.org/officeDocument/2006/relationships">
+  <p:cSld>
+    <p:spTree>
+      <p:nvGrpSpPr>
+        <p:cNvPr id="1" name=""/>
+        <p:cNvGrpSpPr/>
+        <p:nvPr/>
+      </p:nvGrpSpPr>
+      <p:grpSpPr>
+        <a:xfrm>
+          <a:off x="0" y="0"/>
+          <a:ext cx="0" cy="0"/>
+          <a:chOff x="0" y="0"/>
+          <a:chExt cx="0" cy="0"/>
+        </a:xfrm>
+      </p:grpSpPr>
+      <p:sp>
+        <p:nvSpPr>
+          <p:cNvPr id="2" name="Slide Image Placeholder 1"/>
+          <p:cNvSpPr>
+            <a:spLocks noGrp="1"/>
+          </p:cNvSpPr>
+          <p:nvPr>
+            <p:ph type="sldImg" idx="2"/>
+          </p:nvPr>
+        </p:nvSpPr>
+        <p:spPr/>
+      </p:sp>
+      <p:sp>
+        <p:nvSpPr>
+          <p:cNvPr id="3" name="Notes Placeholder 2"/>
+          <p:cNvSpPr>
+            <a:spLocks noGrp="1"/>
+          </p:cNvSpPr>
+          <p:nvPr>
+            <p:ph type="body" idx="3" sz="quarter"/>
+          </p:nvPr>
+        </p:nvSpPr>
+        <p:spPr/>
+        <p:txBody>
+          <a:bodyPr/>
+          <a:lstStyle/>
+          <a:p>
+            <a:r>
+              <a:t>Facilitation — the Section 1 practice: students build and rehearse the pitch for their PRACTICE</a:t>
+            </a:r>
+          </a:p>
+          <a:p>
+            <a:r>
+              <a:t>business case. This is the biggest task of the Topic; protect the time for it.</a:t>
+            </a:r>
+          </a:p>
+          <a:p>
+            <a:r>
+              <a:t>Tell students: "Take the business case you completed across Topics 2–4 on the Accounting System</a:t>
+            </a:r>
+          </a:p>
+          <a:p>
+            <a:r>
+              <a:t>and turn it into a board deck. Eight to ten slides on the YAT Board Presentation Deck template,</a:t>
+            </a:r>
+          </a:p>
+          <a:p>
+            <a:r>
+              <a:t>with speaker notes. Then rehearse it — out loud, to time. A deck you haven't said aloud isn't</a:t>
+            </a:r>
+          </a:p>
+          <a:p>
+            <a:r>
+              <a:t>ready."</a:t>
+            </a:r>
+          </a:p>
+          <a:p>
+            <a:r>
+              <a:t>Steps (put on the board):</a:t>
+            </a:r>
+          </a:p>
+          <a:p>
+            <a:r>
+              <a:t>1. Build the 8–10 slide deck — one section per slide, following the board arc; headline + a few</a:t>
+            </a:r>
+          </a:p>
+          <a:p>
+            <a:r>
+              <a:t>   points; the recommendation and plan get the airtime.</a:t>
+            </a:r>
+          </a:p>
+          <a:p>
+            <a:r>
+              <a:t>2. Rehearse: run it aloud and TIME it (target 10–15 min); cut if you run long.</a:t>
+            </a:r>
+          </a:p>
+          <a:p>
+            <a:r>
+              <a:t>3. In your notes, write the three questions you'd LEAST like to be asked — and your answers.</a:t>
+            </a:r>
+          </a:p>
+          <a:p>
+            <a:r>
+              <a:t>Must produce: an 8–10 slide board deck with speaker notes, rehearsed and timed, plus three</a:t>
+            </a:r>
+          </a:p>
+          <a:p>
+            <a:r>
+              <a:t>anticipated questions with prepared answers.</a:t>
+            </a:r>
+          </a:p>
+          <a:p>
+            <a:r>
+              <a:t>Timing: ~30 min build + rehearse, then we present. Where they get stuck: they rebuild the whole</a:t>
+            </a:r>
+          </a:p>
+          <a:p>
+            <a:r>
+              <a:t>document onto slides (too dense) — push them back to the spine/keep-cut rule; and they skip saying</a:t>
+            </a:r>
+          </a:p>
+          <a:p>
+            <a:r>
+              <a:t>it aloud — insist rehearsal happens, it's not optional.</a:t>
+            </a:r>
+          </a:p>
+          <a:p>
+            <a:r>
+              <a:t>Share-back: none yet — they present in the Section 2 activity; this is the build.</a:t>
+            </a:r>
+          </a:p>
+          <a:p>
+            <a:r>
+              <a:t>No-leakage note: this is practice on Ledgerline; AT1 Part B assesses the SAME skill on the LMS —</a:t>
+            </a:r>
+          </a:p>
+          <a:p>
+            <a:r>
+              <a:t>comparable, not identical. Keep them on the Accounting System deck here.</a:t>
+            </a:r>
+          </a:p>
+        </p:txBody>
+      </p:sp>
+      <p:sp>
+        <p:nvSpPr>
+          <p:cNvPr id="4" name="Slide Number Placeholder 3"/>
+          <p:cNvSpPr>
+            <a:spLocks noGrp="1"/>
+          </p:cNvSpPr>
+          <p:nvPr>
+            <p:ph type="sldNum" idx="5" sz="quarter"/>
+          </p:nvPr>
+        </p:nvSpPr>
+        <p:spPr/>
+      </p:sp>
+    </p:spTree>
+  </p:cSld>
+  <p:clrMapOvr>
+    <a:masterClrMapping/>
+  </p:clrMapOvr>
+</p:notes>
+</file>
+
+<file path=ppt/notesSlides/notesSlide7.xml><?xml version="1.0" encoding="utf-8"?>
+<p:notes xmlns:a="http://schemas.openxmlformats.org/drawingml/2006/main" xmlns:p="http://schemas.openxmlformats.org/presentationml/2006/main" xmlns:r="http://schemas.openxmlformats.org/officeDocument/2006/relationships">
+  <p:cSld>
+    <p:spTree>
+      <p:nvGrpSpPr>
+        <p:cNvPr id="1" name=""/>
+        <p:cNvGrpSpPr/>
+        <p:nvPr/>
+      </p:nvGrpSpPr>
+      <p:grpSpPr>
+        <a:xfrm>
+          <a:off x="0" y="0"/>
+          <a:ext cx="0" cy="0"/>
+          <a:chOff x="0" y="0"/>
+          <a:chExt cx="0" cy="0"/>
+        </a:xfrm>
+      </p:grpSpPr>
+      <p:sp>
+        <p:nvSpPr>
+          <p:cNvPr id="2" name="Slide Image Placeholder 1"/>
+          <p:cNvSpPr>
+            <a:spLocks noGrp="1"/>
+          </p:cNvSpPr>
+          <p:nvPr>
+            <p:ph type="sldImg" idx="2"/>
+          </p:nvPr>
+        </p:nvSpPr>
+        <p:spPr/>
+      </p:sp>
+      <p:sp>
+        <p:nvSpPr>
+          <p:cNvPr id="3" name="Notes Placeholder 2"/>
+          <p:cNvSpPr>
+            <a:spLocks noGrp="1"/>
+          </p:cNvSpPr>
+          <p:nvPr>
+            <p:ph type="body" idx="3" sz="quarter"/>
+          </p:nvPr>
+        </p:nvSpPr>
+        <p:spPr/>
+        <p:txBody>
+          <a:bodyPr/>
+          <a:lstStyle/>
+          <a:p>
+            <a:r>
+              <a:t>Open Section 2 — the single most important delivery habit. Short slide, big point.</a:t>
+            </a:r>
+          </a:p>
+          <a:p>
+            <a:r>
+              <a:t>• The principle: a board listens better when it knows what you want. Name the decision you're</a:t>
+            </a:r>
+          </a:p>
+          <a:p>
+            <a:r>
+              <a:t>  seeking UP FRONT, then walk the case that justifies it.</a:t>
+            </a:r>
+          </a:p>
+          <a:p>
+            <a:r>
+              <a:t>• Make it concrete: "I'm asking the board to approve the action plan to migrate Ledgerline —</a:t>
+            </a:r>
+          </a:p>
+          <a:p>
+            <a:r>
+              <a:t>  here's why." Then the context/gap/options land as support for a known ask.</a:t>
+            </a:r>
+          </a:p>
+          <a:p>
+            <a:r>
+              <a:t>• The trap (accent bold): don't hide the ask on the last slide. A board that doesn't know what</a:t>
+            </a:r>
+          </a:p>
+          <a:p>
+            <a:r>
+              <a:t>  you're driving at spends your pitch guessing instead of weighing.</a:t>
+            </a:r>
+          </a:p>
+          <a:p>
+            <a:r>
+              <a:t>Misconception to pre-empt: "build suspense — save the recommendation for a big finish." A board is</a:t>
+            </a:r>
+          </a:p>
+          <a:p>
+            <a:r>
+              <a:t>not an audience to entertain; ambiguity about the ask reads as a lack of conviction.</a:t>
+            </a:r>
+          </a:p>
+          <a:p>
+            <a:r>
+              <a:t>Question to pose: "What's the first thing the board should know when you stand up — and why isn't</a:t>
+            </a:r>
+          </a:p>
+          <a:p>
+            <a:r>
+              <a:t>it the background?" (the decision you want; it frames everything that follows).</a:t>
+            </a:r>
+          </a:p>
+          <a:p>
+            <a:r>
+              <a:t>UoC/AT1 tie: 517 PC 1.4 (report proposed changes/gaps to a superior) → B1; leading with the ask is</a:t>
+            </a:r>
+          </a:p>
+          <a:p>
+            <a:r>
+              <a:t>how the report opens.</a:t>
+            </a:r>
+          </a:p>
+        </p:txBody>
+      </p:sp>
+      <p:sp>
+        <p:nvSpPr>
+          <p:cNvPr id="4" name="Slide Number Placeholder 3"/>
+          <p:cNvSpPr>
+            <a:spLocks noGrp="1"/>
+          </p:cNvSpPr>
+          <p:nvPr>
+            <p:ph type="sldNum" idx="5" sz="quarter"/>
+          </p:nvPr>
+        </p:nvSpPr>
+        <p:spPr/>
+      </p:sp>
+    </p:spTree>
+  </p:cSld>
+  <p:clrMapOvr>
+    <a:masterClrMapping/>
+  </p:clrMapOvr>
+</p:notes>
+</file>
+
+<file path=ppt/notesSlides/notesSlide8.xml><?xml version="1.0" encoding="utf-8"?>
+<p:notes xmlns:a="http://schemas.openxmlformats.org/drawingml/2006/main" xmlns:p="http://schemas.openxmlformats.org/presentationml/2006/main" xmlns:r="http://schemas.openxmlformats.org/officeDocument/2006/relationships">
+  <p:cSld>
+    <p:spTree>
+      <p:nvGrpSpPr>
+        <p:cNvPr id="1" name=""/>
+        <p:cNvGrpSpPr/>
+        <p:nvPr/>
+      </p:nvGrpSpPr>
+      <p:grpSpPr>
+        <a:xfrm>
+          <a:off x="0" y="0"/>
+          <a:ext cx="0" cy="0"/>
+          <a:chOff x="0" y="0"/>
+          <a:chExt cx="0" cy="0"/>
+        </a:xfrm>
+      </p:grpSpPr>
+      <p:sp>
+        <p:nvSpPr>
+          <p:cNvPr id="2" name="Slide Image Placeholder 1"/>
+          <p:cNvSpPr>
+            <a:spLocks noGrp="1"/>
+          </p:cNvSpPr>
+          <p:nvPr>
+            <p:ph type="sldImg" idx="2"/>
+          </p:nvPr>
+        </p:nvSpPr>
+        <p:spPr/>
+      </p:sp>
+      <p:sp>
+        <p:nvSpPr>
+          <p:cNvPr id="3" name="Notes Placeholder 2"/>
+          <p:cNvSpPr>
+            <a:spLocks noGrp="1"/>
+          </p:cNvSpPr>
+          <p:nvPr>
+            <p:ph type="body" idx="3" sz="quarter"/>
+          </p:nvPr>
+        </p:nvSpPr>
+        <p:spPr/>
+        <p:txBody>
+          <a:bodyPr/>
+          <a:lstStyle/>
+          <a:p>
+            <a:r>
+              <a:t>The delivery-structure slide — teach the reporting stance: you're reporting to a superior and</a:t>
+            </a:r>
+          </a:p>
+          <a:p>
+            <a:r>
+              <a:t>seeking a decision, not lecturing.</a:t>
+            </a:r>
+          </a:p>
+          <a:p>
+            <a:r>
+              <a:t>• Walk the sequence: report the SITUATION and the gap → walk through how you EVALUATED the options</a:t>
+            </a:r>
+          </a:p>
+          <a:p>
+            <a:r>
+              <a:t>  (the CBA + risk) → put the ACTION PLAN, explicitly seeking the board's feedback and approval.</a:t>
+            </a:r>
+          </a:p>
+          <a:p>
+            <a:r>
+              <a:t>• Emphasise the stance (accent bold): you're reporting to a superior (Sam Walker / Pat Lin) and</a:t>
+            </a:r>
+          </a:p>
+          <a:p>
+            <a:r>
+              <a:t>  asking for a decision — not delivering a lecture. Tone is "here's my recommendation and why",</a:t>
+            </a:r>
+          </a:p>
+          <a:p>
+            <a:r>
+              <a:t>  not "let me teach you cloud".</a:t>
+            </a:r>
+          </a:p>
+          <a:p>
+            <a:r>
+              <a:t>• The action plan isn't just presented — you explicitly ask for feedback and approval on it. That</a:t>
+            </a:r>
+          </a:p>
+          <a:p>
+            <a:r>
+              <a:t>  verbal seek is an assessed act, not a formality.</a:t>
+            </a:r>
+          </a:p>
+          <a:p>
+            <a:r>
+              <a:t>Misconception to pre-empt: "present = inform." No — this is persuade-and-seek-decision. Presenting</a:t>
+            </a:r>
+          </a:p>
+          <a:p>
+            <a:r>
+              <a:t>the plan without asking for approval misses the point (and the criterion).</a:t>
+            </a:r>
+          </a:p>
+          <a:p>
+            <a:r>
+              <a:t>Question to pose: "You've walked them through the evaluation — what do you do next, and what words</a:t>
+            </a:r>
+          </a:p>
+          <a:p>
+            <a:r>
+              <a:t>do you use?" (put the plan and explicitly seek feedback + approval).</a:t>
+            </a:r>
+          </a:p>
+          <a:p>
+            <a:r>
+              <a:t>UoC/AT1 tie: 517 PC 2.4 → B2 (walk the evaluation for feedback) and PC 3.3 → B3 (provide the action</a:t>
+            </a:r>
+          </a:p>
+          <a:p>
+            <a:r>
+              <a:t>plan, seek approval); this slide is the spine of both delivery criteria.</a:t>
+            </a:r>
+          </a:p>
+        </p:txBody>
+      </p:sp>
+      <p:sp>
+        <p:nvSpPr>
+          <p:cNvPr id="4" name="Slide Number Placeholder 3"/>
+          <p:cNvSpPr>
+            <a:spLocks noGrp="1"/>
+          </p:cNvSpPr>
+          <p:nvPr>
+            <p:ph type="sldNum" idx="5" sz="quarter"/>
+          </p:nvPr>
+        </p:nvSpPr>
+        <p:spPr/>
+      </p:sp>
+    </p:spTree>
+  </p:cSld>
+  <p:clrMapOvr>
+    <a:masterClrMapping/>
+  </p:clrMapOvr>
+</p:notes>
+</file>
+
+<file path=ppt/notesSlides/notesSlide9.xml><?xml version="1.0" encoding="utf-8"?>
+<p:notes xmlns:a="http://schemas.openxmlformats.org/drawingml/2006/main" xmlns:p="http://schemas.openxmlformats.org/presentationml/2006/main" xmlns:r="http://schemas.openxmlformats.org/officeDocument/2006/relationships">
+  <p:cSld>
+    <p:spTree>
+      <p:nvGrpSpPr>
+        <p:cNvPr id="1" name=""/>
+        <p:cNvGrpSpPr/>
+        <p:nvPr/>
+      </p:nvGrpSpPr>
+      <p:grpSpPr>
+        <a:xfrm>
+          <a:off x="0" y="0"/>
+          <a:ext cx="0" cy="0"/>
+          <a:chOff x="0" y="0"/>
+          <a:chExt cx="0" cy="0"/>
+        </a:xfrm>
+      </p:grpSpPr>
+      <p:sp>
+        <p:nvSpPr>
+          <p:cNvPr id="2" name="Slide Image Placeholder 1"/>
+          <p:cNvSpPr>
+            <a:spLocks noGrp="1"/>
+          </p:cNvSpPr>
+          <p:nvPr>
+            <p:ph type="sldImg" idx="2"/>
+          </p:nvPr>
+        </p:nvSpPr>
+        <p:spPr/>
+      </p:sp>
+      <p:sp>
+        <p:nvSpPr>
+          <p:cNvPr id="3" name="Notes Placeholder 2"/>
+          <p:cNvSpPr>
+            <a:spLocks noGrp="1"/>
+          </p:cNvSpPr>
+          <p:nvPr>
+            <p:ph type="body" idx="3" sz="quarter"/>
+          </p:nvPr>
+        </p:nvSpPr>
+        <p:spPr/>
+        <p:txBody>
+          <a:bodyPr/>
+          <a:lstStyle/>
+          <a:p>
+            <a:r>
+              <a:t>Teach the plain-English skill — the coverage spec calls this out explicitly (B7/B9). The audience</a:t>
+            </a:r>
+          </a:p>
+          <a:p>
+            <a:r>
+              <a:t>is NON-technical; jargon loses them.</a:t>
+            </a:r>
+          </a:p>
+          <a:p>
+            <a:r>
+              <a:t>• The rule: plain English, and translate each technical term as you use it — "RDS: a managed</a:t>
+            </a:r>
+          </a:p>
+          <a:p>
+            <a:r>
+              <a:t>  database the vendor runs for us." Don't assume they know the acronyms.</a:t>
+            </a:r>
+          </a:p>
+          <a:p>
+            <a:r>
+              <a:t>• Pitch in BUSINESS terms (bolded axis): cost, risk, availability, continuity — not instance types</a:t>
+            </a:r>
+          </a:p>
+          <a:p>
+            <a:r>
+              <a:t>  and subnets. Translate every technical point into what it means for YAT.</a:t>
+            </a:r>
+          </a:p>
+          <a:p>
+            <a:r>
+              <a:t>• The consequence (accent bold): jargon loses the room. The moment the board stops following, they</a:t>
+            </a:r>
+          </a:p>
+          <a:p>
+            <a:r>
+              <a:t>  stop being persuaded.</a:t>
+            </a:r>
+          </a:p>
+          <a:p>
+            <a:r>
+              <a:t>Misconception to pre-empt: "using the technical terms shows I know my stuff." To a non-technical</a:t>
+            </a:r>
+          </a:p>
+          <a:p>
+            <a:r>
+              <a:t>board it does the opposite — it signals you can't explain it. The skill being assessed is</a:t>
+            </a:r>
+          </a:p>
+          <a:p>
+            <a:r>
+              <a:t>translation, not vocabulary.</a:t>
+            </a:r>
+          </a:p>
+          <a:p>
+            <a:r>
+              <a:t>Question to pose: "Say 'we'll deploy across two Availability Zones' the way you'd say it to Sam</a:t>
+            </a:r>
+          </a:p>
+          <a:p>
+            <a:r>
+              <a:t>Walker, who isn't technical." (e.g. "we'll run it in two separate data centres so one failing</a:t>
+            </a:r>
+          </a:p>
+          <a:p>
+            <a:r>
+              <a:t>doesn't take Ledgerline down").</a:t>
+            </a:r>
+          </a:p>
+          <a:p>
+            <a:r>
+              <a:t>UoC/AT1 tie: 517 FS Oral Communication → B7 and 502 FS Oral communication → B9 — plain English and</a:t>
+            </a:r>
+          </a:p>
+          <a:p>
+            <a:r>
+              <a:t>translating technical terms for the intended audience.</a:t>
+            </a:r>
+          </a:p>
+        </p:txBody>
+      </p:sp>
+      <p:sp>
+        <p:nvSpPr>
+          <p:cNvPr id="4" name="Slide Number Placeholder 3"/>
+          <p:cNvSpPr>
+            <a:spLocks noGrp="1"/>
+          </p:cNvSpPr>
+          <p:nvPr>
+            <p:ph type="sldNum" idx="5" sz="quarter"/>
+          </p:nvPr>
+        </p:nvSpPr>
+        <p:spPr/>
+      </p:sp>
+    </p:spTree>
+  </p:cSld>
+  <p:clrMapOvr>
+    <a:masterClrMapping/>
+  </p:clrMapOvr>
+</p:notes>
 </file>
 
 <file path=ppt/slideLayouts/slideLayout1.xml><?xml version="1.0" encoding="utf-8"?>
@@ -12613,4 +15068,324 @@
   </a:objectDefaults>
   <a:extraClrSchemeLst/>
 </a:theme>
+</file>
+
+<file path=ppt/theme/theme2.xml><?xml version="1.0" encoding="utf-8"?>
+<a:theme xmlns:a="http://schemas.openxmlformats.org/drawingml/2006/main" name="Office Theme">
+  <a:themeElements>
+    <a:clrScheme name="Office">
+      <a:dk1>
+        <a:sysClr val="windowText" lastClr="000000"/>
+      </a:dk1>
+      <a:lt1>
+        <a:sysClr val="window" lastClr="FFFFFF"/>
+      </a:lt1>
+      <a:dk2>
+        <a:srgbClr val="1F497D"/>
+      </a:dk2>
+      <a:lt2>
+        <a:srgbClr val="EEECE1"/>
+      </a:lt2>
+      <a:accent1>
+        <a:srgbClr val="4F81BD"/>
+      </a:accent1>
+      <a:accent2>
+        <a:srgbClr val="C0504D"/>
+      </a:accent2>
+      <a:accent3>
+        <a:srgbClr val="9BBB59"/>
+      </a:accent3>
+      <a:accent4>
+        <a:srgbClr val="8064A2"/>
+      </a:accent4>
+      <a:accent5>
+        <a:srgbClr val="4BACC6"/>
+      </a:accent5>
+      <a:accent6>
+        <a:srgbClr val="F79646"/>
+      </a:accent6>
+      <a:hlink>
+        <a:srgbClr val="0000FF"/>
+      </a:hlink>
+      <a:folHlink>
+        <a:srgbClr val="800080"/>
+      </a:folHlink>
+    </a:clrScheme>
+    <a:fontScheme name="Office">
+      <a:majorFont>
+        <a:latin typeface="Calibri"/>
+        <a:ea typeface=""/>
+        <a:cs typeface=""/>
+        <a:font script="Jpan" typeface="ＭＳ Ｐゴシック"/>
+        <a:font script="Hang" typeface="맑은 고딕"/>
+        <a:font script="Hans" typeface="宋体"/>
+        <a:font script="Hant" typeface="新細明體"/>
+        <a:font script="Arab" typeface="Times New Roman"/>
+        <a:font script="Hebr" typeface="Times New Roman"/>
+        <a:font script="Thai" typeface="Angsana New"/>
+        <a:font script="Ethi" typeface="Nyala"/>
+        <a:font script="Beng" typeface="Vrinda"/>
+        <a:font script="Gujr" typeface="Shruti"/>
+        <a:font script="Khmr" typeface="MoolBoran"/>
+        <a:font script="Knda" typeface="Tunga"/>
+        <a:font script="Guru" typeface="Raavi"/>
+        <a:font script="Cans" typeface="Euphemia"/>
+        <a:font script="Cher" typeface="Plantagenet Cherokee"/>
+        <a:font script="Yiii" typeface="Microsoft Yi Baiti"/>
+        <a:font script="Tibt" typeface="Microsoft Himalaya"/>
+        <a:font script="Thaa" typeface="MV Boli"/>
+        <a:font script="Deva" typeface="Mangal"/>
+        <a:font script="Telu" typeface="Gautami"/>
+        <a:font script="Taml" typeface="Latha"/>
+        <a:font script="Syrc" typeface="Estrangelo Edessa"/>
+        <a:font script="Orya" typeface="Kalinga"/>
+        <a:font script="Mlym" typeface="Kartika"/>
+        <a:font script="Laoo" typeface="DokChampa"/>
+        <a:font script="Sinh" typeface="Iskoola Pota"/>
+        <a:font script="Mong" typeface="Mongolian Baiti"/>
+        <a:font script="Viet" typeface="Times New Roman"/>
+        <a:font script="Uigh" typeface="Microsoft Uighur"/>
+        <a:font script="Geor" typeface="Sylfaen"/>
+      </a:majorFont>
+      <a:minorFont>
+        <a:latin typeface="Calibri"/>
+        <a:ea typeface=""/>
+        <a:cs typeface=""/>
+        <a:font script="Jpan" typeface="ＭＳ Ｐゴシック"/>
+        <a:font script="Hang" typeface="맑은 고딕"/>
+        <a:font script="Hans" typeface="宋体"/>
+        <a:font script="Hant" typeface="新細明體"/>
+        <a:font script="Arab" typeface="Arial"/>
+        <a:font script="Hebr" typeface="Arial"/>
+        <a:font script="Thai" typeface="Cordia New"/>
+        <a:font script="Ethi" typeface="Nyala"/>
+        <a:font script="Beng" typeface="Vrinda"/>
+        <a:font script="Gujr" typeface="Shruti"/>
+        <a:font script="Khmr" typeface="DaunPenh"/>
+        <a:font script="Knda" typeface="Tunga"/>
+        <a:font script="Guru" typeface="Raavi"/>
+        <a:font script="Cans" typeface="Euphemia"/>
+        <a:font script="Cher" typeface="Plantagenet Cherokee"/>
+        <a:font script="Yiii" typeface="Microsoft Yi Baiti"/>
+        <a:font script="Tibt" typeface="Microsoft Himalaya"/>
+        <a:font script="Thaa" typeface="MV Boli"/>
+        <a:font script="Deva" typeface="Mangal"/>
+        <a:font script="Telu" typeface="Gautami"/>
+        <a:font script="Taml" typeface="Latha"/>
+        <a:font script="Syrc" typeface="Estrangelo Edessa"/>
+        <a:font script="Orya" typeface="Kalinga"/>
+        <a:font script="Mlym" typeface="Kartika"/>
+        <a:font script="Laoo" typeface="DokChampa"/>
+        <a:font script="Sinh" typeface="Iskoola Pota"/>
+        <a:font script="Mong" typeface="Mongolian Baiti"/>
+        <a:font script="Viet" typeface="Arial"/>
+        <a:font script="Uigh" typeface="Microsoft Uighur"/>
+        <a:font script="Geor" typeface="Sylfaen"/>
+      </a:minorFont>
+    </a:fontScheme>
+    <a:fmtScheme name="Office">
+      <a:fillStyleLst>
+        <a:solidFill>
+          <a:schemeClr val="phClr"/>
+        </a:solidFill>
+        <a:gradFill rotWithShape="1">
+          <a:gsLst>
+            <a:gs pos="0">
+              <a:schemeClr val="phClr">
+                <a:tint val="50000"/>
+                <a:satMod val="300000"/>
+              </a:schemeClr>
+            </a:gs>
+            <a:gs pos="35000">
+              <a:schemeClr val="phClr">
+                <a:tint val="37000"/>
+                <a:satMod val="300000"/>
+              </a:schemeClr>
+            </a:gs>
+            <a:gs pos="100000">
+              <a:schemeClr val="phClr">
+                <a:tint val="15000"/>
+                <a:satMod val="350000"/>
+              </a:schemeClr>
+            </a:gs>
+          </a:gsLst>
+          <a:lin ang="16200000" scaled="1"/>
+        </a:gradFill>
+        <a:gradFill rotWithShape="1">
+          <a:gsLst>
+            <a:gs pos="0">
+              <a:schemeClr val="phClr">
+                <a:tint val="100000"/>
+                <a:shade val="100000"/>
+                <a:satMod val="130000"/>
+              </a:schemeClr>
+            </a:gs>
+            <a:gs pos="100000">
+              <a:schemeClr val="phClr">
+                <a:tint val="50000"/>
+                <a:shade val="100000"/>
+                <a:satMod val="350000"/>
+              </a:schemeClr>
+            </a:gs>
+          </a:gsLst>
+          <a:lin ang="16200000" scaled="0"/>
+        </a:gradFill>
+      </a:fillStyleLst>
+      <a:lnStyleLst>
+        <a:ln w="9525" cap="flat" cmpd="sng" algn="ctr">
+          <a:solidFill>
+            <a:schemeClr val="phClr">
+              <a:shade val="95000"/>
+              <a:satMod val="105000"/>
+            </a:schemeClr>
+          </a:solidFill>
+          <a:prstDash val="solid"/>
+        </a:ln>
+        <a:ln w="25400" cap="flat" cmpd="sng" algn="ctr">
+          <a:solidFill>
+            <a:schemeClr val="phClr"/>
+          </a:solidFill>
+          <a:prstDash val="solid"/>
+        </a:ln>
+        <a:ln w="38100" cap="flat" cmpd="sng" algn="ctr">
+          <a:solidFill>
+            <a:schemeClr val="phClr"/>
+          </a:solidFill>
+          <a:prstDash val="solid"/>
+        </a:ln>
+      </a:lnStyleLst>
+      <a:effectStyleLst>
+        <a:effectStyle>
+          <a:effectLst>
+            <a:outerShdw blurRad="40000" dist="20000" dir="5400000" rotWithShape="0">
+              <a:srgbClr val="000000">
+                <a:alpha val="38000"/>
+              </a:srgbClr>
+            </a:outerShdw>
+          </a:effectLst>
+        </a:effectStyle>
+        <a:effectStyle>
+          <a:effectLst>
+            <a:outerShdw blurRad="40000" dist="23000" dir="5400000" rotWithShape="0">
+              <a:srgbClr val="000000">
+                <a:alpha val="35000"/>
+              </a:srgbClr>
+            </a:outerShdw>
+          </a:effectLst>
+        </a:effectStyle>
+        <a:effectStyle>
+          <a:effectLst>
+            <a:outerShdw blurRad="40000" dist="23000" dir="5400000" rotWithShape="0">
+              <a:srgbClr val="000000">
+                <a:alpha val="35000"/>
+              </a:srgbClr>
+            </a:outerShdw>
+          </a:effectLst>
+          <a:scene3d>
+            <a:camera prst="orthographicFront">
+              <a:rot lat="0" lon="0" rev="0"/>
+            </a:camera>
+            <a:lightRig rig="threePt" dir="t">
+              <a:rot lat="0" lon="0" rev="1200000"/>
+            </a:lightRig>
+          </a:scene3d>
+          <a:sp3d>
+            <a:bevelT w="63500" h="25400"/>
+          </a:sp3d>
+        </a:effectStyle>
+      </a:effectStyleLst>
+      <a:bgFillStyleLst>
+        <a:solidFill>
+          <a:schemeClr val="phClr"/>
+        </a:solidFill>
+        <a:gradFill rotWithShape="1">
+          <a:gsLst>
+            <a:gs pos="0">
+              <a:schemeClr val="phClr">
+                <a:tint val="40000"/>
+                <a:satMod val="350000"/>
+              </a:schemeClr>
+            </a:gs>
+            <a:gs pos="40000">
+              <a:schemeClr val="phClr">
+                <a:tint val="45000"/>
+                <a:shade val="99000"/>
+                <a:satMod val="350000"/>
+              </a:schemeClr>
+            </a:gs>
+            <a:gs pos="100000">
+              <a:schemeClr val="phClr">
+                <a:shade val="20000"/>
+                <a:satMod val="255000"/>
+              </a:schemeClr>
+            </a:gs>
+          </a:gsLst>
+          <a:path path="circle">
+            <a:fillToRect l="50000" t="-80000" r="50000" b="180000"/>
+          </a:path>
+        </a:gradFill>
+        <a:gradFill rotWithShape="1">
+          <a:gsLst>
+            <a:gs pos="0">
+              <a:schemeClr val="phClr">
+                <a:tint val="80000"/>
+                <a:satMod val="300000"/>
+              </a:schemeClr>
+            </a:gs>
+            <a:gs pos="100000">
+              <a:schemeClr val="phClr">
+                <a:shade val="30000"/>
+                <a:satMod val="200000"/>
+              </a:schemeClr>
+            </a:gs>
+          </a:gsLst>
+          <a:path path="circle">
+            <a:fillToRect l="50000" t="50000" r="50000" b="50000"/>
+          </a:path>
+        </a:gradFill>
+      </a:bgFillStyleLst>
+    </a:fmtScheme>
+  </a:themeElements>
+  <a:objectDefaults>
+    <a:spDef>
+      <a:spPr/>
+      <a:bodyPr/>
+      <a:lstStyle/>
+      <a:style>
+        <a:lnRef idx="1">
+          <a:schemeClr val="accent1"/>
+        </a:lnRef>
+        <a:fillRef idx="3">
+          <a:schemeClr val="accent1"/>
+        </a:fillRef>
+        <a:effectRef idx="2">
+          <a:schemeClr val="accent1"/>
+        </a:effectRef>
+        <a:fontRef idx="minor">
+          <a:schemeClr val="lt1"/>
+        </a:fontRef>
+      </a:style>
+    </a:spDef>
+    <a:lnDef>
+      <a:spPr/>
+      <a:bodyPr/>
+      <a:lstStyle/>
+      <a:style>
+        <a:lnRef idx="2">
+          <a:schemeClr val="accent1"/>
+        </a:lnRef>
+        <a:fillRef idx="0">
+          <a:schemeClr val="accent1"/>
+        </a:fillRef>
+        <a:effectRef idx="1">
+          <a:schemeClr val="accent1"/>
+        </a:effectRef>
+        <a:fontRef idx="minor">
+          <a:schemeClr val="tx1"/>
+        </a:fontRef>
+      </a:style>
+    </a:lnDef>
+  </a:objectDefaults>
+  <a:extraClrSchemeLst/>
+</a:theme>
 </file>
--- a/S1-CL1-Cloud-Design-Build/delivery/topic_05/Topic_05_Slides.pptx
+++ b/S1-CL1-Cloud-Design-Build/delivery/topic_05/Topic_05_Slides.pptx
@@ -539,7 +539,7 @@
           </a:p>
           <a:p>
             <a:r>
-              <a:t>  delivering, and defending it in the room.</a:t>
+              <a:t>delivering, and defending it in the room.</a:t>
             </a:r>
           </a:p>
           <a:p>
@@ -549,7 +549,7 @@
           </a:p>
           <a:p>
             <a:r>
-              <a:t>  section today and each maps to a phase of the real event.</a:t>
+              <a:t>section today and each maps to a phase of the real event.</a:t>
             </a:r>
           </a:p>
           <a:p>
@@ -559,12 +559,12 @@
           </a:p>
           <a:p>
             <a:r>
-              <a:t>  assessment. HOW you present is marked, not just what you built. A brilliant case badly pitched</a:t>
-            </a:r>
-          </a:p>
-          <a:p>
-            <a:r>
-              <a:t>  still fails Part B.</a:t>
+              <a:t>assessment. HOW you present is marked, not just what you built. A brilliant case badly pitched</a:t>
+            </a:r>
+          </a:p>
+          <a:p>
+            <a:r>
+              <a:t>still fails Part B.</a:t>
             </a:r>
           </a:p>
           <a:p>
@@ -829,12 +829,12 @@
           </a:p>
           <a:p>
             <a:r>
-              <a:t>  behind it. They're not small talk — they're where the analysis knowledge (Topics 1–4) is</a:t>
-            </a:r>
-          </a:p>
-          <a:p>
-            <a:r>
-              <a:t>  examined live.</a:t>
+              <a:t>behind it. They're not small talk — they're where the analysis knowledge (Topics 1–4) is</a:t>
+            </a:r>
+          </a:p>
+          <a:p>
+            <a:r>
+              <a:t>examined live.</a:t>
             </a:r>
           </a:p>
           <a:p>
@@ -844,7 +844,7 @@
           </a:p>
           <a:p>
             <a:r>
-              <a:t>  don't bluff. A confident wrong answer is worse than "let me point you to the numbers".</a:t>
+              <a:t>don't bluff. A confident wrong answer is worse than "let me point you to the numbers".</a:t>
             </a:r>
           </a:p>
           <a:p>
@@ -964,7 +964,7 @@
           </a:p>
           <a:p>
             <a:r>
-              <a:t>  DIRECTLY, pointing to your evidence; then CHECK it landed before moving on.</a:t>
+              <a:t>DIRECTLY, pointing to your evidence; then CHECK it landed before moving on.</a:t>
             </a:r>
           </a:p>
           <a:p>
@@ -974,7 +974,7 @@
           </a:p>
           <a:p>
             <a:r>
-              <a:t>  the wrong question. Pointing to evidence (your CBA, your risk register) beats asserting.</a:t>
+              <a:t>the wrong question. Pointing to evidence (your CBA, your risk register) beats asserting.</a:t>
             </a:r>
           </a:p>
           <a:p>
@@ -984,7 +984,7 @@
           </a:p>
           <a:p>
             <a:r>
-              <a:t>  isn't authority; precision is.</a:t>
+              <a:t>isn't authority; precision is.</a:t>
             </a:r>
           </a:p>
           <a:p>
@@ -1099,17 +1099,17 @@
           </a:p>
           <a:p>
             <a:r>
-              <a:t>  to say no?); prioritisation (which change carries the most risk?); strategic fit (what if YAT</a:t>
-            </a:r>
-          </a:p>
-          <a:p>
-            <a:r>
-              <a:t>  opens a second campus in Year 3?); service models &amp; standards (why IaaS/PaaS here? which</a:t>
-            </a:r>
-          </a:p>
-          <a:p>
-            <a:r>
-              <a:t>  standards informed it?).</a:t>
+              <a:t>to say no?); prioritisation (which change carries the most risk?); strategic fit (what if YAT</a:t>
+            </a:r>
+          </a:p>
+          <a:p>
+            <a:r>
+              <a:t>opens a second campus in Year 3?); service models &amp; standards (why IaaS/PaaS here? which</a:t>
+            </a:r>
+          </a:p>
+          <a:p>
+            <a:r>
+              <a:t>standards informed it?).</a:t>
             </a:r>
           </a:p>
           <a:p>
@@ -1119,12 +1119,12 @@
           </a:p>
           <a:p>
             <a:r>
-              <a:t>  The answer already exists in your analysis; your job is to retrieve and state it, not rebuild it</a:t>
-            </a:r>
-          </a:p>
-          <a:p>
-            <a:r>
-              <a:t>  live.</a:t>
+              <a:t>The answer already exists in your analysis; your job is to retrieve and state it, not rebuild it</a:t>
+            </a:r>
+          </a:p>
+          <a:p>
+            <a:r>
+              <a:t>live.</a:t>
             </a:r>
           </a:p>
           <a:p>
@@ -1244,12 +1244,12 @@
           </a:p>
           <a:p>
             <a:r>
-              <a:t>  understood it — reflect it back); CAPTURE it in the Feedback Record; OBTAIN the board's sign-off</a:t>
-            </a:r>
-          </a:p>
-          <a:p>
-            <a:r>
-              <a:t>  on the action plan.</a:t>
+              <a:t>understood it — reflect it back); CAPTURE it in the Feedback Record; OBTAIN the board's sign-off</a:t>
+            </a:r>
+          </a:p>
+          <a:p>
+            <a:r>
+              <a:t>on the action plan.</a:t>
             </a:r>
           </a:p>
           <a:p>
@@ -1259,7 +1259,7 @@
           </a:p>
           <a:p>
             <a:r>
-              <a:t>  presentation that ends without securing sign-off hasn't finished the job.</a:t>
+              <a:t>presentation that ends without securing sign-off hasn't finished the job.</a:t>
             </a:r>
           </a:p>
           <a:p>
@@ -1404,7 +1404,7 @@
           </a:p>
           <a:p>
             <a:r>
-              <a:t>   Feedback Record → obtain the sign-off.</a:t>
+              <a:t>Feedback Record → obtain the sign-off.</a:t>
             </a:r>
           </a:p>
           <a:p>
@@ -1529,7 +1529,7 @@
           </a:p>
           <a:p>
             <a:r>
-              <a:t>  borders. Reading it back to them wastes the room's time.</a:t>
+              <a:t>borders. Reading it back to them wastes the room's time.</a:t>
             </a:r>
           </a:p>
           <a:p>
@@ -1539,7 +1539,7 @@
           </a:p>
           <a:p>
             <a:r>
-              <a:t>  verbally. The slides prompt you; they aren't the script.</a:t>
+              <a:t>verbally. The slides prompt you; they aren't the script.</a:t>
             </a:r>
           </a:p>
           <a:p>
@@ -1549,7 +1549,7 @@
           </a:p>
           <a:p>
             <a:r>
-              <a:t>  Presentation Deck template — the exact shape AT1 Part B requires.</a:t>
+              <a:t>Presentation Deck template — the exact shape AT1 Part B requires.</a:t>
             </a:r>
           </a:p>
           <a:p>
@@ -1664,7 +1664,7 @@
           </a:p>
           <a:p>
             <a:r>
-              <a:t>  You're building to the recommendation, not burying it.</a:t>
+              <a:t>You're building to the recommendation, not burying it.</a:t>
             </a:r>
           </a:p>
           <a:p>
@@ -1674,7 +1674,7 @@
           </a:p>
           <a:p>
             <a:r>
-              <a:t>  recommendation and the PLAN get the airtime (bolded) — that's what the board acts on.</a:t>
+              <a:t>recommendation and the PLAN get the airtime (bolded) — that's what the board acts on.</a:t>
             </a:r>
           </a:p>
           <a:p>
@@ -1799,7 +1799,7 @@
           </a:p>
           <a:p>
             <a:r>
-              <a:t>  fit. These drive the decision, so they earn a slide.</a:t>
+              <a:t>fit. These drive the decision, so they earn a slide.</a:t>
             </a:r>
           </a:p>
           <a:p>
@@ -1809,7 +1809,7 @@
           </a:p>
           <a:p>
             <a:r>
-              <a:t>  The board doesn't decide on your method — it decides on your recommendation.</a:t>
+              <a:t>The board doesn't decide on your method — it decides on your recommendation.</a:t>
             </a:r>
           </a:p>
           <a:p>
@@ -1934,12 +1934,12 @@
           </a:p>
           <a:p>
             <a:r>
-              <a:t>  TIME it to 10–15 min and cut if long; ANTICIPATE the board's questions and prepare answers;</a:t>
-            </a:r>
-          </a:p>
-          <a:p>
-            <a:r>
-              <a:t>  practise stating the ask and asking for sign-off — the bit most often fumbled.</a:t>
+              <a:t>TIME it to 10–15 min and cut if long; ANTICIPATE the board's questions and prepare answers;</a:t>
+            </a:r>
+          </a:p>
+          <a:p>
+            <a:r>
+              <a:t>practise stating the ask and asking for sign-off — the bit most often fumbled.</a:t>
             </a:r>
           </a:p>
           <a:p>
@@ -1949,7 +1949,7 @@
           </a:p>
           <a:p>
             <a:r>
-              <a:t>  slides. The board can tell instantly.</a:t>
+              <a:t>slides. The board can tell instantly.</a:t>
             </a:r>
           </a:p>
           <a:p>
@@ -2094,7 +2094,7 @@
           </a:p>
           <a:p>
             <a:r>
-              <a:t>   points; the recommendation and plan get the airtime.</a:t>
+              <a:t>points; the recommendation and plan get the airtime.</a:t>
             </a:r>
           </a:p>
           <a:p>
@@ -2224,7 +2224,7 @@
           </a:p>
           <a:p>
             <a:r>
-              <a:t>  seeking UP FRONT, then walk the case that justifies it.</a:t>
+              <a:t>seeking UP FRONT, then walk the case that justifies it.</a:t>
             </a:r>
           </a:p>
           <a:p>
@@ -2234,7 +2234,7 @@
           </a:p>
           <a:p>
             <a:r>
-              <a:t>  here's why." Then the context/gap/options land as support for a known ask.</a:t>
+              <a:t>here's why." Then the context/gap/options land as support for a known ask.</a:t>
             </a:r>
           </a:p>
           <a:p>
@@ -2244,7 +2244,7 @@
           </a:p>
           <a:p>
             <a:r>
-              <a:t>  you're driving at spends your pitch guessing instead of weighing.</a:t>
+              <a:t>you're driving at spends your pitch guessing instead of weighing.</a:t>
             </a:r>
           </a:p>
           <a:p>
@@ -2359,7 +2359,7 @@
           </a:p>
           <a:p>
             <a:r>
-              <a:t>  (the CBA + risk) → put the ACTION PLAN, explicitly seeking the board's feedback and approval.</a:t>
+              <a:t>(the CBA + risk) → put the ACTION PLAN, explicitly seeking the board's feedback and approval.</a:t>
             </a:r>
           </a:p>
           <a:p>
@@ -2369,12 +2369,12 @@
           </a:p>
           <a:p>
             <a:r>
-              <a:t>  asking for a decision — not delivering a lecture. Tone is "here's my recommendation and why",</a:t>
-            </a:r>
-          </a:p>
-          <a:p>
-            <a:r>
-              <a:t>  not "let me teach you cloud".</a:t>
+              <a:t>asking for a decision — not delivering a lecture. Tone is "here's my recommendation and why",</a:t>
+            </a:r>
+          </a:p>
+          <a:p>
+            <a:r>
+              <a:t>not "let me teach you cloud".</a:t>
             </a:r>
           </a:p>
           <a:p>
@@ -2384,7 +2384,7 @@
           </a:p>
           <a:p>
             <a:r>
-              <a:t>  verbal seek is an assessed act, not a formality.</a:t>
+              <a:t>verbal seek is an assessed act, not a formality.</a:t>
             </a:r>
           </a:p>
           <a:p>
@@ -2499,7 +2499,7 @@
           </a:p>
           <a:p>
             <a:r>
-              <a:t>  database the vendor runs for us." Don't assume they know the acronyms.</a:t>
+              <a:t>database the vendor runs for us." Don't assume they know the acronyms.</a:t>
             </a:r>
           </a:p>
           <a:p>
@@ -2509,7 +2509,7 @@
           </a:p>
           <a:p>
             <a:r>
-              <a:t>  and subnets. Translate every technical point into what it means for YAT.</a:t>
+              <a:t>and subnets. Translate every technical point into what it means for YAT.</a:t>
             </a:r>
           </a:p>
           <a:p>
@@ -2519,7 +2519,7 @@
           </a:p>
           <a:p>
             <a:r>
-              <a:t>  stop being persuaded.</a:t>
+              <a:t>stop being persuaded.</a:t>
             </a:r>
           </a:p>
           <a:p>
@@ -6220,16 +6220,16 @@
             <a:r>
               <a:rPr sz="2400" b="1" i="0">
                 <a:solidFill>
-                  <a:srgbClr val="27B5CE"/>
+                  <a:srgbClr val="EDAB0C"/>
                 </a:solidFill>
                 <a:latin typeface="Roboto"/>
               </a:rPr>
               <a:t>■  </a:t>
             </a:r>
             <a:r>
-              <a:rPr sz="2400" b="1" i="0">
-                <a:solidFill>
-                  <a:srgbClr val="27B5CE"/>
+              <a:rPr sz="2400" b="0" i="0">
+                <a:solidFill>
+                  <a:srgbClr val="2A2929"/>
                 </a:solidFill>
                 <a:latin typeface="Roboto"/>
               </a:rPr>
@@ -6593,16 +6593,16 @@
             <a:r>
               <a:rPr sz="2400" b="1" i="0">
                 <a:solidFill>
-                  <a:srgbClr val="27B5CE"/>
+                  <a:srgbClr val="EDAB0C"/>
                 </a:solidFill>
                 <a:latin typeface="Roboto"/>
               </a:rPr>
               <a:t>■  </a:t>
             </a:r>
             <a:r>
-              <a:rPr sz="2400" b="1" i="0">
-                <a:solidFill>
-                  <a:srgbClr val="27B5CE"/>
+              <a:rPr sz="2400" b="0" i="0">
+                <a:solidFill>
+                  <a:srgbClr val="2A2929"/>
                 </a:solidFill>
                 <a:latin typeface="Roboto"/>
               </a:rPr>
@@ -6966,16 +6966,16 @@
             <a:r>
               <a:rPr sz="2400" b="1" i="0">
                 <a:solidFill>
-                  <a:srgbClr val="27B5CE"/>
+                  <a:srgbClr val="EDAB0C"/>
                 </a:solidFill>
                 <a:latin typeface="Roboto"/>
               </a:rPr>
               <a:t>■  </a:t>
             </a:r>
             <a:r>
-              <a:rPr sz="2400" b="1" i="0">
-                <a:solidFill>
-                  <a:srgbClr val="27B5CE"/>
+              <a:rPr sz="2400" b="0" i="0">
+                <a:solidFill>
+                  <a:srgbClr val="2A2929"/>
                 </a:solidFill>
                 <a:latin typeface="Roboto"/>
               </a:rPr>
@@ -7306,7 +7306,7 @@
               <a:t>■  </a:t>
             </a:r>
             <a:r>
-              <a:rPr sz="1700" b="1" i="0">
+              <a:rPr sz="1700" b="0" i="0">
                 <a:solidFill>
                   <a:srgbClr val="2A2929"/>
                 </a:solidFill>
@@ -7454,7 +7454,7 @@
             <a:r>
               <a:rPr sz="1700" b="1" i="0">
                 <a:solidFill>
-                  <a:srgbClr val="27B5CE"/>
+                  <a:srgbClr val="EDAB0C"/>
                 </a:solidFill>
                 <a:latin typeface="Roboto"/>
               </a:rPr>
@@ -7463,7 +7463,7 @@
             <a:r>
               <a:rPr sz="1700" b="0" i="0">
                 <a:solidFill>
-                  <a:srgbClr val="27B5CE"/>
+                  <a:srgbClr val="2A2929"/>
                 </a:solidFill>
                 <a:latin typeface="Roboto"/>
               </a:rPr>
@@ -8766,16 +8766,16 @@
             <a:r>
               <a:rPr sz="2400" b="1" i="0">
                 <a:solidFill>
-                  <a:srgbClr val="205F61"/>
+                  <a:srgbClr val="EDAB0C"/>
                 </a:solidFill>
                 <a:latin typeface="Roboto"/>
               </a:rPr>
               <a:t>■  </a:t>
             </a:r>
             <a:r>
-              <a:rPr sz="2400" b="1" i="0">
-                <a:solidFill>
-                  <a:srgbClr val="205F61"/>
+              <a:rPr sz="2400" b="0" i="0">
+                <a:solidFill>
+                  <a:srgbClr val="2A2929"/>
                 </a:solidFill>
                 <a:latin typeface="Roboto"/>
               </a:rPr>
@@ -9139,16 +9139,16 @@
             <a:r>
               <a:rPr sz="2400" b="1" i="0">
                 <a:solidFill>
-                  <a:srgbClr val="205F61"/>
+                  <a:srgbClr val="EDAB0C"/>
                 </a:solidFill>
                 <a:latin typeface="Roboto"/>
               </a:rPr>
               <a:t>■  </a:t>
             </a:r>
             <a:r>
-              <a:rPr sz="2400" b="1" i="0">
-                <a:solidFill>
-                  <a:srgbClr val="205F61"/>
+              <a:rPr sz="2400" b="0" i="0">
+                <a:solidFill>
+                  <a:srgbClr val="2A2929"/>
                 </a:solidFill>
                 <a:latin typeface="Roboto"/>
               </a:rPr>
@@ -9590,16 +9590,16 @@
             <a:r>
               <a:rPr sz="2400" b="1" i="0">
                 <a:solidFill>
-                  <a:srgbClr val="205F61"/>
+                  <a:srgbClr val="EDAB0C"/>
                 </a:solidFill>
                 <a:latin typeface="Roboto"/>
               </a:rPr>
               <a:t>■  </a:t>
             </a:r>
             <a:r>
-              <a:rPr sz="2400" b="1" i="0">
-                <a:solidFill>
-                  <a:srgbClr val="205F61"/>
+              <a:rPr sz="2400" b="0" i="0">
+                <a:solidFill>
+                  <a:srgbClr val="2A2929"/>
                 </a:solidFill>
                 <a:latin typeface="Roboto"/>
               </a:rPr>
@@ -9917,16 +9917,16 @@
             <a:r>
               <a:rPr sz="2400" b="1" i="0">
                 <a:solidFill>
-                  <a:srgbClr val="92268F"/>
+                  <a:srgbClr val="EDAB0C"/>
                 </a:solidFill>
                 <a:latin typeface="Roboto"/>
               </a:rPr>
               <a:t>■  </a:t>
             </a:r>
             <a:r>
-              <a:rPr sz="2400" b="1" i="0">
-                <a:solidFill>
-                  <a:srgbClr val="92268F"/>
+              <a:rPr sz="2400" b="0" i="0">
+                <a:solidFill>
+                  <a:srgbClr val="2A2929"/>
                 </a:solidFill>
                 <a:latin typeface="Roboto"/>
               </a:rPr>
@@ -10321,16 +10321,16 @@
             <a:r>
               <a:rPr sz="2400" b="1" i="0">
                 <a:solidFill>
-                  <a:srgbClr val="205F61"/>
+                  <a:srgbClr val="EDAB0C"/>
                 </a:solidFill>
                 <a:latin typeface="Roboto"/>
               </a:rPr>
               <a:t>■  </a:t>
             </a:r>
             <a:r>
-              <a:rPr sz="2400" b="1" i="0">
-                <a:solidFill>
-                  <a:srgbClr val="205F61"/>
+              <a:rPr sz="2400" b="0" i="0">
+                <a:solidFill>
+                  <a:srgbClr val="2A2929"/>
                 </a:solidFill>
                 <a:latin typeface="Roboto"/>
               </a:rPr>
@@ -10661,7 +10661,7 @@
               <a:t>■  </a:t>
             </a:r>
             <a:r>
-              <a:rPr sz="1700" b="1" i="0">
+              <a:rPr sz="1700" b="0" i="0">
                 <a:solidFill>
                   <a:srgbClr val="2A2929"/>
                 </a:solidFill>
@@ -10747,7 +10747,7 @@
             <a:r>
               <a:rPr sz="1700" b="1" i="0">
                 <a:solidFill>
-                  <a:srgbClr val="205F61"/>
+                  <a:srgbClr val="EDAB0C"/>
                 </a:solidFill>
                 <a:latin typeface="Roboto"/>
               </a:rPr>
@@ -10756,7 +10756,7 @@
             <a:r>
               <a:rPr sz="1700" b="0" i="0">
                 <a:solidFill>
-                  <a:srgbClr val="205F61"/>
+                  <a:srgbClr val="2A2929"/>
                 </a:solidFill>
                 <a:latin typeface="Roboto"/>
               </a:rPr>
@@ -12270,16 +12270,16 @@
             <a:r>
               <a:rPr sz="2400" b="1" i="0">
                 <a:solidFill>
-                  <a:srgbClr val="92268F"/>
+                  <a:srgbClr val="EDAB0C"/>
                 </a:solidFill>
                 <a:latin typeface="Roboto"/>
               </a:rPr>
               <a:t>■  </a:t>
             </a:r>
             <a:r>
-              <a:rPr sz="2400" b="1" i="0">
-                <a:solidFill>
-                  <a:srgbClr val="92268F"/>
+              <a:rPr sz="2400" b="0" i="0">
+                <a:solidFill>
+                  <a:srgbClr val="2A2929"/>
                 </a:solidFill>
                 <a:latin typeface="Roboto"/>
               </a:rPr>
@@ -12628,16 +12628,16 @@
             <a:r>
               <a:rPr sz="2400" b="1" i="0">
                 <a:solidFill>
-                  <a:srgbClr val="92268F"/>
+                  <a:srgbClr val="EDAB0C"/>
                 </a:solidFill>
                 <a:latin typeface="Roboto"/>
               </a:rPr>
               <a:t>■  </a:t>
             </a:r>
             <a:r>
-              <a:rPr sz="2400" b="1" i="0">
-                <a:solidFill>
-                  <a:srgbClr val="92268F"/>
+              <a:rPr sz="2400" b="0" i="0">
+                <a:solidFill>
+                  <a:srgbClr val="2A2929"/>
                 </a:solidFill>
                 <a:latin typeface="Roboto"/>
               </a:rPr>
@@ -12915,7 +12915,7 @@
               <a:t>■  </a:t>
             </a:r>
             <a:r>
-              <a:rPr sz="2400" b="1" i="0">
+              <a:rPr sz="2400" b="0" i="0">
                 <a:solidFill>
                   <a:srgbClr val="2A2929"/>
                 </a:solidFill>
@@ -12946,7 +12946,7 @@
               <a:t>■  </a:t>
             </a:r>
             <a:r>
-              <a:rPr sz="2400" b="1" i="0">
+              <a:rPr sz="2400" b="0" i="0">
                 <a:solidFill>
                   <a:srgbClr val="2A2929"/>
                 </a:solidFill>
@@ -12970,16 +12970,16 @@
             <a:r>
               <a:rPr sz="2400" b="1" i="0">
                 <a:solidFill>
-                  <a:srgbClr val="92268F"/>
+                  <a:srgbClr val="EDAB0C"/>
                 </a:solidFill>
                 <a:latin typeface="Roboto"/>
               </a:rPr>
               <a:t>■  </a:t>
             </a:r>
             <a:r>
-              <a:rPr sz="2400" b="1" i="0">
-                <a:solidFill>
-                  <a:srgbClr val="92268F"/>
+              <a:rPr sz="2400" b="0" i="0">
+                <a:solidFill>
+                  <a:srgbClr val="2A2929"/>
                 </a:solidFill>
                 <a:latin typeface="Roboto"/>
               </a:rPr>
@@ -13405,16 +13405,16 @@
             <a:r>
               <a:rPr sz="2400" b="1" i="0">
                 <a:solidFill>
-                  <a:srgbClr val="92268F"/>
+                  <a:srgbClr val="EDAB0C"/>
                 </a:solidFill>
                 <a:latin typeface="Roboto"/>
               </a:rPr>
               <a:t>■  </a:t>
             </a:r>
             <a:r>
-              <a:rPr sz="2400" b="1" i="0">
-                <a:solidFill>
-                  <a:srgbClr val="92268F"/>
+              <a:rPr sz="2400" b="0" i="0">
+                <a:solidFill>
+                  <a:srgbClr val="2A2929"/>
                 </a:solidFill>
                 <a:latin typeface="Roboto"/>
               </a:rPr>
@@ -13745,7 +13745,7 @@
               <a:t>■  </a:t>
             </a:r>
             <a:r>
-              <a:rPr sz="1700" b="1" i="0">
+              <a:rPr sz="1700" b="0" i="0">
                 <a:solidFill>
                   <a:srgbClr val="2A2929"/>
                 </a:solidFill>
@@ -13893,7 +13893,7 @@
             <a:r>
               <a:rPr sz="1700" b="1" i="0">
                 <a:solidFill>
-                  <a:srgbClr val="92268F"/>
+                  <a:srgbClr val="EDAB0C"/>
                 </a:solidFill>
                 <a:latin typeface="Roboto"/>
               </a:rPr>
@@ -13902,7 +13902,7 @@
             <a:r>
               <a:rPr sz="1700" b="0" i="0">
                 <a:solidFill>
-                  <a:srgbClr val="92268F"/>
+                  <a:srgbClr val="2A2929"/>
                 </a:solidFill>
                 <a:latin typeface="Roboto"/>
               </a:rPr>

--- a/S1-CL1-Cloud-Design-Build/delivery/topic_05/Topic_05_Slides.pptx
+++ b/S1-CL1-Cloud-Design-Build/delivery/topic_05/Topic_05_Slides.pptx
@@ -4,32 +4,35 @@
   <p:sldMasterIdLst>
     <p:sldMasterId id="2147483648" r:id="rId1"/>
   </p:sldMasterIdLst>
+  <p:notesMasterIdLst>
+    <p:notesMasterId r:id="rId25"/>
+  </p:notesMasterIdLst>
   <p:sldIdLst>
-    <p:sldId id="256" r:id="rId7"/>
-    <p:sldId id="257" r:id="rId8"/>
-    <p:sldId id="258" r:id="rId10"/>
-    <p:sldId id="259" r:id="rId11"/>
-    <p:sldId id="260" r:id="rId12"/>
-    <p:sldId id="261" r:id="rId13"/>
-    <p:sldId id="262" r:id="rId14"/>
-    <p:sldId id="263" r:id="rId15"/>
-    <p:sldId id="264" r:id="rId16"/>
-    <p:sldId id="265" r:id="rId17"/>
-    <p:sldId id="266" r:id="rId18"/>
-    <p:sldId id="267" r:id="rId19"/>
-    <p:sldId id="268" r:id="rId20"/>
-    <p:sldId id="269" r:id="rId21"/>
-    <p:sldId id="270" r:id="rId22"/>
-    <p:sldId id="271" r:id="rId23"/>
-    <p:sldId id="272" r:id="rId24"/>
-    <p:sldId id="273" r:id="rId25"/>
-    <p:sldId id="274" r:id="rId26"/>
-    <p:sldId id="275" r:id="rId27"/>
-    <p:sldId id="276" r:id="rId28"/>
-    <p:sldId id="277" r:id="rId29"/>
-    <p:sldId id="278" r:id="rId30"/>
+    <p:sldId id="256" r:id="rId2"/>
+    <p:sldId id="257" r:id="rId3"/>
+    <p:sldId id="258" r:id="rId4"/>
+    <p:sldId id="259" r:id="rId5"/>
+    <p:sldId id="260" r:id="rId6"/>
+    <p:sldId id="261" r:id="rId7"/>
+    <p:sldId id="262" r:id="rId8"/>
+    <p:sldId id="263" r:id="rId9"/>
+    <p:sldId id="264" r:id="rId10"/>
+    <p:sldId id="265" r:id="rId11"/>
+    <p:sldId id="266" r:id="rId12"/>
+    <p:sldId id="267" r:id="rId13"/>
+    <p:sldId id="268" r:id="rId14"/>
+    <p:sldId id="269" r:id="rId15"/>
+    <p:sldId id="270" r:id="rId16"/>
+    <p:sldId id="271" r:id="rId17"/>
+    <p:sldId id="272" r:id="rId18"/>
+    <p:sldId id="273" r:id="rId19"/>
+    <p:sldId id="274" r:id="rId20"/>
+    <p:sldId id="275" r:id="rId21"/>
+    <p:sldId id="276" r:id="rId22"/>
+    <p:sldId id="277" r:id="rId23"/>
+    <p:sldId id="278" r:id="rId24"/>
   </p:sldIdLst>
-  <p:sldSz cx="12191695" cy="6858000" type="screen4x3"/>
+  <p:sldSz cx="12192000" cy="6858000"/>
   <p:notesSz cx="6858000" cy="9144000"/>
   <p:defaultTextStyle>
     <a:defPPr>
@@ -126,11 +129,27 @@
       </a:defRPr>
     </a:lvl9pPr>
   </p:defaultTextStyle>
+  <p:extLst>
+    <p:ext uri="{EFAFB233-063F-42B5-8137-9DF3F51BA10A}">
+      <p15:sldGuideLst xmlns:p15="http://schemas.microsoft.com/office/powerpoint/2012/main">
+        <p15:guide id="1" orient="horz" pos="2160">
+          <p15:clr>
+            <a:srgbClr val="A4A3A4"/>
+          </p15:clr>
+        </p15:guide>
+        <p15:guide id="2" pos="2880">
+          <p15:clr>
+            <a:srgbClr val="A4A3A4"/>
+          </p15:clr>
+        </p15:guide>
+      </p15:sldGuideLst>
+    </p:ext>
+  </p:extLst>
 </p:presentation>
 </file>
 
 <file path=ppt/notesMasters/notesMaster1.xml><?xml version="1.0" encoding="utf-8"?>
-<p:notesMaster xmlns:a="http://schemas.openxmlformats.org/drawingml/2006/main" xmlns:p="http://schemas.openxmlformats.org/presentationml/2006/main" xmlns:r="http://schemas.openxmlformats.org/officeDocument/2006/relationships">
+<p:notesMaster xmlns:a="http://schemas.openxmlformats.org/drawingml/2006/main" xmlns:r="http://schemas.openxmlformats.org/officeDocument/2006/relationships" xmlns:p="http://schemas.openxmlformats.org/presentationml/2006/main">
   <p:cSld>
     <p:bg>
       <p:bgRef idx="1001">
@@ -164,7 +183,7 @@
         <p:spPr>
           <a:xfrm>
             <a:off x="0" y="0"/>
-            <a:ext cx="2971800" cy="457200"/>
+            <a:ext cx="2971800" cy="458788"/>
           </a:xfrm>
           <a:prstGeom prst="rect">
             <a:avLst/>
@@ -195,7 +214,7 @@
         <p:spPr>
           <a:xfrm>
             <a:off x="3884613" y="0"/>
-            <a:ext cx="2971800" cy="457200"/>
+            <a:ext cx="2971800" cy="458788"/>
           </a:xfrm>
           <a:prstGeom prst="rect">
             <a:avLst/>
@@ -209,9 +228,9 @@
             </a:lvl1pPr>
           </a:lstStyle>
           <a:p>
-            <a:fld id="{0F89C1C7-3DCD-1040-A9CF-14679D8B5DDD}" type="datetimeFigureOut">
+            <a:fld id="{5BB44E12-6F80-1943-B909-1F93FD3819C5}" type="datetimeFigureOut">
               <a:rPr lang="en-US" smtClean="0"/>
-              <a:t>10/17/16</a:t>
+              <a:t>7/22/26</a:t>
             </a:fld>
             <a:endParaRPr lang="en-US"/>
           </a:p>
@@ -229,8 +248,8 @@
         </p:nvSpPr>
         <p:spPr>
           <a:xfrm>
-            <a:off x="1143000" y="685800"/>
-            <a:ext cx="4572000" cy="3429000"/>
+            <a:off x="685800" y="1143000"/>
+            <a:ext cx="5486400" cy="3086100"/>
           </a:xfrm>
           <a:prstGeom prst="rect">
             <a:avLst/>
@@ -262,8 +281,8 @@
         </p:nvSpPr>
         <p:spPr>
           <a:xfrm>
-            <a:off x="685800" y="4343400"/>
-            <a:ext cx="5486400" cy="4114800"/>
+            <a:off x="685800" y="4400550"/>
+            <a:ext cx="5486400" cy="3600450"/>
           </a:xfrm>
           <a:prstGeom prst="rect">
             <a:avLst/>
@@ -275,35 +294,35 @@
           <a:p>
             <a:pPr lvl="0"/>
             <a:r>
-              <a:rPr lang="en-US" smtClean="0"/>
+              <a:rPr lang="en-GB"/>
               <a:t>Click to edit Master text styles</a:t>
             </a:r>
           </a:p>
           <a:p>
             <a:pPr lvl="1"/>
             <a:r>
-              <a:rPr lang="en-US" smtClean="0"/>
+              <a:rPr lang="en-GB"/>
               <a:t>Second level</a:t>
             </a:r>
           </a:p>
           <a:p>
             <a:pPr lvl="2"/>
             <a:r>
-              <a:rPr lang="en-US" smtClean="0"/>
+              <a:rPr lang="en-GB"/>
               <a:t>Third level</a:t>
             </a:r>
           </a:p>
           <a:p>
             <a:pPr lvl="3"/>
             <a:r>
-              <a:rPr lang="en-US" smtClean="0"/>
+              <a:rPr lang="en-GB"/>
               <a:t>Fourth level</a:t>
             </a:r>
           </a:p>
           <a:p>
             <a:pPr lvl="4"/>
             <a:r>
-              <a:rPr lang="en-US" smtClean="0"/>
+              <a:rPr lang="en-GB"/>
               <a:t>Fifth level</a:t>
             </a:r>
             <a:endParaRPr lang="en-US"/>
@@ -323,7 +342,7 @@
         <p:spPr>
           <a:xfrm>
             <a:off x="0" y="8685213"/>
-            <a:ext cx="2971800" cy="457200"/>
+            <a:ext cx="2971800" cy="458787"/>
           </a:xfrm>
           <a:prstGeom prst="rect">
             <a:avLst/>
@@ -354,7 +373,7 @@
         <p:spPr>
           <a:xfrm>
             <a:off x="3884613" y="8685213"/>
-            <a:ext cx="2971800" cy="457200"/>
+            <a:ext cx="2971800" cy="458787"/>
           </a:xfrm>
           <a:prstGeom prst="rect">
             <a:avLst/>
@@ -368,7 +387,7 @@
             </a:lvl1pPr>
           </a:lstStyle>
           <a:p>
-            <a:fld id="{BB5E49A5-4136-284D-997B-48E1D791AD67}" type="slidenum">
+            <a:fld id="{3AFECE7C-5934-B040-8B72-BC817ED128E3}" type="slidenum">
               <a:rPr lang="en-US" smtClean="0"/>
               <a:t>‹#›</a:t>
             </a:fld>
@@ -379,13 +398,13 @@
     </p:spTree>
     <p:extLst>
       <p:ext uri="{BB962C8B-B14F-4D97-AF65-F5344CB8AC3E}">
-        <p14:creationId xmlns:p14="http://schemas.microsoft.com/office/powerpoint/2010/main" val="2623252185"/>
+        <p14:creationId xmlns:p14="http://schemas.microsoft.com/office/powerpoint/2010/main" val="4056332393"/>
       </p:ext>
     </p:extLst>
   </p:cSld>
   <p:clrMap bg1="lt1" tx1="dk1" bg2="lt2" tx2="dk2" accent1="accent1" accent2="accent2" accent3="accent3" accent4="accent4" accent5="accent5" accent6="accent6" hlink="hlink" folHlink="folHlink"/>
   <p:notesStyle>
-    <a:lvl1pPr marL="0" algn="l" defTabSz="457200" rtl="0" eaLnBrk="1" latinLnBrk="0" hangingPunct="1">
+    <a:lvl1pPr marL="0" algn="l" defTabSz="914400" rtl="0" eaLnBrk="1" latinLnBrk="0" hangingPunct="1">
       <a:defRPr sz="1200" kern="1200">
         <a:solidFill>
           <a:schemeClr val="tx1"/>
@@ -395,7 +414,7 @@
         <a:cs typeface="+mn-cs"/>
       </a:defRPr>
     </a:lvl1pPr>
-    <a:lvl2pPr marL="457200" algn="l" defTabSz="457200" rtl="0" eaLnBrk="1" latinLnBrk="0" hangingPunct="1">
+    <a:lvl2pPr marL="457200" algn="l" defTabSz="914400" rtl="0" eaLnBrk="1" latinLnBrk="0" hangingPunct="1">
       <a:defRPr sz="1200" kern="1200">
         <a:solidFill>
           <a:schemeClr val="tx1"/>
@@ -405,7 +424,7 @@
         <a:cs typeface="+mn-cs"/>
       </a:defRPr>
     </a:lvl2pPr>
-    <a:lvl3pPr marL="914400" algn="l" defTabSz="457200" rtl="0" eaLnBrk="1" latinLnBrk="0" hangingPunct="1">
+    <a:lvl3pPr marL="914400" algn="l" defTabSz="914400" rtl="0" eaLnBrk="1" latinLnBrk="0" hangingPunct="1">
       <a:defRPr sz="1200" kern="1200">
         <a:solidFill>
           <a:schemeClr val="tx1"/>
@@ -415,7 +434,7 @@
         <a:cs typeface="+mn-cs"/>
       </a:defRPr>
     </a:lvl3pPr>
-    <a:lvl4pPr marL="1371600" algn="l" defTabSz="457200" rtl="0" eaLnBrk="1" latinLnBrk="0" hangingPunct="1">
+    <a:lvl4pPr marL="1371600" algn="l" defTabSz="914400" rtl="0" eaLnBrk="1" latinLnBrk="0" hangingPunct="1">
       <a:defRPr sz="1200" kern="1200">
         <a:solidFill>
           <a:schemeClr val="tx1"/>
@@ -425,7 +444,7 @@
         <a:cs typeface="+mn-cs"/>
       </a:defRPr>
     </a:lvl4pPr>
-    <a:lvl5pPr marL="1828800" algn="l" defTabSz="457200" rtl="0" eaLnBrk="1" latinLnBrk="0" hangingPunct="1">
+    <a:lvl5pPr marL="1828800" algn="l" defTabSz="914400" rtl="0" eaLnBrk="1" latinLnBrk="0" hangingPunct="1">
       <a:defRPr sz="1200" kern="1200">
         <a:solidFill>
           <a:schemeClr val="tx1"/>
@@ -435,7 +454,7 @@
         <a:cs typeface="+mn-cs"/>
       </a:defRPr>
     </a:lvl5pPr>
-    <a:lvl6pPr marL="2286000" algn="l" defTabSz="457200" rtl="0" eaLnBrk="1" latinLnBrk="0" hangingPunct="1">
+    <a:lvl6pPr marL="2286000" algn="l" defTabSz="914400" rtl="0" eaLnBrk="1" latinLnBrk="0" hangingPunct="1">
       <a:defRPr sz="1200" kern="1200">
         <a:solidFill>
           <a:schemeClr val="tx1"/>
@@ -445,7 +464,7 @@
         <a:cs typeface="+mn-cs"/>
       </a:defRPr>
     </a:lvl6pPr>
-    <a:lvl7pPr marL="2743200" algn="l" defTabSz="457200" rtl="0" eaLnBrk="1" latinLnBrk="0" hangingPunct="1">
+    <a:lvl7pPr marL="2743200" algn="l" defTabSz="914400" rtl="0" eaLnBrk="1" latinLnBrk="0" hangingPunct="1">
       <a:defRPr sz="1200" kern="1200">
         <a:solidFill>
           <a:schemeClr val="tx1"/>
@@ -455,7 +474,7 @@
         <a:cs typeface="+mn-cs"/>
       </a:defRPr>
     </a:lvl7pPr>
-    <a:lvl8pPr marL="3200400" algn="l" defTabSz="457200" rtl="0" eaLnBrk="1" latinLnBrk="0" hangingPunct="1">
+    <a:lvl8pPr marL="3200400" algn="l" defTabSz="914400" rtl="0" eaLnBrk="1" latinLnBrk="0" hangingPunct="1">
       <a:defRPr sz="1200" kern="1200">
         <a:solidFill>
           <a:schemeClr val="tx1"/>
@@ -465,7 +484,7 @@
         <a:cs typeface="+mn-cs"/>
       </a:defRPr>
     </a:lvl8pPr>
-    <a:lvl9pPr marL="3657600" algn="l" defTabSz="457200" rtl="0" eaLnBrk="1" latinLnBrk="0" hangingPunct="1">
+    <a:lvl9pPr marL="3657600" algn="l" defTabSz="914400" rtl="0" eaLnBrk="1" latinLnBrk="0" hangingPunct="1">
       <a:defRPr sz="1200" kern="1200">
         <a:solidFill>
           <a:schemeClr val="tx1"/>
@@ -480,7 +499,7 @@
 </file>
 
 <file path=ppt/notesSlides/notesSlide1.xml><?xml version="1.0" encoding="utf-8"?>
-<p:notes xmlns:a="http://schemas.openxmlformats.org/drawingml/2006/main" xmlns:p="http://schemas.openxmlformats.org/presentationml/2006/main" xmlns:r="http://schemas.openxmlformats.org/officeDocument/2006/relationships">
+<p:notes xmlns:a="http://schemas.openxmlformats.org/drawingml/2006/main" xmlns:r="http://schemas.openxmlformats.org/officeDocument/2006/relationships" xmlns:p="http://schemas.openxmlformats.org/presentationml/2006/main">
   <p:cSld>
     <p:spTree>
       <p:nvGrpSpPr>
@@ -500,7 +519,7 @@
         <p:nvSpPr>
           <p:cNvPr id="2" name="Slide Image Placeholder 1"/>
           <p:cNvSpPr>
-            <a:spLocks noGrp="1"/>
+            <a:spLocks noGrp="1" noRot="1" noChangeAspect="1"/>
           </p:cNvSpPr>
           <p:nvPr>
             <p:ph type="sldImg" idx="2"/>
@@ -515,7 +534,7 @@
             <a:spLocks noGrp="1"/>
           </p:cNvSpPr>
           <p:nvPr>
-            <p:ph type="body" idx="3" sz="quarter"/>
+            <p:ph type="body" sz="quarter" idx="3"/>
           </p:nvPr>
         </p:nvSpPr>
         <p:spPr/>
@@ -606,7 +625,7 @@
             <a:spLocks noGrp="1"/>
           </p:cNvSpPr>
           <p:nvPr>
-            <p:ph type="sldNum" idx="5" sz="quarter"/>
+            <p:ph type="sldNum" sz="quarter" idx="5"/>
           </p:nvPr>
         </p:nvSpPr>
         <p:spPr/>
@@ -620,7 +639,7 @@
 </file>
 
 <file path=ppt/notesSlides/notesSlide10.xml><?xml version="1.0" encoding="utf-8"?>
-<p:notes xmlns:a="http://schemas.openxmlformats.org/drawingml/2006/main" xmlns:p="http://schemas.openxmlformats.org/presentationml/2006/main" xmlns:r="http://schemas.openxmlformats.org/officeDocument/2006/relationships">
+<p:notes xmlns:a="http://schemas.openxmlformats.org/drawingml/2006/main" xmlns:r="http://schemas.openxmlformats.org/officeDocument/2006/relationships" xmlns:p="http://schemas.openxmlformats.org/presentationml/2006/main">
   <p:cSld>
     <p:spTree>
       <p:nvGrpSpPr>
@@ -640,7 +659,7 @@
         <p:nvSpPr>
           <p:cNvPr id="2" name="Slide Image Placeholder 1"/>
           <p:cNvSpPr>
-            <a:spLocks noGrp="1"/>
+            <a:spLocks noGrp="1" noRot="1" noChangeAspect="1"/>
           </p:cNvSpPr>
           <p:nvPr>
             <p:ph type="sldImg" idx="2"/>
@@ -655,7 +674,7 @@
             <a:spLocks noGrp="1"/>
           </p:cNvSpPr>
           <p:nvPr>
-            <p:ph type="body" idx="3" sz="quarter"/>
+            <p:ph type="body" sz="quarter" idx="3"/>
           </p:nvPr>
         </p:nvSpPr>
         <p:spPr/>
@@ -756,7 +775,7 @@
             <a:spLocks noGrp="1"/>
           </p:cNvSpPr>
           <p:nvPr>
-            <p:ph type="sldNum" idx="5" sz="quarter"/>
+            <p:ph type="sldNum" sz="quarter" idx="5"/>
           </p:nvPr>
         </p:nvSpPr>
         <p:spPr/>
@@ -770,7 +789,7 @@
 </file>
 
 <file path=ppt/notesSlides/notesSlide11.xml><?xml version="1.0" encoding="utf-8"?>
-<p:notes xmlns:a="http://schemas.openxmlformats.org/drawingml/2006/main" xmlns:p="http://schemas.openxmlformats.org/presentationml/2006/main" xmlns:r="http://schemas.openxmlformats.org/officeDocument/2006/relationships">
+<p:notes xmlns:a="http://schemas.openxmlformats.org/drawingml/2006/main" xmlns:r="http://schemas.openxmlformats.org/officeDocument/2006/relationships" xmlns:p="http://schemas.openxmlformats.org/presentationml/2006/main">
   <p:cSld>
     <p:spTree>
       <p:nvGrpSpPr>
@@ -790,7 +809,7 @@
         <p:nvSpPr>
           <p:cNvPr id="2" name="Slide Image Placeholder 1"/>
           <p:cNvSpPr>
-            <a:spLocks noGrp="1"/>
+            <a:spLocks noGrp="1" noRot="1" noChangeAspect="1"/>
           </p:cNvSpPr>
           <p:nvPr>
             <p:ph type="sldImg" idx="2"/>
@@ -805,7 +824,7 @@
             <a:spLocks noGrp="1"/>
           </p:cNvSpPr>
           <p:nvPr>
-            <p:ph type="body" idx="3" sz="quarter"/>
+            <p:ph type="body" sz="quarter" idx="3"/>
           </p:nvPr>
         </p:nvSpPr>
         <p:spPr/>
@@ -891,7 +910,7 @@
             <a:spLocks noGrp="1"/>
           </p:cNvSpPr>
           <p:nvPr>
-            <p:ph type="sldNum" idx="5" sz="quarter"/>
+            <p:ph type="sldNum" sz="quarter" idx="5"/>
           </p:nvPr>
         </p:nvSpPr>
         <p:spPr/>
@@ -905,7 +924,7 @@
 </file>
 
 <file path=ppt/notesSlides/notesSlide12.xml><?xml version="1.0" encoding="utf-8"?>
-<p:notes xmlns:a="http://schemas.openxmlformats.org/drawingml/2006/main" xmlns:p="http://schemas.openxmlformats.org/presentationml/2006/main" xmlns:r="http://schemas.openxmlformats.org/officeDocument/2006/relationships">
+<p:notes xmlns:a="http://schemas.openxmlformats.org/drawingml/2006/main" xmlns:r="http://schemas.openxmlformats.org/officeDocument/2006/relationships" xmlns:p="http://schemas.openxmlformats.org/presentationml/2006/main">
   <p:cSld>
     <p:spTree>
       <p:nvGrpSpPr>
@@ -925,7 +944,7 @@
         <p:nvSpPr>
           <p:cNvPr id="2" name="Slide Image Placeholder 1"/>
           <p:cNvSpPr>
-            <a:spLocks noGrp="1"/>
+            <a:spLocks noGrp="1" noRot="1" noChangeAspect="1"/>
           </p:cNvSpPr>
           <p:nvPr>
             <p:ph type="sldImg" idx="2"/>
@@ -940,7 +959,7 @@
             <a:spLocks noGrp="1"/>
           </p:cNvSpPr>
           <p:nvPr>
-            <p:ph type="body" idx="3" sz="quarter"/>
+            <p:ph type="body" sz="quarter" idx="3"/>
           </p:nvPr>
         </p:nvSpPr>
         <p:spPr/>
@@ -1026,7 +1045,7 @@
             <a:spLocks noGrp="1"/>
           </p:cNvSpPr>
           <p:nvPr>
-            <p:ph type="sldNum" idx="5" sz="quarter"/>
+            <p:ph type="sldNum" sz="quarter" idx="5"/>
           </p:nvPr>
         </p:nvSpPr>
         <p:spPr/>
@@ -1040,7 +1059,7 @@
 </file>
 
 <file path=ppt/notesSlides/notesSlide13.xml><?xml version="1.0" encoding="utf-8"?>
-<p:notes xmlns:a="http://schemas.openxmlformats.org/drawingml/2006/main" xmlns:p="http://schemas.openxmlformats.org/presentationml/2006/main" xmlns:r="http://schemas.openxmlformats.org/officeDocument/2006/relationships">
+<p:notes xmlns:a="http://schemas.openxmlformats.org/drawingml/2006/main" xmlns:r="http://schemas.openxmlformats.org/officeDocument/2006/relationships" xmlns:p="http://schemas.openxmlformats.org/presentationml/2006/main">
   <p:cSld>
     <p:spTree>
       <p:nvGrpSpPr>
@@ -1060,7 +1079,7 @@
         <p:nvSpPr>
           <p:cNvPr id="2" name="Slide Image Placeholder 1"/>
           <p:cNvSpPr>
-            <a:spLocks noGrp="1"/>
+            <a:spLocks noGrp="1" noRot="1" noChangeAspect="1"/>
           </p:cNvSpPr>
           <p:nvPr>
             <p:ph type="sldImg" idx="2"/>
@@ -1075,7 +1094,7 @@
             <a:spLocks noGrp="1"/>
           </p:cNvSpPr>
           <p:nvPr>
-            <p:ph type="body" idx="3" sz="quarter"/>
+            <p:ph type="body" sz="quarter" idx="3"/>
           </p:nvPr>
         </p:nvSpPr>
         <p:spPr/>
@@ -1171,7 +1190,7 @@
             <a:spLocks noGrp="1"/>
           </p:cNvSpPr>
           <p:nvPr>
-            <p:ph type="sldNum" idx="5" sz="quarter"/>
+            <p:ph type="sldNum" sz="quarter" idx="5"/>
           </p:nvPr>
         </p:nvSpPr>
         <p:spPr/>
@@ -1185,7 +1204,7 @@
 </file>
 
 <file path=ppt/notesSlides/notesSlide14.xml><?xml version="1.0" encoding="utf-8"?>
-<p:notes xmlns:a="http://schemas.openxmlformats.org/drawingml/2006/main" xmlns:p="http://schemas.openxmlformats.org/presentationml/2006/main" xmlns:r="http://schemas.openxmlformats.org/officeDocument/2006/relationships">
+<p:notes xmlns:a="http://schemas.openxmlformats.org/drawingml/2006/main" xmlns:r="http://schemas.openxmlformats.org/officeDocument/2006/relationships" xmlns:p="http://schemas.openxmlformats.org/presentationml/2006/main">
   <p:cSld>
     <p:spTree>
       <p:nvGrpSpPr>
@@ -1205,7 +1224,7 @@
         <p:nvSpPr>
           <p:cNvPr id="2" name="Slide Image Placeholder 1"/>
           <p:cNvSpPr>
-            <a:spLocks noGrp="1"/>
+            <a:spLocks noGrp="1" noRot="1" noChangeAspect="1"/>
           </p:cNvSpPr>
           <p:nvPr>
             <p:ph type="sldImg" idx="2"/>
@@ -1220,7 +1239,7 @@
             <a:spLocks noGrp="1"/>
           </p:cNvSpPr>
           <p:nvPr>
-            <p:ph type="body" idx="3" sz="quarter"/>
+            <p:ph type="body" sz="quarter" idx="3"/>
           </p:nvPr>
         </p:nvSpPr>
         <p:spPr/>
@@ -1306,7 +1325,7 @@
             <a:spLocks noGrp="1"/>
           </p:cNvSpPr>
           <p:nvPr>
-            <p:ph type="sldNum" idx="5" sz="quarter"/>
+            <p:ph type="sldNum" sz="quarter" idx="5"/>
           </p:nvPr>
         </p:nvSpPr>
         <p:spPr/>
@@ -1320,7 +1339,7 @@
 </file>
 
 <file path=ppt/notesSlides/notesSlide15.xml><?xml version="1.0" encoding="utf-8"?>
-<p:notes xmlns:a="http://schemas.openxmlformats.org/drawingml/2006/main" xmlns:p="http://schemas.openxmlformats.org/presentationml/2006/main" xmlns:r="http://schemas.openxmlformats.org/officeDocument/2006/relationships">
+<p:notes xmlns:a="http://schemas.openxmlformats.org/drawingml/2006/main" xmlns:r="http://schemas.openxmlformats.org/officeDocument/2006/relationships" xmlns:p="http://schemas.openxmlformats.org/presentationml/2006/main">
   <p:cSld>
     <p:spTree>
       <p:nvGrpSpPr>
@@ -1340,7 +1359,7 @@
         <p:nvSpPr>
           <p:cNvPr id="2" name="Slide Image Placeholder 1"/>
           <p:cNvSpPr>
-            <a:spLocks noGrp="1"/>
+            <a:spLocks noGrp="1" noRot="1" noChangeAspect="1"/>
           </p:cNvSpPr>
           <p:nvPr>
             <p:ph type="sldImg" idx="2"/>
@@ -1355,7 +1374,7 @@
             <a:spLocks noGrp="1"/>
           </p:cNvSpPr>
           <p:nvPr>
-            <p:ph type="body" idx="3" sz="quarter"/>
+            <p:ph type="body" sz="quarter" idx="3"/>
           </p:nvPr>
         </p:nvSpPr>
         <p:spPr/>
@@ -1456,7 +1475,7 @@
             <a:spLocks noGrp="1"/>
           </p:cNvSpPr>
           <p:nvPr>
-            <p:ph type="sldNum" idx="5" sz="quarter"/>
+            <p:ph type="sldNum" sz="quarter" idx="5"/>
           </p:nvPr>
         </p:nvSpPr>
         <p:spPr/>
@@ -1470,7 +1489,7 @@
 </file>
 
 <file path=ppt/notesSlides/notesSlide2.xml><?xml version="1.0" encoding="utf-8"?>
-<p:notes xmlns:a="http://schemas.openxmlformats.org/drawingml/2006/main" xmlns:p="http://schemas.openxmlformats.org/presentationml/2006/main" xmlns:r="http://schemas.openxmlformats.org/officeDocument/2006/relationships">
+<p:notes xmlns:a="http://schemas.openxmlformats.org/drawingml/2006/main" xmlns:r="http://schemas.openxmlformats.org/officeDocument/2006/relationships" xmlns:p="http://schemas.openxmlformats.org/presentationml/2006/main">
   <p:cSld>
     <p:spTree>
       <p:nvGrpSpPr>
@@ -1490,7 +1509,7 @@
         <p:nvSpPr>
           <p:cNvPr id="2" name="Slide Image Placeholder 1"/>
           <p:cNvSpPr>
-            <a:spLocks noGrp="1"/>
+            <a:spLocks noGrp="1" noRot="1" noChangeAspect="1"/>
           </p:cNvSpPr>
           <p:nvPr>
             <p:ph type="sldImg" idx="2"/>
@@ -1505,7 +1524,7 @@
             <a:spLocks noGrp="1"/>
           </p:cNvSpPr>
           <p:nvPr>
-            <p:ph type="body" idx="3" sz="quarter"/>
+            <p:ph type="body" sz="quarter" idx="3"/>
           </p:nvPr>
         </p:nvSpPr>
         <p:spPr/>
@@ -1591,7 +1610,7 @@
             <a:spLocks noGrp="1"/>
           </p:cNvSpPr>
           <p:nvPr>
-            <p:ph type="sldNum" idx="5" sz="quarter"/>
+            <p:ph type="sldNum" sz="quarter" idx="5"/>
           </p:nvPr>
         </p:nvSpPr>
         <p:spPr/>
@@ -1605,7 +1624,7 @@
 </file>
 
 <file path=ppt/notesSlides/notesSlide3.xml><?xml version="1.0" encoding="utf-8"?>
-<p:notes xmlns:a="http://schemas.openxmlformats.org/drawingml/2006/main" xmlns:p="http://schemas.openxmlformats.org/presentationml/2006/main" xmlns:r="http://schemas.openxmlformats.org/officeDocument/2006/relationships">
+<p:notes xmlns:a="http://schemas.openxmlformats.org/drawingml/2006/main" xmlns:r="http://schemas.openxmlformats.org/officeDocument/2006/relationships" xmlns:p="http://schemas.openxmlformats.org/presentationml/2006/main">
   <p:cSld>
     <p:spTree>
       <p:nvGrpSpPr>
@@ -1625,7 +1644,7 @@
         <p:nvSpPr>
           <p:cNvPr id="2" name="Slide Image Placeholder 1"/>
           <p:cNvSpPr>
-            <a:spLocks noGrp="1"/>
+            <a:spLocks noGrp="1" noRot="1" noChangeAspect="1"/>
           </p:cNvSpPr>
           <p:nvPr>
             <p:ph type="sldImg" idx="2"/>
@@ -1640,7 +1659,7 @@
             <a:spLocks noGrp="1"/>
           </p:cNvSpPr>
           <p:nvPr>
-            <p:ph type="body" idx="3" sz="quarter"/>
+            <p:ph type="body" sz="quarter" idx="3"/>
           </p:nvPr>
         </p:nvSpPr>
         <p:spPr/>
@@ -1726,7 +1745,7 @@
             <a:spLocks noGrp="1"/>
           </p:cNvSpPr>
           <p:nvPr>
-            <p:ph type="sldNum" idx="5" sz="quarter"/>
+            <p:ph type="sldNum" sz="quarter" idx="5"/>
           </p:nvPr>
         </p:nvSpPr>
         <p:spPr/>
@@ -1740,7 +1759,7 @@
 </file>
 
 <file path=ppt/notesSlides/notesSlide4.xml><?xml version="1.0" encoding="utf-8"?>
-<p:notes xmlns:a="http://schemas.openxmlformats.org/drawingml/2006/main" xmlns:p="http://schemas.openxmlformats.org/presentationml/2006/main" xmlns:r="http://schemas.openxmlformats.org/officeDocument/2006/relationships">
+<p:notes xmlns:a="http://schemas.openxmlformats.org/drawingml/2006/main" xmlns:r="http://schemas.openxmlformats.org/officeDocument/2006/relationships" xmlns:p="http://schemas.openxmlformats.org/presentationml/2006/main">
   <p:cSld>
     <p:spTree>
       <p:nvGrpSpPr>
@@ -1760,7 +1779,7 @@
         <p:nvSpPr>
           <p:cNvPr id="2" name="Slide Image Placeholder 1"/>
           <p:cNvSpPr>
-            <a:spLocks noGrp="1"/>
+            <a:spLocks noGrp="1" noRot="1" noChangeAspect="1"/>
           </p:cNvSpPr>
           <p:nvPr>
             <p:ph type="sldImg" idx="2"/>
@@ -1775,7 +1794,7 @@
             <a:spLocks noGrp="1"/>
           </p:cNvSpPr>
           <p:nvPr>
-            <p:ph type="body" idx="3" sz="quarter"/>
+            <p:ph type="body" sz="quarter" idx="3"/>
           </p:nvPr>
         </p:nvSpPr>
         <p:spPr/>
@@ -1856,7 +1875,7 @@
             <a:spLocks noGrp="1"/>
           </p:cNvSpPr>
           <p:nvPr>
-            <p:ph type="sldNum" idx="5" sz="quarter"/>
+            <p:ph type="sldNum" sz="quarter" idx="5"/>
           </p:nvPr>
         </p:nvSpPr>
         <p:spPr/>
@@ -1870,7 +1889,7 @@
 </file>
 
 <file path=ppt/notesSlides/notesSlide5.xml><?xml version="1.0" encoding="utf-8"?>
-<p:notes xmlns:a="http://schemas.openxmlformats.org/drawingml/2006/main" xmlns:p="http://schemas.openxmlformats.org/presentationml/2006/main" xmlns:r="http://schemas.openxmlformats.org/officeDocument/2006/relationships">
+<p:notes xmlns:a="http://schemas.openxmlformats.org/drawingml/2006/main" xmlns:r="http://schemas.openxmlformats.org/officeDocument/2006/relationships" xmlns:p="http://schemas.openxmlformats.org/presentationml/2006/main">
   <p:cSld>
     <p:spTree>
       <p:nvGrpSpPr>
@@ -1890,7 +1909,7 @@
         <p:nvSpPr>
           <p:cNvPr id="2" name="Slide Image Placeholder 1"/>
           <p:cNvSpPr>
-            <a:spLocks noGrp="1"/>
+            <a:spLocks noGrp="1" noRot="1" noChangeAspect="1"/>
           </p:cNvSpPr>
           <p:nvPr>
             <p:ph type="sldImg" idx="2"/>
@@ -1905,7 +1924,7 @@
             <a:spLocks noGrp="1"/>
           </p:cNvSpPr>
           <p:nvPr>
-            <p:ph type="body" idx="3" sz="quarter"/>
+            <p:ph type="body" sz="quarter" idx="3"/>
           </p:nvPr>
         </p:nvSpPr>
         <p:spPr/>
@@ -1996,7 +2015,7 @@
             <a:spLocks noGrp="1"/>
           </p:cNvSpPr>
           <p:nvPr>
-            <p:ph type="sldNum" idx="5" sz="quarter"/>
+            <p:ph type="sldNum" sz="quarter" idx="5"/>
           </p:nvPr>
         </p:nvSpPr>
         <p:spPr/>
@@ -2010,7 +2029,7 @@
 </file>
 
 <file path=ppt/notesSlides/notesSlide6.xml><?xml version="1.0" encoding="utf-8"?>
-<p:notes xmlns:a="http://schemas.openxmlformats.org/drawingml/2006/main" xmlns:p="http://schemas.openxmlformats.org/presentationml/2006/main" xmlns:r="http://schemas.openxmlformats.org/officeDocument/2006/relationships">
+<p:notes xmlns:a="http://schemas.openxmlformats.org/drawingml/2006/main" xmlns:r="http://schemas.openxmlformats.org/officeDocument/2006/relationships" xmlns:p="http://schemas.openxmlformats.org/presentationml/2006/main">
   <p:cSld>
     <p:spTree>
       <p:nvGrpSpPr>
@@ -2030,7 +2049,7 @@
         <p:nvSpPr>
           <p:cNvPr id="2" name="Slide Image Placeholder 1"/>
           <p:cNvSpPr>
-            <a:spLocks noGrp="1"/>
+            <a:spLocks noGrp="1" noRot="1" noChangeAspect="1"/>
           </p:cNvSpPr>
           <p:nvPr>
             <p:ph type="sldImg" idx="2"/>
@@ -2045,7 +2064,7 @@
             <a:spLocks noGrp="1"/>
           </p:cNvSpPr>
           <p:nvPr>
-            <p:ph type="body" idx="3" sz="quarter"/>
+            <p:ph type="body" sz="quarter" idx="3"/>
           </p:nvPr>
         </p:nvSpPr>
         <p:spPr/>
@@ -2156,7 +2175,7 @@
             <a:spLocks noGrp="1"/>
           </p:cNvSpPr>
           <p:nvPr>
-            <p:ph type="sldNum" idx="5" sz="quarter"/>
+            <p:ph type="sldNum" sz="quarter" idx="5"/>
           </p:nvPr>
         </p:nvSpPr>
         <p:spPr/>
@@ -2170,7 +2189,7 @@
 </file>
 
 <file path=ppt/notesSlides/notesSlide7.xml><?xml version="1.0" encoding="utf-8"?>
-<p:notes xmlns:a="http://schemas.openxmlformats.org/drawingml/2006/main" xmlns:p="http://schemas.openxmlformats.org/presentationml/2006/main" xmlns:r="http://schemas.openxmlformats.org/officeDocument/2006/relationships">
+<p:notes xmlns:a="http://schemas.openxmlformats.org/drawingml/2006/main" xmlns:r="http://schemas.openxmlformats.org/officeDocument/2006/relationships" xmlns:p="http://schemas.openxmlformats.org/presentationml/2006/main">
   <p:cSld>
     <p:spTree>
       <p:nvGrpSpPr>
@@ -2190,7 +2209,7 @@
         <p:nvSpPr>
           <p:cNvPr id="2" name="Slide Image Placeholder 1"/>
           <p:cNvSpPr>
-            <a:spLocks noGrp="1"/>
+            <a:spLocks noGrp="1" noRot="1" noChangeAspect="1"/>
           </p:cNvSpPr>
           <p:nvPr>
             <p:ph type="sldImg" idx="2"/>
@@ -2205,7 +2224,7 @@
             <a:spLocks noGrp="1"/>
           </p:cNvSpPr>
           <p:nvPr>
-            <p:ph type="body" idx="3" sz="quarter"/>
+            <p:ph type="body" sz="quarter" idx="3"/>
           </p:nvPr>
         </p:nvSpPr>
         <p:spPr/>
@@ -2286,7 +2305,7 @@
             <a:spLocks noGrp="1"/>
           </p:cNvSpPr>
           <p:nvPr>
-            <p:ph type="sldNum" idx="5" sz="quarter"/>
+            <p:ph type="sldNum" sz="quarter" idx="5"/>
           </p:nvPr>
         </p:nvSpPr>
         <p:spPr/>
@@ -2300,7 +2319,7 @@
 </file>
 
 <file path=ppt/notesSlides/notesSlide8.xml><?xml version="1.0" encoding="utf-8"?>
-<p:notes xmlns:a="http://schemas.openxmlformats.org/drawingml/2006/main" xmlns:p="http://schemas.openxmlformats.org/presentationml/2006/main" xmlns:r="http://schemas.openxmlformats.org/officeDocument/2006/relationships">
+<p:notes xmlns:a="http://schemas.openxmlformats.org/drawingml/2006/main" xmlns:r="http://schemas.openxmlformats.org/officeDocument/2006/relationships" xmlns:p="http://schemas.openxmlformats.org/presentationml/2006/main">
   <p:cSld>
     <p:spTree>
       <p:nvGrpSpPr>
@@ -2320,7 +2339,7 @@
         <p:nvSpPr>
           <p:cNvPr id="2" name="Slide Image Placeholder 1"/>
           <p:cNvSpPr>
-            <a:spLocks noGrp="1"/>
+            <a:spLocks noGrp="1" noRot="1" noChangeAspect="1"/>
           </p:cNvSpPr>
           <p:nvPr>
             <p:ph type="sldImg" idx="2"/>
@@ -2335,7 +2354,7 @@
             <a:spLocks noGrp="1"/>
           </p:cNvSpPr>
           <p:nvPr>
-            <p:ph type="body" idx="3" sz="quarter"/>
+            <p:ph type="body" sz="quarter" idx="3"/>
           </p:nvPr>
         </p:nvSpPr>
         <p:spPr/>
@@ -2426,7 +2445,7 @@
             <a:spLocks noGrp="1"/>
           </p:cNvSpPr>
           <p:nvPr>
-            <p:ph type="sldNum" idx="5" sz="quarter"/>
+            <p:ph type="sldNum" sz="quarter" idx="5"/>
           </p:nvPr>
         </p:nvSpPr>
         <p:spPr/>
@@ -2440,7 +2459,7 @@
 </file>
 
 <file path=ppt/notesSlides/notesSlide9.xml><?xml version="1.0" encoding="utf-8"?>
-<p:notes xmlns:a="http://schemas.openxmlformats.org/drawingml/2006/main" xmlns:p="http://schemas.openxmlformats.org/presentationml/2006/main" xmlns:r="http://schemas.openxmlformats.org/officeDocument/2006/relationships">
+<p:notes xmlns:a="http://schemas.openxmlformats.org/drawingml/2006/main" xmlns:r="http://schemas.openxmlformats.org/officeDocument/2006/relationships" xmlns:p="http://schemas.openxmlformats.org/presentationml/2006/main">
   <p:cSld>
     <p:spTree>
       <p:nvGrpSpPr>
@@ -2460,7 +2479,7 @@
         <p:nvSpPr>
           <p:cNvPr id="2" name="Slide Image Placeholder 1"/>
           <p:cNvSpPr>
-            <a:spLocks noGrp="1"/>
+            <a:spLocks noGrp="1" noRot="1" noChangeAspect="1"/>
           </p:cNvSpPr>
           <p:nvPr>
             <p:ph type="sldImg" idx="2"/>
@@ -2475,7 +2494,7 @@
             <a:spLocks noGrp="1"/>
           </p:cNvSpPr>
           <p:nvPr>
-            <p:ph type="body" idx="3" sz="quarter"/>
+            <p:ph type="body" sz="quarter" idx="3"/>
           </p:nvPr>
         </p:nvSpPr>
         <p:spPr/>
@@ -2571,7 +2590,7 @@
             <a:spLocks noGrp="1"/>
           </p:cNvSpPr>
           <p:nvPr>
-            <p:ph type="sldNum" idx="5" sz="quarter"/>
+            <p:ph type="sldNum" sz="quarter" idx="5"/>
           </p:nvPr>
         </p:nvSpPr>
         <p:spPr/>
@@ -2622,10 +2641,9 @@
           <a:lstStyle/>
           <a:p>
             <a:r>
-              <a:rPr lang="en-US" smtClean="0"/>
+              <a:rPr lang="en-US"/>
               <a:t>Click to edit Master title style</a:t>
             </a:r>
-            <a:endParaRPr lang="en-US"/>
           </a:p>
         </p:txBody>
       </p:sp>
@@ -2741,10 +2759,9 @@
           </a:lstStyle>
           <a:p>
             <a:r>
-              <a:rPr lang="en-US" smtClean="0"/>
+              <a:rPr lang="en-US"/>
               <a:t>Click to edit Master subtitle style</a:t>
             </a:r>
-            <a:endParaRPr lang="en-US"/>
           </a:p>
         </p:txBody>
       </p:sp>
@@ -2765,7 +2782,7 @@
           <a:p>
             <a:fld id="{5BCAD085-E8A6-8845-BD4E-CB4CCA059FC4}" type="datetimeFigureOut">
               <a:rPr lang="en-US" smtClean="0"/>
-              <a:t>1/27/13</a:t>
+              <a:t>7/22/26</a:t>
             </a:fld>
             <a:endParaRPr lang="en-US"/>
           </a:p>
@@ -2859,10 +2876,9 @@
           <a:lstStyle/>
           <a:p>
             <a:r>
-              <a:rPr lang="en-US" smtClean="0"/>
+              <a:rPr lang="en-US"/>
               <a:t>Click to edit Master title style</a:t>
             </a:r>
-            <a:endParaRPr lang="en-US"/>
           </a:p>
         </p:txBody>
       </p:sp>
@@ -2883,38 +2899,37 @@
           <a:p>
             <a:pPr lvl="0"/>
             <a:r>
-              <a:rPr lang="en-US" smtClean="0"/>
+              <a:rPr lang="en-US"/>
               <a:t>Click to edit Master text styles</a:t>
             </a:r>
           </a:p>
           <a:p>
             <a:pPr lvl="1"/>
             <a:r>
-              <a:rPr lang="en-US" smtClean="0"/>
+              <a:rPr lang="en-US"/>
               <a:t>Second level</a:t>
             </a:r>
           </a:p>
           <a:p>
             <a:pPr lvl="2"/>
             <a:r>
-              <a:rPr lang="en-US" smtClean="0"/>
+              <a:rPr lang="en-US"/>
               <a:t>Third level</a:t>
             </a:r>
           </a:p>
           <a:p>
             <a:pPr lvl="3"/>
             <a:r>
-              <a:rPr lang="en-US" smtClean="0"/>
+              <a:rPr lang="en-US"/>
               <a:t>Fourth level</a:t>
             </a:r>
           </a:p>
           <a:p>
             <a:pPr lvl="4"/>
             <a:r>
-              <a:rPr lang="en-US" smtClean="0"/>
+              <a:rPr lang="en-US"/>
               <a:t>Fifth level</a:t>
             </a:r>
-            <a:endParaRPr lang="en-US"/>
           </a:p>
         </p:txBody>
       </p:sp>
@@ -2935,7 +2950,7 @@
           <a:p>
             <a:fld id="{5BCAD085-E8A6-8845-BD4E-CB4CCA059FC4}" type="datetimeFigureOut">
               <a:rPr lang="en-US" smtClean="0"/>
-              <a:t>1/27/13</a:t>
+              <a:t>7/22/26</a:t>
             </a:fld>
             <a:endParaRPr lang="en-US"/>
           </a:p>
@@ -3034,10 +3049,9 @@
           <a:lstStyle/>
           <a:p>
             <a:r>
-              <a:rPr lang="en-US" smtClean="0"/>
+              <a:rPr lang="en-US"/>
               <a:t>Click to edit Master title style</a:t>
             </a:r>
-            <a:endParaRPr lang="en-US"/>
           </a:p>
         </p:txBody>
       </p:sp>
@@ -3063,38 +3077,37 @@
           <a:p>
             <a:pPr lvl="0"/>
             <a:r>
-              <a:rPr lang="en-US" smtClean="0"/>
+              <a:rPr lang="en-US"/>
               <a:t>Click to edit Master text styles</a:t>
             </a:r>
           </a:p>
           <a:p>
             <a:pPr lvl="1"/>
             <a:r>
-              <a:rPr lang="en-US" smtClean="0"/>
+              <a:rPr lang="en-US"/>
               <a:t>Second level</a:t>
             </a:r>
           </a:p>
           <a:p>
             <a:pPr lvl="2"/>
             <a:r>
-              <a:rPr lang="en-US" smtClean="0"/>
+              <a:rPr lang="en-US"/>
               <a:t>Third level</a:t>
             </a:r>
           </a:p>
           <a:p>
             <a:pPr lvl="3"/>
             <a:r>
-              <a:rPr lang="en-US" smtClean="0"/>
+              <a:rPr lang="en-US"/>
               <a:t>Fourth level</a:t>
             </a:r>
           </a:p>
           <a:p>
             <a:pPr lvl="4"/>
             <a:r>
-              <a:rPr lang="en-US" smtClean="0"/>
+              <a:rPr lang="en-US"/>
               <a:t>Fifth level</a:t>
             </a:r>
-            <a:endParaRPr lang="en-US"/>
           </a:p>
         </p:txBody>
       </p:sp>
@@ -3115,7 +3128,7 @@
           <a:p>
             <a:fld id="{5BCAD085-E8A6-8845-BD4E-CB4CCA059FC4}" type="datetimeFigureOut">
               <a:rPr lang="en-US" smtClean="0"/>
-              <a:t>1/27/13</a:t>
+              <a:t>7/22/26</a:t>
             </a:fld>
             <a:endParaRPr lang="en-US"/>
           </a:p>
@@ -3209,10 +3222,9 @@
           <a:lstStyle/>
           <a:p>
             <a:r>
-              <a:rPr lang="en-US" smtClean="0"/>
+              <a:rPr lang="en-US"/>
               <a:t>Click to edit Master title style</a:t>
             </a:r>
-            <a:endParaRPr lang="en-US"/>
           </a:p>
         </p:txBody>
       </p:sp>
@@ -3233,38 +3245,37 @@
           <a:p>
             <a:pPr lvl="0"/>
             <a:r>
-              <a:rPr lang="en-US" smtClean="0"/>
+              <a:rPr lang="en-US"/>
               <a:t>Click to edit Master text styles</a:t>
             </a:r>
           </a:p>
           <a:p>
             <a:pPr lvl="1"/>
             <a:r>
-              <a:rPr lang="en-US" smtClean="0"/>
+              <a:rPr lang="en-US"/>
               <a:t>Second level</a:t>
             </a:r>
           </a:p>
           <a:p>
             <a:pPr lvl="2"/>
             <a:r>
-              <a:rPr lang="en-US" smtClean="0"/>
+              <a:rPr lang="en-US"/>
               <a:t>Third level</a:t>
             </a:r>
           </a:p>
           <a:p>
             <a:pPr lvl="3"/>
             <a:r>
-              <a:rPr lang="en-US" smtClean="0"/>
+              <a:rPr lang="en-US"/>
               <a:t>Fourth level</a:t>
             </a:r>
           </a:p>
           <a:p>
             <a:pPr lvl="4"/>
             <a:r>
-              <a:rPr lang="en-US" smtClean="0"/>
+              <a:rPr lang="en-US"/>
               <a:t>Fifth level</a:t>
             </a:r>
-            <a:endParaRPr lang="en-US"/>
           </a:p>
         </p:txBody>
       </p:sp>
@@ -3285,7 +3296,7 @@
           <a:p>
             <a:fld id="{5BCAD085-E8A6-8845-BD4E-CB4CCA059FC4}" type="datetimeFigureOut">
               <a:rPr lang="en-US" smtClean="0"/>
-              <a:t>1/27/13</a:t>
+              <a:t>7/22/26</a:t>
             </a:fld>
             <a:endParaRPr lang="en-US"/>
           </a:p>
@@ -3388,10 +3399,9 @@
           </a:lstStyle>
           <a:p>
             <a:r>
-              <a:rPr lang="en-US" smtClean="0"/>
+              <a:rPr lang="en-US"/>
               <a:t>Click to edit Master title style</a:t>
             </a:r>
-            <a:endParaRPr lang="en-US"/>
           </a:p>
         </p:txBody>
       </p:sp>
@@ -3508,7 +3518,7 @@
           <a:p>
             <a:pPr lvl="0"/>
             <a:r>
-              <a:rPr lang="en-US" smtClean="0"/>
+              <a:rPr lang="en-US"/>
               <a:t>Click to edit Master text styles</a:t>
             </a:r>
           </a:p>
@@ -3531,7 +3541,7 @@
           <a:p>
             <a:fld id="{5BCAD085-E8A6-8845-BD4E-CB4CCA059FC4}" type="datetimeFigureOut">
               <a:rPr lang="en-US" smtClean="0"/>
-              <a:t>1/27/13</a:t>
+              <a:t>7/22/26</a:t>
             </a:fld>
             <a:endParaRPr lang="en-US"/>
           </a:p>
@@ -3625,10 +3635,9 @@
           <a:lstStyle/>
           <a:p>
             <a:r>
-              <a:rPr lang="en-US" smtClean="0"/>
+              <a:rPr lang="en-US"/>
               <a:t>Click to edit Master title style</a:t>
             </a:r>
-            <a:endParaRPr lang="en-US"/>
           </a:p>
         </p:txBody>
       </p:sp>
@@ -3682,38 +3691,37 @@
           <a:p>
             <a:pPr lvl="0"/>
             <a:r>
-              <a:rPr lang="en-US" smtClean="0"/>
+              <a:rPr lang="en-US"/>
               <a:t>Click to edit Master text styles</a:t>
             </a:r>
           </a:p>
           <a:p>
             <a:pPr lvl="1"/>
             <a:r>
-              <a:rPr lang="en-US" smtClean="0"/>
+              <a:rPr lang="en-US"/>
               <a:t>Second level</a:t>
             </a:r>
           </a:p>
           <a:p>
             <a:pPr lvl="2"/>
             <a:r>
-              <a:rPr lang="en-US" smtClean="0"/>
+              <a:rPr lang="en-US"/>
               <a:t>Third level</a:t>
             </a:r>
           </a:p>
           <a:p>
             <a:pPr lvl="3"/>
             <a:r>
-              <a:rPr lang="en-US" smtClean="0"/>
+              <a:rPr lang="en-US"/>
               <a:t>Fourth level</a:t>
             </a:r>
           </a:p>
           <a:p>
             <a:pPr lvl="4"/>
             <a:r>
-              <a:rPr lang="en-US" smtClean="0"/>
+              <a:rPr lang="en-US"/>
               <a:t>Fifth level</a:t>
             </a:r>
-            <a:endParaRPr lang="en-US"/>
           </a:p>
         </p:txBody>
       </p:sp>
@@ -3767,38 +3775,37 @@
           <a:p>
             <a:pPr lvl="0"/>
             <a:r>
-              <a:rPr lang="en-US" smtClean="0"/>
+              <a:rPr lang="en-US"/>
               <a:t>Click to edit Master text styles</a:t>
             </a:r>
           </a:p>
           <a:p>
             <a:pPr lvl="1"/>
             <a:r>
-              <a:rPr lang="en-US" smtClean="0"/>
+              <a:rPr lang="en-US"/>
               <a:t>Second level</a:t>
             </a:r>
           </a:p>
           <a:p>
             <a:pPr lvl="2"/>
             <a:r>
-              <a:rPr lang="en-US" smtClean="0"/>
+              <a:rPr lang="en-US"/>
               <a:t>Third level</a:t>
             </a:r>
           </a:p>
           <a:p>
             <a:pPr lvl="3"/>
             <a:r>
-              <a:rPr lang="en-US" smtClean="0"/>
+              <a:rPr lang="en-US"/>
               <a:t>Fourth level</a:t>
             </a:r>
           </a:p>
           <a:p>
             <a:pPr lvl="4"/>
             <a:r>
-              <a:rPr lang="en-US" smtClean="0"/>
+              <a:rPr lang="en-US"/>
               <a:t>Fifth level</a:t>
             </a:r>
-            <a:endParaRPr lang="en-US"/>
           </a:p>
         </p:txBody>
       </p:sp>
@@ -3819,7 +3826,7 @@
           <a:p>
             <a:fld id="{5BCAD085-E8A6-8845-BD4E-CB4CCA059FC4}" type="datetimeFigureOut">
               <a:rPr lang="en-US" smtClean="0"/>
-              <a:t>1/27/13</a:t>
+              <a:t>7/22/26</a:t>
             </a:fld>
             <a:endParaRPr lang="en-US"/>
           </a:p>
@@ -3917,10 +3924,9 @@
           </a:lstStyle>
           <a:p>
             <a:r>
-              <a:rPr lang="en-US" smtClean="0"/>
+              <a:rPr lang="en-US"/>
               <a:t>Click to edit Master title style</a:t>
             </a:r>
-            <a:endParaRPr lang="en-US"/>
           </a:p>
         </p:txBody>
       </p:sp>
@@ -3983,7 +3989,7 @@
           <a:p>
             <a:pPr lvl="0"/>
             <a:r>
-              <a:rPr lang="en-US" smtClean="0"/>
+              <a:rPr lang="en-US"/>
               <a:t>Click to edit Master text styles</a:t>
             </a:r>
           </a:p>
@@ -4039,38 +4045,37 @@
           <a:p>
             <a:pPr lvl="0"/>
             <a:r>
-              <a:rPr lang="en-US" smtClean="0"/>
+              <a:rPr lang="en-US"/>
               <a:t>Click to edit Master text styles</a:t>
             </a:r>
           </a:p>
           <a:p>
             <a:pPr lvl="1"/>
             <a:r>
-              <a:rPr lang="en-US" smtClean="0"/>
+              <a:rPr lang="en-US"/>
               <a:t>Second level</a:t>
             </a:r>
           </a:p>
           <a:p>
             <a:pPr lvl="2"/>
             <a:r>
-              <a:rPr lang="en-US" smtClean="0"/>
+              <a:rPr lang="en-US"/>
               <a:t>Third level</a:t>
             </a:r>
           </a:p>
           <a:p>
             <a:pPr lvl="3"/>
             <a:r>
-              <a:rPr lang="en-US" smtClean="0"/>
+              <a:rPr lang="en-US"/>
               <a:t>Fourth level</a:t>
             </a:r>
           </a:p>
           <a:p>
             <a:pPr lvl="4"/>
             <a:r>
-              <a:rPr lang="en-US" smtClean="0"/>
+              <a:rPr lang="en-US"/>
               <a:t>Fifth level</a:t>
             </a:r>
-            <a:endParaRPr lang="en-US"/>
           </a:p>
         </p:txBody>
       </p:sp>
@@ -4133,7 +4138,7 @@
           <a:p>
             <a:pPr lvl="0"/>
             <a:r>
-              <a:rPr lang="en-US" smtClean="0"/>
+              <a:rPr lang="en-US"/>
               <a:t>Click to edit Master text styles</a:t>
             </a:r>
           </a:p>
@@ -4189,38 +4194,37 @@
           <a:p>
             <a:pPr lvl="0"/>
             <a:r>
-              <a:rPr lang="en-US" smtClean="0"/>
+              <a:rPr lang="en-US"/>
               <a:t>Click to edit Master text styles</a:t>
             </a:r>
           </a:p>
           <a:p>
             <a:pPr lvl="1"/>
             <a:r>
-              <a:rPr lang="en-US" smtClean="0"/>
+              <a:rPr lang="en-US"/>
               <a:t>Second level</a:t>
             </a:r>
           </a:p>
           <a:p>
             <a:pPr lvl="2"/>
             <a:r>
-              <a:rPr lang="en-US" smtClean="0"/>
+              <a:rPr lang="en-US"/>
               <a:t>Third level</a:t>
             </a:r>
           </a:p>
           <a:p>
             <a:pPr lvl="3"/>
             <a:r>
-              <a:rPr lang="en-US" smtClean="0"/>
+              <a:rPr lang="en-US"/>
               <a:t>Fourth level</a:t>
             </a:r>
           </a:p>
           <a:p>
             <a:pPr lvl="4"/>
             <a:r>
-              <a:rPr lang="en-US" smtClean="0"/>
+              <a:rPr lang="en-US"/>
               <a:t>Fifth level</a:t>
             </a:r>
-            <a:endParaRPr lang="en-US"/>
           </a:p>
         </p:txBody>
       </p:sp>
@@ -4241,7 +4245,7 @@
           <a:p>
             <a:fld id="{5BCAD085-E8A6-8845-BD4E-CB4CCA059FC4}" type="datetimeFigureOut">
               <a:rPr lang="en-US" smtClean="0"/>
-              <a:t>1/27/13</a:t>
+              <a:t>7/22/26</a:t>
             </a:fld>
             <a:endParaRPr lang="en-US"/>
           </a:p>
@@ -4335,10 +4339,9 @@
           <a:lstStyle/>
           <a:p>
             <a:r>
-              <a:rPr lang="en-US" smtClean="0"/>
+              <a:rPr lang="en-US"/>
               <a:t>Click to edit Master title style</a:t>
             </a:r>
-            <a:endParaRPr lang="en-US"/>
           </a:p>
         </p:txBody>
       </p:sp>
@@ -4359,7 +4362,7 @@
           <a:p>
             <a:fld id="{5BCAD085-E8A6-8845-BD4E-CB4CCA059FC4}" type="datetimeFigureOut">
               <a:rPr lang="en-US" smtClean="0"/>
-              <a:t>1/27/13</a:t>
+              <a:t>7/22/26</a:t>
             </a:fld>
             <a:endParaRPr lang="en-US"/>
           </a:p>
@@ -4454,7 +4457,7 @@
           <a:p>
             <a:fld id="{5BCAD085-E8A6-8845-BD4E-CB4CCA059FC4}" type="datetimeFigureOut">
               <a:rPr lang="en-US" smtClean="0"/>
-              <a:t>1/27/13</a:t>
+              <a:t>7/22/26</a:t>
             </a:fld>
             <a:endParaRPr lang="en-US"/>
           </a:p>
@@ -4557,10 +4560,9 @@
           </a:lstStyle>
           <a:p>
             <a:r>
-              <a:rPr lang="en-US" smtClean="0"/>
+              <a:rPr lang="en-US"/>
               <a:t>Click to edit Master title style</a:t>
             </a:r>
-            <a:endParaRPr lang="en-US"/>
           </a:p>
         </p:txBody>
       </p:sp>
@@ -4614,38 +4616,37 @@
           <a:p>
             <a:pPr lvl="0"/>
             <a:r>
-              <a:rPr lang="en-US" smtClean="0"/>
+              <a:rPr lang="en-US"/>
               <a:t>Click to edit Master text styles</a:t>
             </a:r>
           </a:p>
           <a:p>
             <a:pPr lvl="1"/>
             <a:r>
-              <a:rPr lang="en-US" smtClean="0"/>
+              <a:rPr lang="en-US"/>
               <a:t>Second level</a:t>
             </a:r>
           </a:p>
           <a:p>
             <a:pPr lvl="2"/>
             <a:r>
-              <a:rPr lang="en-US" smtClean="0"/>
+              <a:rPr lang="en-US"/>
               <a:t>Third level</a:t>
             </a:r>
           </a:p>
           <a:p>
             <a:pPr lvl="3"/>
             <a:r>
-              <a:rPr lang="en-US" smtClean="0"/>
+              <a:rPr lang="en-US"/>
               <a:t>Fourth level</a:t>
             </a:r>
           </a:p>
           <a:p>
             <a:pPr lvl="4"/>
             <a:r>
-              <a:rPr lang="en-US" smtClean="0"/>
+              <a:rPr lang="en-US"/>
               <a:t>Fifth level</a:t>
             </a:r>
-            <a:endParaRPr lang="en-US"/>
           </a:p>
         </p:txBody>
       </p:sp>
@@ -4708,7 +4709,7 @@
           <a:p>
             <a:pPr lvl="0"/>
             <a:r>
-              <a:rPr lang="en-US" smtClean="0"/>
+              <a:rPr lang="en-US"/>
               <a:t>Click to edit Master text styles</a:t>
             </a:r>
           </a:p>
@@ -4731,7 +4732,7 @@
           <a:p>
             <a:fld id="{5BCAD085-E8A6-8845-BD4E-CB4CCA059FC4}" type="datetimeFigureOut">
               <a:rPr lang="en-US" smtClean="0"/>
-              <a:t>1/27/13</a:t>
+              <a:t>7/22/26</a:t>
             </a:fld>
             <a:endParaRPr lang="en-US"/>
           </a:p>
@@ -4834,10 +4835,9 @@
           </a:lstStyle>
           <a:p>
             <a:r>
-              <a:rPr lang="en-US" smtClean="0"/>
+              <a:rPr lang="en-US"/>
               <a:t>Click to edit Master title style</a:t>
             </a:r>
-            <a:endParaRPr lang="en-US"/>
           </a:p>
         </p:txBody>
       </p:sp>
@@ -4961,7 +4961,7 @@
           <a:p>
             <a:pPr lvl="0"/>
             <a:r>
-              <a:rPr lang="en-US" smtClean="0"/>
+              <a:rPr lang="en-US"/>
               <a:t>Click to edit Master text styles</a:t>
             </a:r>
           </a:p>
@@ -4984,7 +4984,7 @@
           <a:p>
             <a:fld id="{5BCAD085-E8A6-8845-BD4E-CB4CCA059FC4}" type="datetimeFigureOut">
               <a:rPr lang="en-US" smtClean="0"/>
-              <a:t>1/27/13</a:t>
+              <a:t>7/22/26</a:t>
             </a:fld>
             <a:endParaRPr lang="en-US"/>
           </a:p>
@@ -5093,10 +5093,9 @@
           <a:lstStyle/>
           <a:p>
             <a:r>
-              <a:rPr lang="en-US" smtClean="0"/>
+              <a:rPr lang="en-US"/>
               <a:t>Click to edit Master title style</a:t>
             </a:r>
-            <a:endParaRPr lang="en-US"/>
           </a:p>
         </p:txBody>
       </p:sp>
@@ -5127,38 +5126,37 @@
           <a:p>
             <a:pPr lvl="0"/>
             <a:r>
-              <a:rPr lang="en-US" smtClean="0"/>
+              <a:rPr lang="en-US"/>
               <a:t>Click to edit Master text styles</a:t>
             </a:r>
           </a:p>
           <a:p>
             <a:pPr lvl="1"/>
             <a:r>
-              <a:rPr lang="en-US" smtClean="0"/>
+              <a:rPr lang="en-US"/>
               <a:t>Second level</a:t>
             </a:r>
           </a:p>
           <a:p>
             <a:pPr lvl="2"/>
             <a:r>
-              <a:rPr lang="en-US" smtClean="0"/>
+              <a:rPr lang="en-US"/>
               <a:t>Third level</a:t>
             </a:r>
           </a:p>
           <a:p>
             <a:pPr lvl="3"/>
             <a:r>
-              <a:rPr lang="en-US" smtClean="0"/>
+              <a:rPr lang="en-US"/>
               <a:t>Fourth level</a:t>
             </a:r>
           </a:p>
           <a:p>
             <a:pPr lvl="4"/>
             <a:r>
-              <a:rPr lang="en-US" smtClean="0"/>
+              <a:rPr lang="en-US"/>
               <a:t>Fifth level</a:t>
             </a:r>
-            <a:endParaRPr lang="en-US"/>
           </a:p>
         </p:txBody>
       </p:sp>
@@ -5197,7 +5195,7 @@
           <a:p>
             <a:fld id="{5BCAD085-E8A6-8845-BD4E-CB4CCA059FC4}" type="datetimeFigureOut">
               <a:rPr lang="en-US" smtClean="0"/>
-              <a:t>1/27/13</a:t>
+              <a:t>7/22/26</a:t>
             </a:fld>
             <a:endParaRPr lang="en-US"/>
           </a:p>
@@ -5556,7 +5554,7 @@
 </file>
 
 <file path=ppt/slides/slide1.xml><?xml version="1.0" encoding="utf-8"?>
-<p:sld xmlns:a="http://schemas.openxmlformats.org/drawingml/2006/main" xmlns:p="http://schemas.openxmlformats.org/presentationml/2006/main" xmlns:r="http://schemas.openxmlformats.org/officeDocument/2006/relationships">
+<p:sld xmlns:a="http://schemas.openxmlformats.org/drawingml/2006/main" xmlns:r="http://schemas.openxmlformats.org/officeDocument/2006/relationships" xmlns:p="http://schemas.openxmlformats.org/presentationml/2006/main">
   <p:cSld>
     <p:bg>
       <p:bgPr>
@@ -5572,7 +5570,14 @@
         <p:cNvGrpSpPr/>
         <p:nvPr/>
       </p:nvGrpSpPr>
-      <p:grpSpPr/>
+      <p:grpSpPr>
+        <a:xfrm>
+          <a:off x="0" y="0"/>
+          <a:ext cx="0" cy="0"/>
+          <a:chOff x="0" y="0"/>
+          <a:chExt cx="0" cy="0"/>
+        </a:xfrm>
+      </p:grpSpPr>
       <p:sp>
         <p:nvSpPr>
           <p:cNvPr id="2" name="Rectangle 1"/>
@@ -5614,6 +5619,7 @@
           <a:lstStyle/>
           <a:p>
             <a:pPr algn="ctr"/>
+            <a:endParaRPr/>
           </a:p>
         </p:txBody>
       </p:sp>
@@ -5634,7 +5640,7 @@
           <a:noFill/>
         </p:spPr>
         <p:txBody>
-          <a:bodyPr wrap="square" anchor="t" lIns="0" rIns="0" tIns="0" bIns="0">
+          <a:bodyPr wrap="square" lIns="0" tIns="0" rIns="0" bIns="0" anchor="t">
             <a:spAutoFit/>
           </a:bodyPr>
           <a:lstStyle/>
@@ -5700,7 +5706,7 @@
           <a:noFill/>
         </p:spPr>
         <p:txBody>
-          <a:bodyPr wrap="square" anchor="t" lIns="0" rIns="0" tIns="0" bIns="0">
+          <a:bodyPr wrap="square" lIns="0" tIns="0" rIns="0" bIns="0" anchor="t">
             <a:spAutoFit/>
           </a:bodyPr>
           <a:lstStyle/>
@@ -5735,7 +5741,7 @@
 </file>
 
 <file path=ppt/slides/slide10.xml><?xml version="1.0" encoding="utf-8"?>
-<p:sld xmlns:a="http://schemas.openxmlformats.org/drawingml/2006/main" xmlns:p="http://schemas.openxmlformats.org/presentationml/2006/main" xmlns:r="http://schemas.openxmlformats.org/officeDocument/2006/relationships">
+<p:sld xmlns:a="http://schemas.openxmlformats.org/drawingml/2006/main" xmlns:r="http://schemas.openxmlformats.org/officeDocument/2006/relationships" xmlns:p="http://schemas.openxmlformats.org/presentationml/2006/main">
   <p:cSld>
     <p:bg>
       <p:bgPr>
@@ -5751,7 +5757,14 @@
         <p:cNvGrpSpPr/>
         <p:nvPr/>
       </p:nvGrpSpPr>
-      <p:grpSpPr/>
+      <p:grpSpPr>
+        <a:xfrm>
+          <a:off x="0" y="0"/>
+          <a:ext cx="0" cy="0"/>
+          <a:chOff x="0" y="0"/>
+          <a:chExt cx="0" cy="0"/>
+        </a:xfrm>
+      </p:grpSpPr>
       <p:sp>
         <p:nvSpPr>
           <p:cNvPr id="2" name="Rectangle 1"/>
@@ -5793,6 +5806,7 @@
           <a:lstStyle/>
           <a:p>
             <a:pPr algn="ctr"/>
+            <a:endParaRPr/>
           </a:p>
         </p:txBody>
       </p:sp>
@@ -5813,7 +5827,7 @@
           <a:noFill/>
         </p:spPr>
         <p:txBody>
-          <a:bodyPr wrap="square" anchor="t" lIns="0" rIns="0" tIns="0" bIns="0">
+          <a:bodyPr wrap="square" lIns="0" tIns="0" rIns="0" bIns="0" anchor="t">
             <a:spAutoFit/>
           </a:bodyPr>
           <a:lstStyle/>
@@ -5847,7 +5861,7 @@
           <a:noFill/>
         </p:spPr>
         <p:txBody>
-          <a:bodyPr wrap="square" anchor="t" lIns="0" rIns="0" tIns="0" bIns="0">
+          <a:bodyPr wrap="square" lIns="0" tIns="0" rIns="0" bIns="0" anchor="t">
             <a:spAutoFit/>
           </a:bodyPr>
           <a:lstStyle/>
@@ -5937,6 +5951,7 @@
           <a:lstStyle/>
           <a:p>
             <a:pPr algn="ctr"/>
+            <a:endParaRPr/>
           </a:p>
         </p:txBody>
       </p:sp>
@@ -5957,7 +5972,7 @@
           <a:noFill/>
         </p:spPr>
         <p:txBody>
-          <a:bodyPr wrap="square" anchor="t" lIns="0" rIns="0" tIns="0" bIns="0">
+          <a:bodyPr wrap="square" lIns="0" tIns="0" rIns="0" bIns="0" anchor="t">
             <a:spAutoFit/>
           </a:bodyPr>
           <a:lstStyle/>
@@ -6000,21 +6015,13 @@
           <a:noFill/>
         </p:spPr>
         <p:txBody>
-          <a:bodyPr wrap="square" anchor="t" lIns="0" rIns="0" tIns="0" bIns="0">
+          <a:bodyPr wrap="square" lIns="0" tIns="0" rIns="0" bIns="0" anchor="t">
             <a:spAutoFit/>
           </a:bodyPr>
           <a:lstStyle/>
           <a:p>
             <a:pPr algn="r"/>
-            <a:r>
-              <a:rPr sz="1100" b="0" i="0">
-                <a:solidFill>
-                  <a:srgbClr val="7A7A7A"/>
-                </a:solidFill>
-                <a:latin typeface="Roboto"/>
-              </a:rPr>
-              <a:t/>
-            </a:r>
+            <a:endParaRPr/>
           </a:p>
         </p:txBody>
       </p:sp>
@@ -6027,7 +6034,7 @@
 </file>
 
 <file path=ppt/slides/slide11.xml><?xml version="1.0" encoding="utf-8"?>
-<p:sld xmlns:a="http://schemas.openxmlformats.org/drawingml/2006/main" xmlns:p="http://schemas.openxmlformats.org/presentationml/2006/main" xmlns:r="http://schemas.openxmlformats.org/officeDocument/2006/relationships">
+<p:sld xmlns:a="http://schemas.openxmlformats.org/drawingml/2006/main" xmlns:r="http://schemas.openxmlformats.org/officeDocument/2006/relationships" xmlns:p="http://schemas.openxmlformats.org/presentationml/2006/main">
   <p:cSld>
     <p:bg>
       <p:bgPr>
@@ -6043,7 +6050,14 @@
         <p:cNvGrpSpPr/>
         <p:nvPr/>
       </p:nvGrpSpPr>
-      <p:grpSpPr/>
+      <p:grpSpPr>
+        <a:xfrm>
+          <a:off x="0" y="0"/>
+          <a:ext cx="0" cy="0"/>
+          <a:chOff x="0" y="0"/>
+          <a:chExt cx="0" cy="0"/>
+        </a:xfrm>
+      </p:grpSpPr>
       <p:sp>
         <p:nvSpPr>
           <p:cNvPr id="2" name="TextBox 1"/>
@@ -6061,7 +6075,7 @@
           <a:noFill/>
         </p:spPr>
         <p:txBody>
-          <a:bodyPr wrap="square" anchor="t" lIns="0" rIns="0" tIns="0" bIns="0">
+          <a:bodyPr wrap="square" lIns="0" tIns="0" rIns="0" bIns="0" anchor="t">
             <a:spAutoFit/>
           </a:bodyPr>
           <a:lstStyle/>
@@ -6119,6 +6133,7 @@
           <a:lstStyle/>
           <a:p>
             <a:pPr algn="ctr"/>
+            <a:endParaRPr/>
           </a:p>
         </p:txBody>
       </p:sp>
@@ -6139,7 +6154,7 @@
           <a:noFill/>
         </p:spPr>
         <p:txBody>
-          <a:bodyPr wrap="square" anchor="ctr" lIns="0" rIns="0" tIns="0" bIns="0">
+          <a:bodyPr wrap="square" lIns="0" tIns="0" rIns="0" bIns="0" anchor="ctr">
             <a:spAutoFit/>
           </a:bodyPr>
           <a:lstStyle/>
@@ -6279,6 +6294,7 @@
           <a:lstStyle/>
           <a:p>
             <a:pPr algn="ctr"/>
+            <a:endParaRPr/>
           </a:p>
         </p:txBody>
       </p:sp>
@@ -6299,7 +6315,7 @@
           <a:noFill/>
         </p:spPr>
         <p:txBody>
-          <a:bodyPr wrap="square" anchor="t" lIns="0" rIns="0" tIns="0" bIns="0">
+          <a:bodyPr wrap="square" lIns="0" tIns="0" rIns="0" bIns="0" anchor="t">
             <a:spAutoFit/>
           </a:bodyPr>
           <a:lstStyle/>
@@ -6342,7 +6358,7 @@
           <a:noFill/>
         </p:spPr>
         <p:txBody>
-          <a:bodyPr wrap="square" anchor="t" lIns="0" rIns="0" tIns="0" bIns="0">
+          <a:bodyPr wrap="square" lIns="0" tIns="0" rIns="0" bIns="0" anchor="t">
             <a:spAutoFit/>
           </a:bodyPr>
           <a:lstStyle/>
@@ -6369,7 +6385,7 @@
 </file>
 
 <file path=ppt/slides/slide12.xml><?xml version="1.0" encoding="utf-8"?>
-<p:sld xmlns:a="http://schemas.openxmlformats.org/drawingml/2006/main" xmlns:p="http://schemas.openxmlformats.org/presentationml/2006/main" xmlns:r="http://schemas.openxmlformats.org/officeDocument/2006/relationships">
+<p:sld xmlns:a="http://schemas.openxmlformats.org/drawingml/2006/main" xmlns:r="http://schemas.openxmlformats.org/officeDocument/2006/relationships" xmlns:p="http://schemas.openxmlformats.org/presentationml/2006/main">
   <p:cSld>
     <p:bg>
       <p:bgPr>
@@ -6385,7 +6401,14 @@
         <p:cNvGrpSpPr/>
         <p:nvPr/>
       </p:nvGrpSpPr>
-      <p:grpSpPr/>
+      <p:grpSpPr>
+        <a:xfrm>
+          <a:off x="0" y="0"/>
+          <a:ext cx="0" cy="0"/>
+          <a:chOff x="0" y="0"/>
+          <a:chExt cx="0" cy="0"/>
+        </a:xfrm>
+      </p:grpSpPr>
       <p:sp>
         <p:nvSpPr>
           <p:cNvPr id="2" name="TextBox 1"/>
@@ -6403,7 +6426,7 @@
           <a:noFill/>
         </p:spPr>
         <p:txBody>
-          <a:bodyPr wrap="square" anchor="t" lIns="0" rIns="0" tIns="0" bIns="0">
+          <a:bodyPr wrap="square" lIns="0" tIns="0" rIns="0" bIns="0" anchor="t">
             <a:spAutoFit/>
           </a:bodyPr>
           <a:lstStyle/>
@@ -6461,6 +6484,7 @@
           <a:lstStyle/>
           <a:p>
             <a:pPr algn="ctr"/>
+            <a:endParaRPr/>
           </a:p>
         </p:txBody>
       </p:sp>
@@ -6481,7 +6505,7 @@
           <a:noFill/>
         </p:spPr>
         <p:txBody>
-          <a:bodyPr wrap="square" anchor="ctr" lIns="0" rIns="0" tIns="0" bIns="0">
+          <a:bodyPr wrap="square" lIns="0" tIns="0" rIns="0" bIns="0" anchor="ctr">
             <a:spAutoFit/>
           </a:bodyPr>
           <a:lstStyle/>
@@ -6652,6 +6676,7 @@
           <a:lstStyle/>
           <a:p>
             <a:pPr algn="ctr"/>
+            <a:endParaRPr/>
           </a:p>
         </p:txBody>
       </p:sp>
@@ -6672,7 +6697,7 @@
           <a:noFill/>
         </p:spPr>
         <p:txBody>
-          <a:bodyPr wrap="square" anchor="t" lIns="0" rIns="0" tIns="0" bIns="0">
+          <a:bodyPr wrap="square" lIns="0" tIns="0" rIns="0" bIns="0" anchor="t">
             <a:spAutoFit/>
           </a:bodyPr>
           <a:lstStyle/>
@@ -6715,7 +6740,7 @@
           <a:noFill/>
         </p:spPr>
         <p:txBody>
-          <a:bodyPr wrap="square" anchor="t" lIns="0" rIns="0" tIns="0" bIns="0">
+          <a:bodyPr wrap="square" lIns="0" tIns="0" rIns="0" bIns="0" anchor="t">
             <a:spAutoFit/>
           </a:bodyPr>
           <a:lstStyle/>
@@ -6742,7 +6767,7 @@
 </file>
 
 <file path=ppt/slides/slide13.xml><?xml version="1.0" encoding="utf-8"?>
-<p:sld xmlns:a="http://schemas.openxmlformats.org/drawingml/2006/main" xmlns:p="http://schemas.openxmlformats.org/presentationml/2006/main" xmlns:r="http://schemas.openxmlformats.org/officeDocument/2006/relationships">
+<p:sld xmlns:a="http://schemas.openxmlformats.org/drawingml/2006/main" xmlns:r="http://schemas.openxmlformats.org/officeDocument/2006/relationships" xmlns:p="http://schemas.openxmlformats.org/presentationml/2006/main">
   <p:cSld>
     <p:bg>
       <p:bgPr>
@@ -6758,7 +6783,14 @@
         <p:cNvGrpSpPr/>
         <p:nvPr/>
       </p:nvGrpSpPr>
-      <p:grpSpPr/>
+      <p:grpSpPr>
+        <a:xfrm>
+          <a:off x="0" y="0"/>
+          <a:ext cx="0" cy="0"/>
+          <a:chOff x="0" y="0"/>
+          <a:chExt cx="0" cy="0"/>
+        </a:xfrm>
+      </p:grpSpPr>
       <p:sp>
         <p:nvSpPr>
           <p:cNvPr id="2" name="TextBox 1"/>
@@ -6776,7 +6808,7 @@
           <a:noFill/>
         </p:spPr>
         <p:txBody>
-          <a:bodyPr wrap="square" anchor="t" lIns="0" rIns="0" tIns="0" bIns="0">
+          <a:bodyPr wrap="square" lIns="0" tIns="0" rIns="0" bIns="0" anchor="t">
             <a:spAutoFit/>
           </a:bodyPr>
           <a:lstStyle/>
@@ -6834,6 +6866,7 @@
           <a:lstStyle/>
           <a:p>
             <a:pPr algn="ctr"/>
+            <a:endParaRPr/>
           </a:p>
         </p:txBody>
       </p:sp>
@@ -6854,7 +6887,7 @@
           <a:noFill/>
         </p:spPr>
         <p:txBody>
-          <a:bodyPr wrap="square" anchor="ctr" lIns="0" rIns="0" tIns="0" bIns="0">
+          <a:bodyPr wrap="square" lIns="0" tIns="0" rIns="0" bIns="0" anchor="ctr">
             <a:spAutoFit/>
           </a:bodyPr>
           <a:lstStyle/>
@@ -7025,6 +7058,7 @@
           <a:lstStyle/>
           <a:p>
             <a:pPr algn="ctr"/>
+            <a:endParaRPr/>
           </a:p>
         </p:txBody>
       </p:sp>
@@ -7045,7 +7079,7 @@
           <a:noFill/>
         </p:spPr>
         <p:txBody>
-          <a:bodyPr wrap="square" anchor="t" lIns="0" rIns="0" tIns="0" bIns="0">
+          <a:bodyPr wrap="square" lIns="0" tIns="0" rIns="0" bIns="0" anchor="t">
             <a:spAutoFit/>
           </a:bodyPr>
           <a:lstStyle/>
@@ -7088,7 +7122,7 @@
           <a:noFill/>
         </p:spPr>
         <p:txBody>
-          <a:bodyPr wrap="square" anchor="t" lIns="0" rIns="0" tIns="0" bIns="0">
+          <a:bodyPr wrap="square" lIns="0" tIns="0" rIns="0" bIns="0" anchor="t">
             <a:spAutoFit/>
           </a:bodyPr>
           <a:lstStyle/>
@@ -7115,7 +7149,7 @@
 </file>
 
 <file path=ppt/slides/slide14.xml><?xml version="1.0" encoding="utf-8"?>
-<p:sld xmlns:a="http://schemas.openxmlformats.org/drawingml/2006/main" xmlns:p="http://schemas.openxmlformats.org/presentationml/2006/main" xmlns:r="http://schemas.openxmlformats.org/officeDocument/2006/relationships">
+<p:sld xmlns:a="http://schemas.openxmlformats.org/drawingml/2006/main" xmlns:r="http://schemas.openxmlformats.org/officeDocument/2006/relationships" xmlns:p="http://schemas.openxmlformats.org/presentationml/2006/main">
   <p:cSld>
     <p:bg>
       <p:bgPr>
@@ -7131,7 +7165,14 @@
         <p:cNvGrpSpPr/>
         <p:nvPr/>
       </p:nvGrpSpPr>
-      <p:grpSpPr/>
+      <p:grpSpPr>
+        <a:xfrm>
+          <a:off x="0" y="0"/>
+          <a:ext cx="0" cy="0"/>
+          <a:chOff x="0" y="0"/>
+          <a:chExt cx="0" cy="0"/>
+        </a:xfrm>
+      </p:grpSpPr>
       <p:sp>
         <p:nvSpPr>
           <p:cNvPr id="2" name="Rectangle 1"/>
@@ -7173,6 +7214,7 @@
           <a:lstStyle/>
           <a:p>
             <a:pPr algn="ctr"/>
+            <a:endParaRPr/>
           </a:p>
         </p:txBody>
       </p:sp>
@@ -7246,7 +7288,7 @@
           <a:noFill/>
         </p:spPr>
         <p:txBody>
-          <a:bodyPr wrap="square" anchor="ctr" lIns="0" rIns="0" tIns="0" bIns="0">
+          <a:bodyPr wrap="square" lIns="0" tIns="0" rIns="0" bIns="0" anchor="ctr">
             <a:spAutoFit/>
           </a:bodyPr>
           <a:lstStyle/>
@@ -7272,7 +7314,7 @@
         <p:spPr>
           <a:xfrm>
             <a:off x="658368" y="1554480"/>
-            <a:ext cx="10881360" cy="4297680"/>
+            <a:ext cx="10881360" cy="2603533"/>
           </a:xfrm>
           <a:prstGeom prst="rect">
             <a:avLst/>
@@ -7280,7 +7322,7 @@
           <a:noFill/>
         </p:spPr>
         <p:txBody>
-          <a:bodyPr wrap="square" anchor="t" lIns="0" rIns="0" tIns="0" bIns="0">
+          <a:bodyPr wrap="square" lIns="0" tIns="0" rIns="0" bIns="0" anchor="t">
             <a:spAutoFit/>
           </a:bodyPr>
           <a:lstStyle/>
@@ -7297,7 +7339,7 @@
               </a:spcAft>
             </a:pPr>
             <a:r>
-              <a:rPr sz="1700" b="1" i="0">
+              <a:rPr sz="2000" b="1" i="0" dirty="0">
                 <a:solidFill>
                   <a:srgbClr val="EDAB0C"/>
                 </a:solidFill>
@@ -7306,7 +7348,7 @@
               <a:t>■  </a:t>
             </a:r>
             <a:r>
-              <a:rPr sz="1700" b="0" i="0">
+              <a:rPr sz="2000" b="0" i="0" dirty="0">
                 <a:solidFill>
                   <a:srgbClr val="2A2929"/>
                 </a:solidFill>
@@ -7328,7 +7370,7 @@
               </a:spcAft>
             </a:pPr>
             <a:r>
-              <a:rPr sz="1700" b="1" i="0">
+              <a:rPr sz="2000" b="1" i="0" dirty="0">
                 <a:solidFill>
                   <a:srgbClr val="EDAB0C"/>
                 </a:solidFill>
@@ -7337,7 +7379,7 @@
               <a:t>■  </a:t>
             </a:r>
             <a:r>
-              <a:rPr sz="1700" b="0" i="0">
+              <a:rPr sz="2000" b="0" i="0" dirty="0">
                 <a:solidFill>
                   <a:srgbClr val="2A2929"/>
                 </a:solidFill>
@@ -7359,7 +7401,7 @@
               </a:spcAft>
             </a:pPr>
             <a:r>
-              <a:rPr sz="1400" b="0" i="0">
+              <a:rPr b="0" i="0" dirty="0">
                 <a:solidFill>
                   <a:srgbClr val="7A7A7A"/>
                 </a:solidFill>
@@ -7368,7 +7410,7 @@
               <a:t>–  </a:t>
             </a:r>
             <a:r>
-              <a:rPr sz="1400" b="0" i="0">
+              <a:rPr b="0" i="0" dirty="0">
                 <a:solidFill>
                   <a:srgbClr val="2A2929"/>
                 </a:solidFill>
@@ -7390,7 +7432,7 @@
               </a:spcAft>
             </a:pPr>
             <a:r>
-              <a:rPr sz="1400" b="0" i="0">
+              <a:rPr b="0" i="0" dirty="0">
                 <a:solidFill>
                   <a:srgbClr val="7A7A7A"/>
                 </a:solidFill>
@@ -7399,7 +7441,7 @@
               <a:t>–  </a:t>
             </a:r>
             <a:r>
-              <a:rPr sz="1400" b="0" i="0">
+              <a:rPr b="0" i="0" dirty="0">
                 <a:solidFill>
                   <a:srgbClr val="2A2929"/>
                 </a:solidFill>
@@ -7421,7 +7463,7 @@
               </a:spcAft>
             </a:pPr>
             <a:r>
-              <a:rPr sz="1400" b="0" i="0">
+              <a:rPr b="0" i="0" dirty="0">
                 <a:solidFill>
                   <a:srgbClr val="7A7A7A"/>
                 </a:solidFill>
@@ -7430,7 +7472,7 @@
               <a:t>–  </a:t>
             </a:r>
             <a:r>
-              <a:rPr sz="1400" b="0" i="0">
+              <a:rPr b="0" i="0" dirty="0">
                 <a:solidFill>
                   <a:srgbClr val="2A2929"/>
                 </a:solidFill>
@@ -7452,7 +7494,7 @@
               </a:spcAft>
             </a:pPr>
             <a:r>
-              <a:rPr sz="1700" b="1" i="0">
+              <a:rPr sz="2000" b="1" i="0" dirty="0">
                 <a:solidFill>
                   <a:srgbClr val="EDAB0C"/>
                 </a:solidFill>
@@ -7461,7 +7503,7 @@
               <a:t>■  </a:t>
             </a:r>
             <a:r>
-              <a:rPr sz="1700" b="0" i="0">
+              <a:rPr sz="2000" b="0" i="0" dirty="0">
                 <a:solidFill>
                   <a:srgbClr val="2A2929"/>
                 </a:solidFill>
@@ -7515,6 +7557,7 @@
           <a:lstStyle/>
           <a:p>
             <a:pPr algn="ctr"/>
+            <a:endParaRPr/>
           </a:p>
         </p:txBody>
       </p:sp>
@@ -7535,7 +7578,7 @@
           <a:noFill/>
         </p:spPr>
         <p:txBody>
-          <a:bodyPr wrap="square" anchor="ctr" lIns="0" rIns="0" tIns="0" bIns="0">
+          <a:bodyPr wrap="square" lIns="0" tIns="0" rIns="0" bIns="0" anchor="ctr">
             <a:spAutoFit/>
           </a:bodyPr>
           <a:lstStyle/>
@@ -7593,6 +7636,7 @@
           <a:lstStyle/>
           <a:p>
             <a:pPr algn="ctr"/>
+            <a:endParaRPr/>
           </a:p>
         </p:txBody>
       </p:sp>
@@ -7613,7 +7657,7 @@
           <a:noFill/>
         </p:spPr>
         <p:txBody>
-          <a:bodyPr wrap="square" anchor="t" lIns="0" rIns="0" tIns="0" bIns="0">
+          <a:bodyPr wrap="square" lIns="0" tIns="0" rIns="0" bIns="0" anchor="t">
             <a:spAutoFit/>
           </a:bodyPr>
           <a:lstStyle/>
@@ -7656,7 +7700,7 @@
           <a:noFill/>
         </p:spPr>
         <p:txBody>
-          <a:bodyPr wrap="square" anchor="t" lIns="0" rIns="0" tIns="0" bIns="0">
+          <a:bodyPr wrap="square" lIns="0" tIns="0" rIns="0" bIns="0" anchor="t">
             <a:spAutoFit/>
           </a:bodyPr>
           <a:lstStyle/>
@@ -7683,7 +7727,7 @@
 </file>
 
 <file path=ppt/slides/slide15.xml><?xml version="1.0" encoding="utf-8"?>
-<p:sld xmlns:a="http://schemas.openxmlformats.org/drawingml/2006/main" xmlns:p="http://schemas.openxmlformats.org/presentationml/2006/main" xmlns:r="http://schemas.openxmlformats.org/officeDocument/2006/relationships">
+<p:sld xmlns:a="http://schemas.openxmlformats.org/drawingml/2006/main" xmlns:r="http://schemas.openxmlformats.org/officeDocument/2006/relationships" xmlns:p="http://schemas.openxmlformats.org/presentationml/2006/main">
   <p:cSld>
     <p:bg>
       <p:bgPr>
@@ -7699,7 +7743,14 @@
         <p:cNvGrpSpPr/>
         <p:nvPr/>
       </p:nvGrpSpPr>
-      <p:grpSpPr/>
+      <p:grpSpPr>
+        <a:xfrm>
+          <a:off x="0" y="0"/>
+          <a:ext cx="0" cy="0"/>
+          <a:chOff x="0" y="0"/>
+          <a:chExt cx="0" cy="0"/>
+        </a:xfrm>
+      </p:grpSpPr>
       <p:sp>
         <p:nvSpPr>
           <p:cNvPr id="2" name="TextBox 1"/>
@@ -7717,7 +7768,7 @@
           <a:noFill/>
         </p:spPr>
         <p:txBody>
-          <a:bodyPr wrap="square" anchor="t" lIns="0" rIns="0" tIns="0" bIns="0">
+          <a:bodyPr wrap="square" lIns="0" tIns="0" rIns="0" bIns="0" anchor="t">
             <a:spAutoFit/>
           </a:bodyPr>
           <a:lstStyle/>
@@ -7791,6 +7842,7 @@
           <a:lstStyle/>
           <a:p>
             <a:pPr algn="ctr"/>
+            <a:endParaRPr/>
           </a:p>
         </p:txBody>
       </p:sp>
@@ -7837,6 +7889,7 @@
           <a:lstStyle/>
           <a:p>
             <a:pPr algn="ctr"/>
+            <a:endParaRPr/>
           </a:p>
         </p:txBody>
       </p:sp>
@@ -7881,6 +7934,7 @@
           <a:lstStyle/>
           <a:p>
             <a:pPr algn="ctr"/>
+            <a:endParaRPr/>
           </a:p>
         </p:txBody>
       </p:sp>
@@ -7901,7 +7955,7 @@
           <a:noFill/>
         </p:spPr>
         <p:txBody>
-          <a:bodyPr wrap="square" anchor="ctr" lIns="0" rIns="0" tIns="0" bIns="0">
+          <a:bodyPr wrap="square" lIns="0" tIns="0" rIns="0" bIns="0" anchor="ctr">
             <a:spAutoFit/>
           </a:bodyPr>
           <a:lstStyle/>
@@ -7966,6 +8020,7 @@
           <a:lstStyle/>
           <a:p>
             <a:pPr algn="ctr"/>
+            <a:endParaRPr/>
           </a:p>
         </p:txBody>
       </p:sp>
@@ -8010,6 +8065,7 @@
           <a:lstStyle/>
           <a:p>
             <a:pPr algn="ctr"/>
+            <a:endParaRPr/>
           </a:p>
         </p:txBody>
       </p:sp>
@@ -8030,7 +8086,7 @@
           <a:noFill/>
         </p:spPr>
         <p:txBody>
-          <a:bodyPr wrap="square" anchor="ctr" lIns="0" rIns="0" tIns="0" bIns="0">
+          <a:bodyPr wrap="square" lIns="0" tIns="0" rIns="0" bIns="0" anchor="ctr">
             <a:spAutoFit/>
           </a:bodyPr>
           <a:lstStyle/>
@@ -8095,6 +8151,7 @@
           <a:lstStyle/>
           <a:p>
             <a:pPr algn="ctr"/>
+            <a:endParaRPr/>
           </a:p>
         </p:txBody>
       </p:sp>
@@ -8139,6 +8196,7 @@
           <a:lstStyle/>
           <a:p>
             <a:pPr algn="ctr"/>
+            <a:endParaRPr/>
           </a:p>
         </p:txBody>
       </p:sp>
@@ -8159,7 +8217,7 @@
           <a:noFill/>
         </p:spPr>
         <p:txBody>
-          <a:bodyPr wrap="square" anchor="ctr" lIns="0" rIns="0" tIns="0" bIns="0">
+          <a:bodyPr wrap="square" lIns="0" tIns="0" rIns="0" bIns="0" anchor="ctr">
             <a:spAutoFit/>
           </a:bodyPr>
           <a:lstStyle/>
@@ -8222,6 +8280,7 @@
           <a:lstStyle/>
           <a:p>
             <a:pPr algn="ctr"/>
+            <a:endParaRPr/>
           </a:p>
         </p:txBody>
       </p:sp>
@@ -8242,7 +8301,7 @@
           <a:noFill/>
         </p:spPr>
         <p:txBody>
-          <a:bodyPr wrap="square" anchor="t" lIns="0" rIns="0" tIns="0" bIns="0">
+          <a:bodyPr wrap="square" lIns="0" tIns="0" rIns="0" bIns="0" anchor="t">
             <a:spAutoFit/>
           </a:bodyPr>
           <a:lstStyle/>
@@ -8285,7 +8344,7 @@
           <a:noFill/>
         </p:spPr>
         <p:txBody>
-          <a:bodyPr wrap="square" anchor="t" lIns="0" rIns="0" tIns="0" bIns="0">
+          <a:bodyPr wrap="square" lIns="0" tIns="0" rIns="0" bIns="0" anchor="t">
             <a:spAutoFit/>
           </a:bodyPr>
           <a:lstStyle/>
@@ -8312,7 +8371,7 @@
 </file>
 
 <file path=ppt/slides/slide16.xml><?xml version="1.0" encoding="utf-8"?>
-<p:sld xmlns:a="http://schemas.openxmlformats.org/drawingml/2006/main" xmlns:p="http://schemas.openxmlformats.org/presentationml/2006/main" xmlns:r="http://schemas.openxmlformats.org/officeDocument/2006/relationships">
+<p:sld xmlns:a="http://schemas.openxmlformats.org/drawingml/2006/main" xmlns:r="http://schemas.openxmlformats.org/officeDocument/2006/relationships" xmlns:p="http://schemas.openxmlformats.org/presentationml/2006/main">
   <p:cSld>
     <p:bg>
       <p:bgPr>
@@ -8328,7 +8387,14 @@
         <p:cNvGrpSpPr/>
         <p:nvPr/>
       </p:nvGrpSpPr>
-      <p:grpSpPr/>
+      <p:grpSpPr>
+        <a:xfrm>
+          <a:off x="0" y="0"/>
+          <a:ext cx="0" cy="0"/>
+          <a:chOff x="0" y="0"/>
+          <a:chExt cx="0" cy="0"/>
+        </a:xfrm>
+      </p:grpSpPr>
       <p:sp>
         <p:nvSpPr>
           <p:cNvPr id="2" name="Rectangle 1"/>
@@ -8370,6 +8436,7 @@
           <a:lstStyle/>
           <a:p>
             <a:pPr algn="ctr"/>
+            <a:endParaRPr/>
           </a:p>
         </p:txBody>
       </p:sp>
@@ -8390,7 +8457,7 @@
           <a:noFill/>
         </p:spPr>
         <p:txBody>
-          <a:bodyPr wrap="square" anchor="t" lIns="0" rIns="0" tIns="0" bIns="0">
+          <a:bodyPr wrap="square" lIns="0" tIns="0" rIns="0" bIns="0" anchor="t">
             <a:spAutoFit/>
           </a:bodyPr>
           <a:lstStyle/>
@@ -8424,7 +8491,7 @@
           <a:noFill/>
         </p:spPr>
         <p:txBody>
-          <a:bodyPr wrap="square" anchor="t" lIns="0" rIns="0" tIns="0" bIns="0">
+          <a:bodyPr wrap="square" lIns="0" tIns="0" rIns="0" bIns="0" anchor="t">
             <a:spAutoFit/>
           </a:bodyPr>
           <a:lstStyle/>
@@ -8514,6 +8581,7 @@
           <a:lstStyle/>
           <a:p>
             <a:pPr algn="ctr"/>
+            <a:endParaRPr/>
           </a:p>
         </p:txBody>
       </p:sp>
@@ -8534,7 +8602,7 @@
           <a:noFill/>
         </p:spPr>
         <p:txBody>
-          <a:bodyPr wrap="square" anchor="t" lIns="0" rIns="0" tIns="0" bIns="0">
+          <a:bodyPr wrap="square" lIns="0" tIns="0" rIns="0" bIns="0" anchor="t">
             <a:spAutoFit/>
           </a:bodyPr>
           <a:lstStyle/>
@@ -8577,21 +8645,13 @@
           <a:noFill/>
         </p:spPr>
         <p:txBody>
-          <a:bodyPr wrap="square" anchor="t" lIns="0" rIns="0" tIns="0" bIns="0">
+          <a:bodyPr wrap="square" lIns="0" tIns="0" rIns="0" bIns="0" anchor="t">
             <a:spAutoFit/>
           </a:bodyPr>
           <a:lstStyle/>
           <a:p>
             <a:pPr algn="r"/>
-            <a:r>
-              <a:rPr sz="1100" b="0" i="0">
-                <a:solidFill>
-                  <a:srgbClr val="7A7A7A"/>
-                </a:solidFill>
-                <a:latin typeface="Roboto"/>
-              </a:rPr>
-              <a:t/>
-            </a:r>
+            <a:endParaRPr/>
           </a:p>
         </p:txBody>
       </p:sp>
@@ -8604,7 +8664,7 @@
 </file>
 
 <file path=ppt/slides/slide17.xml><?xml version="1.0" encoding="utf-8"?>
-<p:sld xmlns:a="http://schemas.openxmlformats.org/drawingml/2006/main" xmlns:p="http://schemas.openxmlformats.org/presentationml/2006/main" xmlns:r="http://schemas.openxmlformats.org/officeDocument/2006/relationships">
+<p:sld xmlns:a="http://schemas.openxmlformats.org/drawingml/2006/main" xmlns:r="http://schemas.openxmlformats.org/officeDocument/2006/relationships" xmlns:p="http://schemas.openxmlformats.org/presentationml/2006/main">
   <p:cSld>
     <p:bg>
       <p:bgPr>
@@ -8620,7 +8680,14 @@
         <p:cNvGrpSpPr/>
         <p:nvPr/>
       </p:nvGrpSpPr>
-      <p:grpSpPr/>
+      <p:grpSpPr>
+        <a:xfrm>
+          <a:off x="0" y="0"/>
+          <a:ext cx="0" cy="0"/>
+          <a:chOff x="0" y="0"/>
+          <a:chExt cx="0" cy="0"/>
+        </a:xfrm>
+      </p:grpSpPr>
       <p:sp>
         <p:nvSpPr>
           <p:cNvPr id="2" name="TextBox 1"/>
@@ -8638,7 +8705,7 @@
           <a:noFill/>
         </p:spPr>
         <p:txBody>
-          <a:bodyPr wrap="square" anchor="t" lIns="0" rIns="0" tIns="0" bIns="0">
+          <a:bodyPr wrap="square" lIns="0" tIns="0" rIns="0" bIns="0" anchor="t">
             <a:spAutoFit/>
           </a:bodyPr>
           <a:lstStyle/>
@@ -8696,6 +8763,7 @@
           <a:lstStyle/>
           <a:p>
             <a:pPr algn="ctr"/>
+            <a:endParaRPr/>
           </a:p>
         </p:txBody>
       </p:sp>
@@ -8716,7 +8784,7 @@
           <a:noFill/>
         </p:spPr>
         <p:txBody>
-          <a:bodyPr wrap="square" anchor="ctr" lIns="0" rIns="0" tIns="0" bIns="0">
+          <a:bodyPr wrap="square" lIns="0" tIns="0" rIns="0" bIns="0" anchor="ctr">
             <a:spAutoFit/>
           </a:bodyPr>
           <a:lstStyle/>
@@ -8825,6 +8893,7 @@
           <a:lstStyle/>
           <a:p>
             <a:pPr algn="ctr"/>
+            <a:endParaRPr/>
           </a:p>
         </p:txBody>
       </p:sp>
@@ -8845,7 +8914,7 @@
           <a:noFill/>
         </p:spPr>
         <p:txBody>
-          <a:bodyPr wrap="square" anchor="t" lIns="0" rIns="0" tIns="0" bIns="0">
+          <a:bodyPr wrap="square" lIns="0" tIns="0" rIns="0" bIns="0" anchor="t">
             <a:spAutoFit/>
           </a:bodyPr>
           <a:lstStyle/>
@@ -8888,7 +8957,7 @@
           <a:noFill/>
         </p:spPr>
         <p:txBody>
-          <a:bodyPr wrap="square" anchor="t" lIns="0" rIns="0" tIns="0" bIns="0">
+          <a:bodyPr wrap="square" lIns="0" tIns="0" rIns="0" bIns="0" anchor="t">
             <a:spAutoFit/>
           </a:bodyPr>
           <a:lstStyle/>
@@ -8915,7 +8984,7 @@
 </file>
 
 <file path=ppt/slides/slide18.xml><?xml version="1.0" encoding="utf-8"?>
-<p:sld xmlns:a="http://schemas.openxmlformats.org/drawingml/2006/main" xmlns:p="http://schemas.openxmlformats.org/presentationml/2006/main" xmlns:r="http://schemas.openxmlformats.org/officeDocument/2006/relationships">
+<p:sld xmlns:a="http://schemas.openxmlformats.org/drawingml/2006/main" xmlns:r="http://schemas.openxmlformats.org/officeDocument/2006/relationships" xmlns:p="http://schemas.openxmlformats.org/presentationml/2006/main">
   <p:cSld>
     <p:bg>
       <p:bgPr>
@@ -8931,7 +9000,14 @@
         <p:cNvGrpSpPr/>
         <p:nvPr/>
       </p:nvGrpSpPr>
-      <p:grpSpPr/>
+      <p:grpSpPr>
+        <a:xfrm>
+          <a:off x="0" y="0"/>
+          <a:ext cx="0" cy="0"/>
+          <a:chOff x="0" y="0"/>
+          <a:chExt cx="0" cy="0"/>
+        </a:xfrm>
+      </p:grpSpPr>
       <p:sp>
         <p:nvSpPr>
           <p:cNvPr id="2" name="TextBox 1"/>
@@ -8949,7 +9025,7 @@
           <a:noFill/>
         </p:spPr>
         <p:txBody>
-          <a:bodyPr wrap="square" anchor="t" lIns="0" rIns="0" tIns="0" bIns="0">
+          <a:bodyPr wrap="square" lIns="0" tIns="0" rIns="0" bIns="0" anchor="t">
             <a:spAutoFit/>
           </a:bodyPr>
           <a:lstStyle/>
@@ -9007,6 +9083,7 @@
           <a:lstStyle/>
           <a:p>
             <a:pPr algn="ctr"/>
+            <a:endParaRPr/>
           </a:p>
         </p:txBody>
       </p:sp>
@@ -9027,7 +9104,7 @@
           <a:noFill/>
         </p:spPr>
         <p:txBody>
-          <a:bodyPr wrap="square" anchor="ctr" lIns="0" rIns="0" tIns="0" bIns="0">
+          <a:bodyPr wrap="square" lIns="0" tIns="0" rIns="0" bIns="0" anchor="ctr">
             <a:spAutoFit/>
           </a:bodyPr>
           <a:lstStyle/>
@@ -9198,6 +9275,7 @@
           <a:lstStyle/>
           <a:p>
             <a:pPr algn="ctr"/>
+            <a:endParaRPr/>
           </a:p>
         </p:txBody>
       </p:sp>
@@ -9218,7 +9296,7 @@
           <a:noFill/>
         </p:spPr>
         <p:txBody>
-          <a:bodyPr wrap="square" anchor="t" lIns="0" rIns="0" tIns="0" bIns="0">
+          <a:bodyPr wrap="square" lIns="0" tIns="0" rIns="0" bIns="0" anchor="t">
             <a:spAutoFit/>
           </a:bodyPr>
           <a:lstStyle/>
@@ -9261,7 +9339,7 @@
           <a:noFill/>
         </p:spPr>
         <p:txBody>
-          <a:bodyPr wrap="square" anchor="t" lIns="0" rIns="0" tIns="0" bIns="0">
+          <a:bodyPr wrap="square" lIns="0" tIns="0" rIns="0" bIns="0" anchor="t">
             <a:spAutoFit/>
           </a:bodyPr>
           <a:lstStyle/>
@@ -9288,7 +9366,7 @@
 </file>
 
 <file path=ppt/slides/slide19.xml><?xml version="1.0" encoding="utf-8"?>
-<p:sld xmlns:a="http://schemas.openxmlformats.org/drawingml/2006/main" xmlns:p="http://schemas.openxmlformats.org/presentationml/2006/main" xmlns:r="http://schemas.openxmlformats.org/officeDocument/2006/relationships">
+<p:sld xmlns:a="http://schemas.openxmlformats.org/drawingml/2006/main" xmlns:r="http://schemas.openxmlformats.org/officeDocument/2006/relationships" xmlns:p="http://schemas.openxmlformats.org/presentationml/2006/main">
   <p:cSld>
     <p:bg>
       <p:bgPr>
@@ -9304,7 +9382,14 @@
         <p:cNvGrpSpPr/>
         <p:nvPr/>
       </p:nvGrpSpPr>
-      <p:grpSpPr/>
+      <p:grpSpPr>
+        <a:xfrm>
+          <a:off x="0" y="0"/>
+          <a:ext cx="0" cy="0"/>
+          <a:chOff x="0" y="0"/>
+          <a:chExt cx="0" cy="0"/>
+        </a:xfrm>
+      </p:grpSpPr>
       <p:sp>
         <p:nvSpPr>
           <p:cNvPr id="2" name="TextBox 1"/>
@@ -9322,7 +9407,7 @@
           <a:noFill/>
         </p:spPr>
         <p:txBody>
-          <a:bodyPr wrap="square" anchor="t" lIns="0" rIns="0" tIns="0" bIns="0">
+          <a:bodyPr wrap="square" lIns="0" tIns="0" rIns="0" bIns="0" anchor="t">
             <a:spAutoFit/>
           </a:bodyPr>
           <a:lstStyle/>
@@ -9396,6 +9481,7 @@
           <a:lstStyle/>
           <a:p>
             <a:pPr algn="ctr"/>
+            <a:endParaRPr/>
           </a:p>
         </p:txBody>
       </p:sp>
@@ -9416,7 +9502,7 @@
           <a:noFill/>
         </p:spPr>
         <p:txBody>
-          <a:bodyPr wrap="square" anchor="ctr" lIns="0" rIns="0" tIns="0" bIns="0">
+          <a:bodyPr wrap="square" lIns="0" tIns="0" rIns="0" bIns="0" anchor="ctr">
             <a:spAutoFit/>
           </a:bodyPr>
           <a:lstStyle/>
@@ -9649,6 +9735,7 @@
           <a:lstStyle/>
           <a:p>
             <a:pPr algn="ctr"/>
+            <a:endParaRPr/>
           </a:p>
         </p:txBody>
       </p:sp>
@@ -9669,7 +9756,7 @@
           <a:noFill/>
         </p:spPr>
         <p:txBody>
-          <a:bodyPr wrap="square" anchor="t" lIns="0" rIns="0" tIns="0" bIns="0">
+          <a:bodyPr wrap="square" lIns="0" tIns="0" rIns="0" bIns="0" anchor="t">
             <a:spAutoFit/>
           </a:bodyPr>
           <a:lstStyle/>
@@ -9712,7 +9799,7 @@
           <a:noFill/>
         </p:spPr>
         <p:txBody>
-          <a:bodyPr wrap="square" anchor="t" lIns="0" rIns="0" tIns="0" bIns="0">
+          <a:bodyPr wrap="square" lIns="0" tIns="0" rIns="0" bIns="0" anchor="t">
             <a:spAutoFit/>
           </a:bodyPr>
           <a:lstStyle/>
@@ -9739,7 +9826,7 @@
 </file>
 
 <file path=ppt/slides/slide2.xml><?xml version="1.0" encoding="utf-8"?>
-<p:sld xmlns:a="http://schemas.openxmlformats.org/drawingml/2006/main" xmlns:p="http://schemas.openxmlformats.org/presentationml/2006/main" xmlns:r="http://schemas.openxmlformats.org/officeDocument/2006/relationships">
+<p:sld xmlns:a="http://schemas.openxmlformats.org/drawingml/2006/main" xmlns:r="http://schemas.openxmlformats.org/officeDocument/2006/relationships" xmlns:p="http://schemas.openxmlformats.org/presentationml/2006/main">
   <p:cSld>
     <p:bg>
       <p:bgPr>
@@ -9755,7 +9842,14 @@
         <p:cNvGrpSpPr/>
         <p:nvPr/>
       </p:nvGrpSpPr>
-      <p:grpSpPr/>
+      <p:grpSpPr>
+        <a:xfrm>
+          <a:off x="0" y="0"/>
+          <a:ext cx="0" cy="0"/>
+          <a:chOff x="0" y="0"/>
+          <a:chExt cx="0" cy="0"/>
+        </a:xfrm>
+      </p:grpSpPr>
       <p:sp>
         <p:nvSpPr>
           <p:cNvPr id="2" name="TextBox 1"/>
@@ -9773,7 +9867,7 @@
           <a:noFill/>
         </p:spPr>
         <p:txBody>
-          <a:bodyPr wrap="square" anchor="t" lIns="0" rIns="0" tIns="0" bIns="0">
+          <a:bodyPr wrap="square" lIns="0" tIns="0" rIns="0" bIns="0" anchor="t">
             <a:spAutoFit/>
           </a:bodyPr>
           <a:lstStyle/>
@@ -9847,6 +9941,7 @@
           <a:lstStyle/>
           <a:p>
             <a:pPr algn="ctr"/>
+            <a:endParaRPr/>
           </a:p>
         </p:txBody>
       </p:sp>
@@ -9867,7 +9962,7 @@
           <a:noFill/>
         </p:spPr>
         <p:txBody>
-          <a:bodyPr wrap="square" anchor="ctr" lIns="0" rIns="0" tIns="0" bIns="0">
+          <a:bodyPr wrap="square" lIns="0" tIns="0" rIns="0" bIns="0" anchor="ctr">
             <a:spAutoFit/>
           </a:bodyPr>
           <a:lstStyle/>
@@ -10007,6 +10102,7 @@
           <a:lstStyle/>
           <a:p>
             <a:pPr algn="ctr"/>
+            <a:endParaRPr/>
           </a:p>
         </p:txBody>
       </p:sp>
@@ -10027,7 +10123,7 @@
           <a:noFill/>
         </p:spPr>
         <p:txBody>
-          <a:bodyPr wrap="square" anchor="t" lIns="0" rIns="0" tIns="0" bIns="0">
+          <a:bodyPr wrap="square" lIns="0" tIns="0" rIns="0" bIns="0" anchor="t">
             <a:spAutoFit/>
           </a:bodyPr>
           <a:lstStyle/>
@@ -10070,7 +10166,7 @@
           <a:noFill/>
         </p:spPr>
         <p:txBody>
-          <a:bodyPr wrap="square" anchor="t" lIns="0" rIns="0" tIns="0" bIns="0">
+          <a:bodyPr wrap="square" lIns="0" tIns="0" rIns="0" bIns="0" anchor="t">
             <a:spAutoFit/>
           </a:bodyPr>
           <a:lstStyle/>
@@ -10097,7 +10193,7 @@
 </file>
 
 <file path=ppt/slides/slide20.xml><?xml version="1.0" encoding="utf-8"?>
-<p:sld xmlns:a="http://schemas.openxmlformats.org/drawingml/2006/main" xmlns:p="http://schemas.openxmlformats.org/presentationml/2006/main" xmlns:r="http://schemas.openxmlformats.org/officeDocument/2006/relationships">
+<p:sld xmlns:a="http://schemas.openxmlformats.org/drawingml/2006/main" xmlns:r="http://schemas.openxmlformats.org/officeDocument/2006/relationships" xmlns:p="http://schemas.openxmlformats.org/presentationml/2006/main">
   <p:cSld>
     <p:bg>
       <p:bgPr>
@@ -10113,7 +10209,14 @@
         <p:cNvGrpSpPr/>
         <p:nvPr/>
       </p:nvGrpSpPr>
-      <p:grpSpPr/>
+      <p:grpSpPr>
+        <a:xfrm>
+          <a:off x="0" y="0"/>
+          <a:ext cx="0" cy="0"/>
+          <a:chOff x="0" y="0"/>
+          <a:chExt cx="0" cy="0"/>
+        </a:xfrm>
+      </p:grpSpPr>
       <p:sp>
         <p:nvSpPr>
           <p:cNvPr id="2" name="TextBox 1"/>
@@ -10131,7 +10234,7 @@
           <a:noFill/>
         </p:spPr>
         <p:txBody>
-          <a:bodyPr wrap="square" anchor="t" lIns="0" rIns="0" tIns="0" bIns="0">
+          <a:bodyPr wrap="square" lIns="0" tIns="0" rIns="0" bIns="0" anchor="t">
             <a:spAutoFit/>
           </a:bodyPr>
           <a:lstStyle/>
@@ -10189,6 +10292,7 @@
           <a:lstStyle/>
           <a:p>
             <a:pPr algn="ctr"/>
+            <a:endParaRPr/>
           </a:p>
         </p:txBody>
       </p:sp>
@@ -10209,7 +10313,7 @@
           <a:noFill/>
         </p:spPr>
         <p:txBody>
-          <a:bodyPr wrap="square" anchor="ctr" lIns="0" rIns="0" tIns="0" bIns="0">
+          <a:bodyPr wrap="square" lIns="0" tIns="0" rIns="0" bIns="0" anchor="ctr">
             <a:spAutoFit/>
           </a:bodyPr>
           <a:lstStyle/>
@@ -10380,6 +10484,7 @@
           <a:lstStyle/>
           <a:p>
             <a:pPr algn="ctr"/>
+            <a:endParaRPr/>
           </a:p>
         </p:txBody>
       </p:sp>
@@ -10400,7 +10505,7 @@
           <a:noFill/>
         </p:spPr>
         <p:txBody>
-          <a:bodyPr wrap="square" anchor="t" lIns="0" rIns="0" tIns="0" bIns="0">
+          <a:bodyPr wrap="square" lIns="0" tIns="0" rIns="0" bIns="0" anchor="t">
             <a:spAutoFit/>
           </a:bodyPr>
           <a:lstStyle/>
@@ -10443,7 +10548,7 @@
           <a:noFill/>
         </p:spPr>
         <p:txBody>
-          <a:bodyPr wrap="square" anchor="t" lIns="0" rIns="0" tIns="0" bIns="0">
+          <a:bodyPr wrap="square" lIns="0" tIns="0" rIns="0" bIns="0" anchor="t">
             <a:spAutoFit/>
           </a:bodyPr>
           <a:lstStyle/>
@@ -10470,7 +10575,7 @@
 </file>
 
 <file path=ppt/slides/slide21.xml><?xml version="1.0" encoding="utf-8"?>
-<p:sld xmlns:a="http://schemas.openxmlformats.org/drawingml/2006/main" xmlns:p="http://schemas.openxmlformats.org/presentationml/2006/main" xmlns:r="http://schemas.openxmlformats.org/officeDocument/2006/relationships">
+<p:sld xmlns:a="http://schemas.openxmlformats.org/drawingml/2006/main" xmlns:r="http://schemas.openxmlformats.org/officeDocument/2006/relationships" xmlns:p="http://schemas.openxmlformats.org/presentationml/2006/main">
   <p:cSld>
     <p:bg>
       <p:bgPr>
@@ -10486,7 +10591,14 @@
         <p:cNvGrpSpPr/>
         <p:nvPr/>
       </p:nvGrpSpPr>
-      <p:grpSpPr/>
+      <p:grpSpPr>
+        <a:xfrm>
+          <a:off x="0" y="0"/>
+          <a:ext cx="0" cy="0"/>
+          <a:chOff x="0" y="0"/>
+          <a:chExt cx="0" cy="0"/>
+        </a:xfrm>
+      </p:grpSpPr>
       <p:sp>
         <p:nvSpPr>
           <p:cNvPr id="2" name="Rectangle 1"/>
@@ -10528,6 +10640,7 @@
           <a:lstStyle/>
           <a:p>
             <a:pPr algn="ctr"/>
+            <a:endParaRPr/>
           </a:p>
         </p:txBody>
       </p:sp>
@@ -10601,7 +10714,7 @@
           <a:noFill/>
         </p:spPr>
         <p:txBody>
-          <a:bodyPr wrap="square" anchor="ctr" lIns="0" rIns="0" tIns="0" bIns="0">
+          <a:bodyPr wrap="square" lIns="0" tIns="0" rIns="0" bIns="0" anchor="ctr">
             <a:spAutoFit/>
           </a:bodyPr>
           <a:lstStyle/>
@@ -10627,7 +10740,7 @@
         <p:spPr>
           <a:xfrm>
             <a:off x="658368" y="1554480"/>
-            <a:ext cx="10881360" cy="4297680"/>
+            <a:ext cx="10881360" cy="2439257"/>
           </a:xfrm>
           <a:prstGeom prst="rect">
             <a:avLst/>
@@ -10635,7 +10748,7 @@
           <a:noFill/>
         </p:spPr>
         <p:txBody>
-          <a:bodyPr wrap="square" anchor="t" lIns="0" rIns="0" tIns="0" bIns="0">
+          <a:bodyPr wrap="square" lIns="0" tIns="0" rIns="0" bIns="0" anchor="t">
             <a:spAutoFit/>
           </a:bodyPr>
           <a:lstStyle/>
@@ -10652,7 +10765,7 @@
               </a:spcAft>
             </a:pPr>
             <a:r>
-              <a:rPr sz="1700" b="1" i="0">
+              <a:rPr sz="2400" b="1" i="0" dirty="0">
                 <a:solidFill>
                   <a:srgbClr val="EDAB0C"/>
                 </a:solidFill>
@@ -10661,7 +10774,7 @@
               <a:t>■  </a:t>
             </a:r>
             <a:r>
-              <a:rPr sz="1700" b="0" i="0">
+              <a:rPr sz="2400" b="0" i="0" dirty="0">
                 <a:solidFill>
                   <a:srgbClr val="2A2929"/>
                 </a:solidFill>
@@ -10683,7 +10796,7 @@
               </a:spcAft>
             </a:pPr>
             <a:r>
-              <a:rPr sz="1400" b="0" i="0">
+              <a:rPr sz="2000" b="0" i="0" dirty="0">
                 <a:solidFill>
                   <a:srgbClr val="7A7A7A"/>
                 </a:solidFill>
@@ -10692,7 +10805,7 @@
               <a:t>–  </a:t>
             </a:r>
             <a:r>
-              <a:rPr sz="1400" b="0" i="0">
+              <a:rPr sz="2000" b="0" i="0" dirty="0">
                 <a:solidFill>
                   <a:srgbClr val="2A2929"/>
                 </a:solidFill>
@@ -10714,7 +10827,7 @@
               </a:spcAft>
             </a:pPr>
             <a:r>
-              <a:rPr sz="1400" b="0" i="0">
+              <a:rPr sz="2000" b="0" i="0" dirty="0">
                 <a:solidFill>
                   <a:srgbClr val="7A7A7A"/>
                 </a:solidFill>
@@ -10723,7 +10836,7 @@
               <a:t>–  </a:t>
             </a:r>
             <a:r>
-              <a:rPr sz="1400" b="0" i="0">
+              <a:rPr sz="2000" b="0" i="0" dirty="0">
                 <a:solidFill>
                   <a:srgbClr val="2A2929"/>
                 </a:solidFill>
@@ -10745,7 +10858,7 @@
               </a:spcAft>
             </a:pPr>
             <a:r>
-              <a:rPr sz="1700" b="1" i="0">
+              <a:rPr sz="2400" b="1" i="0" dirty="0">
                 <a:solidFill>
                   <a:srgbClr val="EDAB0C"/>
                 </a:solidFill>
@@ -10754,7 +10867,7 @@
               <a:t>■  </a:t>
             </a:r>
             <a:r>
-              <a:rPr sz="1700" b="0" i="0">
+              <a:rPr sz="2400" b="0" i="0" dirty="0">
                 <a:solidFill>
                   <a:srgbClr val="2A2929"/>
                 </a:solidFill>
@@ -10808,6 +10921,7 @@
           <a:lstStyle/>
           <a:p>
             <a:pPr algn="ctr"/>
+            <a:endParaRPr/>
           </a:p>
         </p:txBody>
       </p:sp>
@@ -10828,7 +10942,7 @@
           <a:noFill/>
         </p:spPr>
         <p:txBody>
-          <a:bodyPr wrap="square" anchor="ctr" lIns="0" rIns="0" tIns="0" bIns="0">
+          <a:bodyPr wrap="square" lIns="0" tIns="0" rIns="0" bIns="0" anchor="ctr">
             <a:spAutoFit/>
           </a:bodyPr>
           <a:lstStyle/>
@@ -10886,6 +11000,7 @@
           <a:lstStyle/>
           <a:p>
             <a:pPr algn="ctr"/>
+            <a:endParaRPr/>
           </a:p>
         </p:txBody>
       </p:sp>
@@ -10906,7 +11021,7 @@
           <a:noFill/>
         </p:spPr>
         <p:txBody>
-          <a:bodyPr wrap="square" anchor="t" lIns="0" rIns="0" tIns="0" bIns="0">
+          <a:bodyPr wrap="square" lIns="0" tIns="0" rIns="0" bIns="0" anchor="t">
             <a:spAutoFit/>
           </a:bodyPr>
           <a:lstStyle/>
@@ -10949,7 +11064,7 @@
           <a:noFill/>
         </p:spPr>
         <p:txBody>
-          <a:bodyPr wrap="square" anchor="t" lIns="0" rIns="0" tIns="0" bIns="0">
+          <a:bodyPr wrap="square" lIns="0" tIns="0" rIns="0" bIns="0" anchor="t">
             <a:spAutoFit/>
           </a:bodyPr>
           <a:lstStyle/>
@@ -10976,7 +11091,7 @@
 </file>
 
 <file path=ppt/slides/slide22.xml><?xml version="1.0" encoding="utf-8"?>
-<p:sld xmlns:a="http://schemas.openxmlformats.org/drawingml/2006/main" xmlns:p="http://schemas.openxmlformats.org/presentationml/2006/main" xmlns:r="http://schemas.openxmlformats.org/officeDocument/2006/relationships">
+<p:sld xmlns:a="http://schemas.openxmlformats.org/drawingml/2006/main" xmlns:r="http://schemas.openxmlformats.org/officeDocument/2006/relationships" xmlns:p="http://schemas.openxmlformats.org/presentationml/2006/main">
   <p:cSld>
     <p:bg>
       <p:bgPr>
@@ -10992,7 +11107,14 @@
         <p:cNvGrpSpPr/>
         <p:nvPr/>
       </p:nvGrpSpPr>
-      <p:grpSpPr/>
+      <p:grpSpPr>
+        <a:xfrm>
+          <a:off x="0" y="0"/>
+          <a:ext cx="0" cy="0"/>
+          <a:chOff x="0" y="0"/>
+          <a:chExt cx="0" cy="0"/>
+        </a:xfrm>
+      </p:grpSpPr>
       <p:sp>
         <p:nvSpPr>
           <p:cNvPr id="2" name="TextBox 1"/>
@@ -11010,7 +11132,7 @@
           <a:noFill/>
         </p:spPr>
         <p:txBody>
-          <a:bodyPr wrap="square" anchor="t" lIns="0" rIns="0" tIns="0" bIns="0">
+          <a:bodyPr wrap="square" lIns="0" tIns="0" rIns="0" bIns="0" anchor="t">
             <a:spAutoFit/>
           </a:bodyPr>
           <a:lstStyle/>
@@ -11084,6 +11206,7 @@
           <a:lstStyle/>
           <a:p>
             <a:pPr algn="ctr"/>
+            <a:endParaRPr/>
           </a:p>
         </p:txBody>
       </p:sp>
@@ -11130,6 +11253,7 @@
           <a:lstStyle/>
           <a:p>
             <a:pPr algn="ctr"/>
+            <a:endParaRPr/>
           </a:p>
         </p:txBody>
       </p:sp>
@@ -11174,6 +11298,7 @@
           <a:lstStyle/>
           <a:p>
             <a:pPr algn="ctr"/>
+            <a:endParaRPr/>
           </a:p>
         </p:txBody>
       </p:sp>
@@ -11194,7 +11319,7 @@
           <a:noFill/>
         </p:spPr>
         <p:txBody>
-          <a:bodyPr wrap="square" anchor="ctr" lIns="0" rIns="0" tIns="0" bIns="0">
+          <a:bodyPr wrap="square" lIns="0" tIns="0" rIns="0" bIns="0" anchor="ctr">
             <a:spAutoFit/>
           </a:bodyPr>
           <a:lstStyle/>
@@ -11259,6 +11384,7 @@
           <a:lstStyle/>
           <a:p>
             <a:pPr algn="ctr"/>
+            <a:endParaRPr/>
           </a:p>
         </p:txBody>
       </p:sp>
@@ -11303,6 +11429,7 @@
           <a:lstStyle/>
           <a:p>
             <a:pPr algn="ctr"/>
+            <a:endParaRPr/>
           </a:p>
         </p:txBody>
       </p:sp>
@@ -11323,7 +11450,7 @@
           <a:noFill/>
         </p:spPr>
         <p:txBody>
-          <a:bodyPr wrap="square" anchor="ctr" lIns="0" rIns="0" tIns="0" bIns="0">
+          <a:bodyPr wrap="square" lIns="0" tIns="0" rIns="0" bIns="0" anchor="ctr">
             <a:spAutoFit/>
           </a:bodyPr>
           <a:lstStyle/>
@@ -11388,6 +11515,7 @@
           <a:lstStyle/>
           <a:p>
             <a:pPr algn="ctr"/>
+            <a:endParaRPr/>
           </a:p>
         </p:txBody>
       </p:sp>
@@ -11432,6 +11560,7 @@
           <a:lstStyle/>
           <a:p>
             <a:pPr algn="ctr"/>
+            <a:endParaRPr/>
           </a:p>
         </p:txBody>
       </p:sp>
@@ -11452,7 +11581,7 @@
           <a:noFill/>
         </p:spPr>
         <p:txBody>
-          <a:bodyPr wrap="square" anchor="ctr" lIns="0" rIns="0" tIns="0" bIns="0">
+          <a:bodyPr wrap="square" lIns="0" tIns="0" rIns="0" bIns="0" anchor="ctr">
             <a:spAutoFit/>
           </a:bodyPr>
           <a:lstStyle/>
@@ -11515,6 +11644,7 @@
           <a:lstStyle/>
           <a:p>
             <a:pPr algn="ctr"/>
+            <a:endParaRPr/>
           </a:p>
         </p:txBody>
       </p:sp>
@@ -11535,7 +11665,7 @@
           <a:noFill/>
         </p:spPr>
         <p:txBody>
-          <a:bodyPr wrap="square" anchor="t" lIns="0" rIns="0" tIns="0" bIns="0">
+          <a:bodyPr wrap="square" lIns="0" tIns="0" rIns="0" bIns="0" anchor="t">
             <a:spAutoFit/>
           </a:bodyPr>
           <a:lstStyle/>
@@ -11578,7 +11708,7 @@
           <a:noFill/>
         </p:spPr>
         <p:txBody>
-          <a:bodyPr wrap="square" anchor="t" lIns="0" rIns="0" tIns="0" bIns="0">
+          <a:bodyPr wrap="square" lIns="0" tIns="0" rIns="0" bIns="0" anchor="t">
             <a:spAutoFit/>
           </a:bodyPr>
           <a:lstStyle/>
@@ -11605,7 +11735,7 @@
 </file>
 
 <file path=ppt/slides/slide23.xml><?xml version="1.0" encoding="utf-8"?>
-<p:sld xmlns:a="http://schemas.openxmlformats.org/drawingml/2006/main" xmlns:p="http://schemas.openxmlformats.org/presentationml/2006/main" xmlns:r="http://schemas.openxmlformats.org/officeDocument/2006/relationships">
+<p:sld xmlns:a="http://schemas.openxmlformats.org/drawingml/2006/main" xmlns:r="http://schemas.openxmlformats.org/officeDocument/2006/relationships" xmlns:p="http://schemas.openxmlformats.org/presentationml/2006/main">
   <p:cSld>
     <p:bg>
       <p:bgPr>
@@ -11621,7 +11751,14 @@
         <p:cNvGrpSpPr/>
         <p:nvPr/>
       </p:nvGrpSpPr>
-      <p:grpSpPr/>
+      <p:grpSpPr>
+        <a:xfrm>
+          <a:off x="0" y="0"/>
+          <a:ext cx="0" cy="0"/>
+          <a:chOff x="0" y="0"/>
+          <a:chExt cx="0" cy="0"/>
+        </a:xfrm>
+      </p:grpSpPr>
       <p:sp>
         <p:nvSpPr>
           <p:cNvPr id="2" name="Rectangle 1"/>
@@ -11663,6 +11800,7 @@
           <a:lstStyle/>
           <a:p>
             <a:pPr algn="ctr"/>
+            <a:endParaRPr/>
           </a:p>
         </p:txBody>
       </p:sp>
@@ -11683,7 +11821,7 @@
           <a:noFill/>
         </p:spPr>
         <p:txBody>
-          <a:bodyPr wrap="square" anchor="t" lIns="0" rIns="0" tIns="0" bIns="0">
+          <a:bodyPr wrap="square" lIns="0" tIns="0" rIns="0" bIns="0" anchor="t">
             <a:spAutoFit/>
           </a:bodyPr>
           <a:lstStyle/>
@@ -11785,7 +11923,7 @@
 </file>
 
 <file path=ppt/slides/slide3.xml><?xml version="1.0" encoding="utf-8"?>
-<p:sld xmlns:a="http://schemas.openxmlformats.org/drawingml/2006/main" xmlns:p="http://schemas.openxmlformats.org/presentationml/2006/main" xmlns:r="http://schemas.openxmlformats.org/officeDocument/2006/relationships">
+<p:sld xmlns:a="http://schemas.openxmlformats.org/drawingml/2006/main" xmlns:r="http://schemas.openxmlformats.org/officeDocument/2006/relationships" xmlns:p="http://schemas.openxmlformats.org/presentationml/2006/main">
   <p:cSld>
     <p:bg>
       <p:bgPr>
@@ -11801,7 +11939,14 @@
         <p:cNvGrpSpPr/>
         <p:nvPr/>
       </p:nvGrpSpPr>
-      <p:grpSpPr/>
+      <p:grpSpPr>
+        <a:xfrm>
+          <a:off x="0" y="0"/>
+          <a:ext cx="0" cy="0"/>
+          <a:chOff x="0" y="0"/>
+          <a:chExt cx="0" cy="0"/>
+        </a:xfrm>
+      </p:grpSpPr>
       <p:sp>
         <p:nvSpPr>
           <p:cNvPr id="2" name="Rectangle 1"/>
@@ -11843,6 +11988,7 @@
           <a:lstStyle/>
           <a:p>
             <a:pPr algn="ctr"/>
+            <a:endParaRPr/>
           </a:p>
         </p:txBody>
       </p:sp>
@@ -11863,7 +12009,7 @@
           <a:noFill/>
         </p:spPr>
         <p:txBody>
-          <a:bodyPr wrap="square" anchor="t" lIns="0" rIns="0" tIns="0" bIns="0">
+          <a:bodyPr wrap="square" lIns="0" tIns="0" rIns="0" bIns="0" anchor="t">
             <a:spAutoFit/>
           </a:bodyPr>
           <a:lstStyle/>
@@ -11897,7 +12043,7 @@
           <a:noFill/>
         </p:spPr>
         <p:txBody>
-          <a:bodyPr wrap="square" anchor="t" lIns="0" rIns="0" tIns="0" bIns="0">
+          <a:bodyPr wrap="square" lIns="0" tIns="0" rIns="0" bIns="0" anchor="t">
             <a:spAutoFit/>
           </a:bodyPr>
           <a:lstStyle/>
@@ -11987,6 +12133,7 @@
           <a:lstStyle/>
           <a:p>
             <a:pPr algn="ctr"/>
+            <a:endParaRPr/>
           </a:p>
         </p:txBody>
       </p:sp>
@@ -12007,7 +12154,7 @@
           <a:noFill/>
         </p:spPr>
         <p:txBody>
-          <a:bodyPr wrap="square" anchor="t" lIns="0" rIns="0" tIns="0" bIns="0">
+          <a:bodyPr wrap="square" lIns="0" tIns="0" rIns="0" bIns="0" anchor="t">
             <a:spAutoFit/>
           </a:bodyPr>
           <a:lstStyle/>
@@ -12050,21 +12197,13 @@
           <a:noFill/>
         </p:spPr>
         <p:txBody>
-          <a:bodyPr wrap="square" anchor="t" lIns="0" rIns="0" tIns="0" bIns="0">
+          <a:bodyPr wrap="square" lIns="0" tIns="0" rIns="0" bIns="0" anchor="t">
             <a:spAutoFit/>
           </a:bodyPr>
           <a:lstStyle/>
           <a:p>
             <a:pPr algn="r"/>
-            <a:r>
-              <a:rPr sz="1100" b="0" i="0">
-                <a:solidFill>
-                  <a:srgbClr val="7A7A7A"/>
-                </a:solidFill>
-                <a:latin typeface="Roboto"/>
-              </a:rPr>
-              <a:t/>
-            </a:r>
+            <a:endParaRPr/>
           </a:p>
         </p:txBody>
       </p:sp>
@@ -12077,7 +12216,7 @@
 </file>
 
 <file path=ppt/slides/slide4.xml><?xml version="1.0" encoding="utf-8"?>
-<p:sld xmlns:a="http://schemas.openxmlformats.org/drawingml/2006/main" xmlns:p="http://schemas.openxmlformats.org/presentationml/2006/main" xmlns:r="http://schemas.openxmlformats.org/officeDocument/2006/relationships">
+<p:sld xmlns:a="http://schemas.openxmlformats.org/drawingml/2006/main" xmlns:r="http://schemas.openxmlformats.org/officeDocument/2006/relationships" xmlns:p="http://schemas.openxmlformats.org/presentationml/2006/main">
   <p:cSld>
     <p:bg>
       <p:bgPr>
@@ -12093,7 +12232,14 @@
         <p:cNvGrpSpPr/>
         <p:nvPr/>
       </p:nvGrpSpPr>
-      <p:grpSpPr/>
+      <p:grpSpPr>
+        <a:xfrm>
+          <a:off x="0" y="0"/>
+          <a:ext cx="0" cy="0"/>
+          <a:chOff x="0" y="0"/>
+          <a:chExt cx="0" cy="0"/>
+        </a:xfrm>
+      </p:grpSpPr>
       <p:sp>
         <p:nvSpPr>
           <p:cNvPr id="2" name="TextBox 1"/>
@@ -12111,7 +12257,7 @@
           <a:noFill/>
         </p:spPr>
         <p:txBody>
-          <a:bodyPr wrap="square" anchor="t" lIns="0" rIns="0" tIns="0" bIns="0">
+          <a:bodyPr wrap="square" lIns="0" tIns="0" rIns="0" bIns="0" anchor="t">
             <a:spAutoFit/>
           </a:bodyPr>
           <a:lstStyle/>
@@ -12169,6 +12315,7 @@
           <a:lstStyle/>
           <a:p>
             <a:pPr algn="ctr"/>
+            <a:endParaRPr/>
           </a:p>
         </p:txBody>
       </p:sp>
@@ -12189,7 +12336,7 @@
           <a:noFill/>
         </p:spPr>
         <p:txBody>
-          <a:bodyPr wrap="square" anchor="ctr" lIns="0" rIns="0" tIns="0" bIns="0">
+          <a:bodyPr wrap="square" lIns="0" tIns="0" rIns="0" bIns="0" anchor="ctr">
             <a:spAutoFit/>
           </a:bodyPr>
           <a:lstStyle/>
@@ -12329,6 +12476,7 @@
           <a:lstStyle/>
           <a:p>
             <a:pPr algn="ctr"/>
+            <a:endParaRPr/>
           </a:p>
         </p:txBody>
       </p:sp>
@@ -12349,7 +12497,7 @@
           <a:noFill/>
         </p:spPr>
         <p:txBody>
-          <a:bodyPr wrap="square" anchor="t" lIns="0" rIns="0" tIns="0" bIns="0">
+          <a:bodyPr wrap="square" lIns="0" tIns="0" rIns="0" bIns="0" anchor="t">
             <a:spAutoFit/>
           </a:bodyPr>
           <a:lstStyle/>
@@ -12392,7 +12540,7 @@
           <a:noFill/>
         </p:spPr>
         <p:txBody>
-          <a:bodyPr wrap="square" anchor="t" lIns="0" rIns="0" tIns="0" bIns="0">
+          <a:bodyPr wrap="square" lIns="0" tIns="0" rIns="0" bIns="0" anchor="t">
             <a:spAutoFit/>
           </a:bodyPr>
           <a:lstStyle/>
@@ -12419,7 +12567,7 @@
 </file>
 
 <file path=ppt/slides/slide5.xml><?xml version="1.0" encoding="utf-8"?>
-<p:sld xmlns:a="http://schemas.openxmlformats.org/drawingml/2006/main" xmlns:p="http://schemas.openxmlformats.org/presentationml/2006/main" xmlns:r="http://schemas.openxmlformats.org/officeDocument/2006/relationships">
+<p:sld xmlns:a="http://schemas.openxmlformats.org/drawingml/2006/main" xmlns:r="http://schemas.openxmlformats.org/officeDocument/2006/relationships" xmlns:p="http://schemas.openxmlformats.org/presentationml/2006/main">
   <p:cSld>
     <p:bg>
       <p:bgPr>
@@ -12435,7 +12583,14 @@
         <p:cNvGrpSpPr/>
         <p:nvPr/>
       </p:nvGrpSpPr>
-      <p:grpSpPr/>
+      <p:grpSpPr>
+        <a:xfrm>
+          <a:off x="0" y="0"/>
+          <a:ext cx="0" cy="0"/>
+          <a:chOff x="0" y="0"/>
+          <a:chExt cx="0" cy="0"/>
+        </a:xfrm>
+      </p:grpSpPr>
       <p:sp>
         <p:nvSpPr>
           <p:cNvPr id="2" name="TextBox 1"/>
@@ -12453,7 +12608,7 @@
           <a:noFill/>
         </p:spPr>
         <p:txBody>
-          <a:bodyPr wrap="square" anchor="t" lIns="0" rIns="0" tIns="0" bIns="0">
+          <a:bodyPr wrap="square" lIns="0" tIns="0" rIns="0" bIns="0" anchor="t">
             <a:spAutoFit/>
           </a:bodyPr>
           <a:lstStyle/>
@@ -12527,6 +12682,7 @@
           <a:lstStyle/>
           <a:p>
             <a:pPr algn="ctr"/>
+            <a:endParaRPr/>
           </a:p>
         </p:txBody>
       </p:sp>
@@ -12547,7 +12703,7 @@
           <a:noFill/>
         </p:spPr>
         <p:txBody>
-          <a:bodyPr wrap="square" anchor="ctr" lIns="0" rIns="0" tIns="0" bIns="0">
+          <a:bodyPr wrap="square" lIns="0" tIns="0" rIns="0" bIns="0" anchor="ctr">
             <a:spAutoFit/>
           </a:bodyPr>
           <a:lstStyle/>
@@ -12687,6 +12843,7 @@
           <a:lstStyle/>
           <a:p>
             <a:pPr algn="ctr"/>
+            <a:endParaRPr/>
           </a:p>
         </p:txBody>
       </p:sp>
@@ -12707,7 +12864,7 @@
           <a:noFill/>
         </p:spPr>
         <p:txBody>
-          <a:bodyPr wrap="square" anchor="t" lIns="0" rIns="0" tIns="0" bIns="0">
+          <a:bodyPr wrap="square" lIns="0" tIns="0" rIns="0" bIns="0" anchor="t">
             <a:spAutoFit/>
           </a:bodyPr>
           <a:lstStyle/>
@@ -12750,7 +12907,7 @@
           <a:noFill/>
         </p:spPr>
         <p:txBody>
-          <a:bodyPr wrap="square" anchor="t" lIns="0" rIns="0" tIns="0" bIns="0">
+          <a:bodyPr wrap="square" lIns="0" tIns="0" rIns="0" bIns="0" anchor="t">
             <a:spAutoFit/>
           </a:bodyPr>
           <a:lstStyle/>
@@ -12777,7 +12934,7 @@
 </file>
 
 <file path=ppt/slides/slide6.xml><?xml version="1.0" encoding="utf-8"?>
-<p:sld xmlns:a="http://schemas.openxmlformats.org/drawingml/2006/main" xmlns:p="http://schemas.openxmlformats.org/presentationml/2006/main" xmlns:r="http://schemas.openxmlformats.org/officeDocument/2006/relationships">
+<p:sld xmlns:a="http://schemas.openxmlformats.org/drawingml/2006/main" xmlns:r="http://schemas.openxmlformats.org/officeDocument/2006/relationships" xmlns:p="http://schemas.openxmlformats.org/presentationml/2006/main">
   <p:cSld>
     <p:bg>
       <p:bgPr>
@@ -12793,7 +12950,14 @@
         <p:cNvGrpSpPr/>
         <p:nvPr/>
       </p:nvGrpSpPr>
-      <p:grpSpPr/>
+      <p:grpSpPr>
+        <a:xfrm>
+          <a:off x="0" y="0"/>
+          <a:ext cx="0" cy="0"/>
+          <a:chOff x="0" y="0"/>
+          <a:chExt cx="0" cy="0"/>
+        </a:xfrm>
+      </p:grpSpPr>
       <p:sp>
         <p:nvSpPr>
           <p:cNvPr id="2" name="TextBox 1"/>
@@ -12811,7 +12975,7 @@
           <a:noFill/>
         </p:spPr>
         <p:txBody>
-          <a:bodyPr wrap="square" anchor="t" lIns="0" rIns="0" tIns="0" bIns="0">
+          <a:bodyPr wrap="square" lIns="0" tIns="0" rIns="0" bIns="0" anchor="t">
             <a:spAutoFit/>
           </a:bodyPr>
           <a:lstStyle/>
@@ -12869,6 +13033,7 @@
           <a:lstStyle/>
           <a:p>
             <a:pPr algn="ctr"/>
+            <a:endParaRPr/>
           </a:p>
         </p:txBody>
       </p:sp>
@@ -12889,7 +13054,7 @@
           <a:noFill/>
         </p:spPr>
         <p:txBody>
-          <a:bodyPr wrap="square" anchor="ctr" lIns="0" rIns="0" tIns="0" bIns="0">
+          <a:bodyPr wrap="square" lIns="0" tIns="0" rIns="0" bIns="0" anchor="ctr">
             <a:spAutoFit/>
           </a:bodyPr>
           <a:lstStyle/>
@@ -13029,6 +13194,7 @@
           <a:lstStyle/>
           <a:p>
             <a:pPr algn="ctr"/>
+            <a:endParaRPr/>
           </a:p>
         </p:txBody>
       </p:sp>
@@ -13049,7 +13215,7 @@
           <a:noFill/>
         </p:spPr>
         <p:txBody>
-          <a:bodyPr wrap="square" anchor="t" lIns="0" rIns="0" tIns="0" bIns="0">
+          <a:bodyPr wrap="square" lIns="0" tIns="0" rIns="0" bIns="0" anchor="t">
             <a:spAutoFit/>
           </a:bodyPr>
           <a:lstStyle/>
@@ -13092,7 +13258,7 @@
           <a:noFill/>
         </p:spPr>
         <p:txBody>
-          <a:bodyPr wrap="square" anchor="t" lIns="0" rIns="0" tIns="0" bIns="0">
+          <a:bodyPr wrap="square" lIns="0" tIns="0" rIns="0" bIns="0" anchor="t">
             <a:spAutoFit/>
           </a:bodyPr>
           <a:lstStyle/>
@@ -13119,7 +13285,7 @@
 </file>
 
 <file path=ppt/slides/slide7.xml><?xml version="1.0" encoding="utf-8"?>
-<p:sld xmlns:a="http://schemas.openxmlformats.org/drawingml/2006/main" xmlns:p="http://schemas.openxmlformats.org/presentationml/2006/main" xmlns:r="http://schemas.openxmlformats.org/officeDocument/2006/relationships">
+<p:sld xmlns:a="http://schemas.openxmlformats.org/drawingml/2006/main" xmlns:r="http://schemas.openxmlformats.org/officeDocument/2006/relationships" xmlns:p="http://schemas.openxmlformats.org/presentationml/2006/main">
   <p:cSld>
     <p:bg>
       <p:bgPr>
@@ -13135,7 +13301,14 @@
         <p:cNvGrpSpPr/>
         <p:nvPr/>
       </p:nvGrpSpPr>
-      <p:grpSpPr/>
+      <p:grpSpPr>
+        <a:xfrm>
+          <a:off x="0" y="0"/>
+          <a:ext cx="0" cy="0"/>
+          <a:chOff x="0" y="0"/>
+          <a:chExt cx="0" cy="0"/>
+        </a:xfrm>
+      </p:grpSpPr>
       <p:sp>
         <p:nvSpPr>
           <p:cNvPr id="2" name="TextBox 1"/>
@@ -13153,7 +13326,7 @@
           <a:noFill/>
         </p:spPr>
         <p:txBody>
-          <a:bodyPr wrap="square" anchor="t" lIns="0" rIns="0" tIns="0" bIns="0">
+          <a:bodyPr wrap="square" lIns="0" tIns="0" rIns="0" bIns="0" anchor="t">
             <a:spAutoFit/>
           </a:bodyPr>
           <a:lstStyle/>
@@ -13211,6 +13384,7 @@
           <a:lstStyle/>
           <a:p>
             <a:pPr algn="ctr"/>
+            <a:endParaRPr/>
           </a:p>
         </p:txBody>
       </p:sp>
@@ -13231,7 +13405,7 @@
           <a:noFill/>
         </p:spPr>
         <p:txBody>
-          <a:bodyPr wrap="square" anchor="ctr" lIns="0" rIns="0" tIns="0" bIns="0">
+          <a:bodyPr wrap="square" lIns="0" tIns="0" rIns="0" bIns="0" anchor="ctr">
             <a:spAutoFit/>
           </a:bodyPr>
           <a:lstStyle/>
@@ -13464,6 +13638,7 @@
           <a:lstStyle/>
           <a:p>
             <a:pPr algn="ctr"/>
+            <a:endParaRPr/>
           </a:p>
         </p:txBody>
       </p:sp>
@@ -13484,7 +13659,7 @@
           <a:noFill/>
         </p:spPr>
         <p:txBody>
-          <a:bodyPr wrap="square" anchor="t" lIns="0" rIns="0" tIns="0" bIns="0">
+          <a:bodyPr wrap="square" lIns="0" tIns="0" rIns="0" bIns="0" anchor="t">
             <a:spAutoFit/>
           </a:bodyPr>
           <a:lstStyle/>
@@ -13527,7 +13702,7 @@
           <a:noFill/>
         </p:spPr>
         <p:txBody>
-          <a:bodyPr wrap="square" anchor="t" lIns="0" rIns="0" tIns="0" bIns="0">
+          <a:bodyPr wrap="square" lIns="0" tIns="0" rIns="0" bIns="0" anchor="t">
             <a:spAutoFit/>
           </a:bodyPr>
           <a:lstStyle/>
@@ -13554,7 +13729,7 @@
 </file>
 
 <file path=ppt/slides/slide8.xml><?xml version="1.0" encoding="utf-8"?>
-<p:sld xmlns:a="http://schemas.openxmlformats.org/drawingml/2006/main" xmlns:p="http://schemas.openxmlformats.org/presentationml/2006/main" xmlns:r="http://schemas.openxmlformats.org/officeDocument/2006/relationships">
+<p:sld xmlns:a="http://schemas.openxmlformats.org/drawingml/2006/main" xmlns:r="http://schemas.openxmlformats.org/officeDocument/2006/relationships" xmlns:p="http://schemas.openxmlformats.org/presentationml/2006/main">
   <p:cSld>
     <p:bg>
       <p:bgPr>
@@ -13570,7 +13745,14 @@
         <p:cNvGrpSpPr/>
         <p:nvPr/>
       </p:nvGrpSpPr>
-      <p:grpSpPr/>
+      <p:grpSpPr>
+        <a:xfrm>
+          <a:off x="0" y="0"/>
+          <a:ext cx="0" cy="0"/>
+          <a:chOff x="0" y="0"/>
+          <a:chExt cx="0" cy="0"/>
+        </a:xfrm>
+      </p:grpSpPr>
       <p:sp>
         <p:nvSpPr>
           <p:cNvPr id="2" name="Rectangle 1"/>
@@ -13612,6 +13794,7 @@
           <a:lstStyle/>
           <a:p>
             <a:pPr algn="ctr"/>
+            <a:endParaRPr/>
           </a:p>
         </p:txBody>
       </p:sp>
@@ -13685,7 +13868,7 @@
           <a:noFill/>
         </p:spPr>
         <p:txBody>
-          <a:bodyPr wrap="square" anchor="ctr" lIns="0" rIns="0" tIns="0" bIns="0">
+          <a:bodyPr wrap="square" lIns="0" tIns="0" rIns="0" bIns="0" anchor="ctr">
             <a:spAutoFit/>
           </a:bodyPr>
           <a:lstStyle/>
@@ -13711,7 +13894,7 @@
         <p:spPr>
           <a:xfrm>
             <a:off x="658368" y="1554480"/>
-            <a:ext cx="10881360" cy="4297680"/>
+            <a:ext cx="10881360" cy="2603020"/>
           </a:xfrm>
           <a:prstGeom prst="rect">
             <a:avLst/>
@@ -13719,7 +13902,7 @@
           <a:noFill/>
         </p:spPr>
         <p:txBody>
-          <a:bodyPr wrap="square" anchor="t" lIns="0" rIns="0" tIns="0" bIns="0">
+          <a:bodyPr wrap="square" lIns="0" tIns="0" rIns="0" bIns="0" anchor="t">
             <a:spAutoFit/>
           </a:bodyPr>
           <a:lstStyle/>
@@ -13736,7 +13919,7 @@
               </a:spcAft>
             </a:pPr>
             <a:r>
-              <a:rPr sz="1700" b="1" i="0">
+              <a:rPr sz="1700" b="1" i="0" dirty="0">
                 <a:solidFill>
                   <a:srgbClr val="EDAB0C"/>
                 </a:solidFill>
@@ -13745,7 +13928,7 @@
               <a:t>■  </a:t>
             </a:r>
             <a:r>
-              <a:rPr sz="1700" b="0" i="0">
+              <a:rPr sz="1700" b="0" i="0" dirty="0">
                 <a:solidFill>
                   <a:srgbClr val="2A2929"/>
                 </a:solidFill>
@@ -13767,7 +13950,7 @@
               </a:spcAft>
             </a:pPr>
             <a:r>
-              <a:rPr sz="1700" b="1" i="0">
+              <a:rPr sz="2000" b="1" i="0" dirty="0">
                 <a:solidFill>
                   <a:srgbClr val="EDAB0C"/>
                 </a:solidFill>
@@ -13776,7 +13959,7 @@
               <a:t>■  </a:t>
             </a:r>
             <a:r>
-              <a:rPr sz="1700" b="0" i="0">
+              <a:rPr sz="2000" b="0" i="0" dirty="0">
                 <a:solidFill>
                   <a:srgbClr val="2A2929"/>
                 </a:solidFill>
@@ -13798,7 +13981,7 @@
               </a:spcAft>
             </a:pPr>
             <a:r>
-              <a:rPr sz="1400" b="0" i="0">
+              <a:rPr b="0" i="0" dirty="0">
                 <a:solidFill>
                   <a:srgbClr val="7A7A7A"/>
                 </a:solidFill>
@@ -13807,7 +13990,7 @@
               <a:t>–  </a:t>
             </a:r>
             <a:r>
-              <a:rPr sz="1400" b="0" i="0">
+              <a:rPr b="0" i="0" dirty="0">
                 <a:solidFill>
                   <a:srgbClr val="2A2929"/>
                 </a:solidFill>
@@ -13829,7 +14012,7 @@
               </a:spcAft>
             </a:pPr>
             <a:r>
-              <a:rPr sz="1400" b="0" i="0">
+              <a:rPr b="0" i="0" dirty="0">
                 <a:solidFill>
                   <a:srgbClr val="7A7A7A"/>
                 </a:solidFill>
@@ -13838,7 +14021,7 @@
               <a:t>–  </a:t>
             </a:r>
             <a:r>
-              <a:rPr sz="1400" b="0" i="0">
+              <a:rPr b="0" i="0" dirty="0">
                 <a:solidFill>
                   <a:srgbClr val="2A2929"/>
                 </a:solidFill>
@@ -13860,7 +14043,7 @@
               </a:spcAft>
             </a:pPr>
             <a:r>
-              <a:rPr sz="1700" b="1" i="0">
+              <a:rPr sz="2000" b="1" i="0" dirty="0">
                 <a:solidFill>
                   <a:srgbClr val="EDAB0C"/>
                 </a:solidFill>
@@ -13869,7 +14052,7 @@
               <a:t>■  </a:t>
             </a:r>
             <a:r>
-              <a:rPr sz="1700" b="0" i="0">
+              <a:rPr sz="2000" b="0" i="0" dirty="0">
                 <a:solidFill>
                   <a:srgbClr val="2A2929"/>
                 </a:solidFill>
@@ -13891,7 +14074,7 @@
               </a:spcAft>
             </a:pPr>
             <a:r>
-              <a:rPr sz="1700" b="1" i="0">
+              <a:rPr sz="2000" b="1" i="0" dirty="0">
                 <a:solidFill>
                   <a:srgbClr val="EDAB0C"/>
                 </a:solidFill>
@@ -13900,7 +14083,7 @@
               <a:t>■  </a:t>
             </a:r>
             <a:r>
-              <a:rPr sz="1700" b="0" i="0">
+              <a:rPr sz="2000" b="0" i="0" dirty="0">
                 <a:solidFill>
                   <a:srgbClr val="2A2929"/>
                 </a:solidFill>
@@ -13954,6 +14137,7 @@
           <a:lstStyle/>
           <a:p>
             <a:pPr algn="ctr"/>
+            <a:endParaRPr/>
           </a:p>
         </p:txBody>
       </p:sp>
@@ -13974,7 +14158,7 @@
           <a:noFill/>
         </p:spPr>
         <p:txBody>
-          <a:bodyPr wrap="square" anchor="ctr" lIns="0" rIns="0" tIns="0" bIns="0">
+          <a:bodyPr wrap="square" lIns="0" tIns="0" rIns="0" bIns="0" anchor="ctr">
             <a:spAutoFit/>
           </a:bodyPr>
           <a:lstStyle/>
@@ -14032,6 +14216,7 @@
           <a:lstStyle/>
           <a:p>
             <a:pPr algn="ctr"/>
+            <a:endParaRPr/>
           </a:p>
         </p:txBody>
       </p:sp>
@@ -14052,7 +14237,7 @@
           <a:noFill/>
         </p:spPr>
         <p:txBody>
-          <a:bodyPr wrap="square" anchor="t" lIns="0" rIns="0" tIns="0" bIns="0">
+          <a:bodyPr wrap="square" lIns="0" tIns="0" rIns="0" bIns="0" anchor="t">
             <a:spAutoFit/>
           </a:bodyPr>
           <a:lstStyle/>
@@ -14095,7 +14280,7 @@
           <a:noFill/>
         </p:spPr>
         <p:txBody>
-          <a:bodyPr wrap="square" anchor="t" lIns="0" rIns="0" tIns="0" bIns="0">
+          <a:bodyPr wrap="square" lIns="0" tIns="0" rIns="0" bIns="0" anchor="t">
             <a:spAutoFit/>
           </a:bodyPr>
           <a:lstStyle/>
@@ -14122,7 +14307,7 @@
 </file>
 
 <file path=ppt/slides/slide9.xml><?xml version="1.0" encoding="utf-8"?>
-<p:sld xmlns:a="http://schemas.openxmlformats.org/drawingml/2006/main" xmlns:p="http://schemas.openxmlformats.org/presentationml/2006/main" xmlns:r="http://schemas.openxmlformats.org/officeDocument/2006/relationships">
+<p:sld xmlns:a="http://schemas.openxmlformats.org/drawingml/2006/main" xmlns:r="http://schemas.openxmlformats.org/officeDocument/2006/relationships" xmlns:p="http://schemas.openxmlformats.org/presentationml/2006/main">
   <p:cSld>
     <p:bg>
       <p:bgPr>
@@ -14138,7 +14323,14 @@
         <p:cNvGrpSpPr/>
         <p:nvPr/>
       </p:nvGrpSpPr>
-      <p:grpSpPr/>
+      <p:grpSpPr>
+        <a:xfrm>
+          <a:off x="0" y="0"/>
+          <a:ext cx="0" cy="0"/>
+          <a:chOff x="0" y="0"/>
+          <a:chExt cx="0" cy="0"/>
+        </a:xfrm>
+      </p:grpSpPr>
       <p:sp>
         <p:nvSpPr>
           <p:cNvPr id="2" name="TextBox 1"/>
@@ -14156,7 +14348,7 @@
           <a:noFill/>
         </p:spPr>
         <p:txBody>
-          <a:bodyPr wrap="square" anchor="t" lIns="0" rIns="0" tIns="0" bIns="0">
+          <a:bodyPr wrap="square" lIns="0" tIns="0" rIns="0" bIns="0" anchor="t">
             <a:spAutoFit/>
           </a:bodyPr>
           <a:lstStyle/>
@@ -14230,6 +14422,7 @@
           <a:lstStyle/>
           <a:p>
             <a:pPr algn="ctr"/>
+            <a:endParaRPr/>
           </a:p>
         </p:txBody>
       </p:sp>
@@ -14276,6 +14469,7 @@
           <a:lstStyle/>
           <a:p>
             <a:pPr algn="ctr"/>
+            <a:endParaRPr/>
           </a:p>
         </p:txBody>
       </p:sp>
@@ -14320,6 +14514,7 @@
           <a:lstStyle/>
           <a:p>
             <a:pPr algn="ctr"/>
+            <a:endParaRPr/>
           </a:p>
         </p:txBody>
       </p:sp>
@@ -14340,7 +14535,7 @@
           <a:noFill/>
         </p:spPr>
         <p:txBody>
-          <a:bodyPr wrap="square" anchor="ctr" lIns="0" rIns="0" tIns="0" bIns="0">
+          <a:bodyPr wrap="square" lIns="0" tIns="0" rIns="0" bIns="0" anchor="ctr">
             <a:spAutoFit/>
           </a:bodyPr>
           <a:lstStyle/>
@@ -14405,6 +14600,7 @@
           <a:lstStyle/>
           <a:p>
             <a:pPr algn="ctr"/>
+            <a:endParaRPr/>
           </a:p>
         </p:txBody>
       </p:sp>
@@ -14449,6 +14645,7 @@
           <a:lstStyle/>
           <a:p>
             <a:pPr algn="ctr"/>
+            <a:endParaRPr/>
           </a:p>
         </p:txBody>
       </p:sp>
@@ -14469,7 +14666,7 @@
           <a:noFill/>
         </p:spPr>
         <p:txBody>
-          <a:bodyPr wrap="square" anchor="ctr" lIns="0" rIns="0" tIns="0" bIns="0">
+          <a:bodyPr wrap="square" lIns="0" tIns="0" rIns="0" bIns="0" anchor="ctr">
             <a:spAutoFit/>
           </a:bodyPr>
           <a:lstStyle/>
@@ -14534,6 +14731,7 @@
           <a:lstStyle/>
           <a:p>
             <a:pPr algn="ctr"/>
+            <a:endParaRPr/>
           </a:p>
         </p:txBody>
       </p:sp>
@@ -14578,6 +14776,7 @@
           <a:lstStyle/>
           <a:p>
             <a:pPr algn="ctr"/>
+            <a:endParaRPr/>
           </a:p>
         </p:txBody>
       </p:sp>
@@ -14598,7 +14797,7 @@
           <a:noFill/>
         </p:spPr>
         <p:txBody>
-          <a:bodyPr wrap="square" anchor="ctr" lIns="0" rIns="0" tIns="0" bIns="0">
+          <a:bodyPr wrap="square" lIns="0" tIns="0" rIns="0" bIns="0" anchor="ctr">
             <a:spAutoFit/>
           </a:bodyPr>
           <a:lstStyle/>
@@ -14661,6 +14860,7 @@
           <a:lstStyle/>
           <a:p>
             <a:pPr algn="ctr"/>
+            <a:endParaRPr/>
           </a:p>
         </p:txBody>
       </p:sp>
@@ -14681,7 +14881,7 @@
           <a:noFill/>
         </p:spPr>
         <p:txBody>
-          <a:bodyPr wrap="square" anchor="t" lIns="0" rIns="0" tIns="0" bIns="0">
+          <a:bodyPr wrap="square" lIns="0" tIns="0" rIns="0" bIns="0" anchor="t">
             <a:spAutoFit/>
           </a:bodyPr>
           <a:lstStyle/>
@@ -14724,7 +14924,7 @@
           <a:noFill/>
         </p:spPr>
         <p:txBody>
-          <a:bodyPr wrap="square" anchor="t" lIns="0" rIns="0" tIns="0" bIns="0">
+          <a:bodyPr wrap="square" lIns="0" tIns="0" rIns="0" bIns="0" anchor="t">
             <a:spAutoFit/>
           </a:bodyPr>
           <a:lstStyle/>
@@ -15081,44 +15281,44 @@
         <a:sysClr val="window" lastClr="FFFFFF"/>
       </a:lt1>
       <a:dk2>
-        <a:srgbClr val="1F497D"/>
+        <a:srgbClr val="0E2841"/>
       </a:dk2>
       <a:lt2>
-        <a:srgbClr val="EEECE1"/>
+        <a:srgbClr val="E8E8E8"/>
       </a:lt2>
       <a:accent1>
-        <a:srgbClr val="4F81BD"/>
+        <a:srgbClr val="156082"/>
       </a:accent1>
       <a:accent2>
-        <a:srgbClr val="C0504D"/>
+        <a:srgbClr val="E97132"/>
       </a:accent2>
       <a:accent3>
-        <a:srgbClr val="9BBB59"/>
+        <a:srgbClr val="196B24"/>
       </a:accent3>
       <a:accent4>
-        <a:srgbClr val="8064A2"/>
+        <a:srgbClr val="0F9ED5"/>
       </a:accent4>
       <a:accent5>
-        <a:srgbClr val="4BACC6"/>
+        <a:srgbClr val="A02B93"/>
       </a:accent5>
       <a:accent6>
-        <a:srgbClr val="F79646"/>
+        <a:srgbClr val="4EA72E"/>
       </a:accent6>
       <a:hlink>
-        <a:srgbClr val="0000FF"/>
+        <a:srgbClr val="467886"/>
       </a:hlink>
       <a:folHlink>
-        <a:srgbClr val="800080"/>
+        <a:srgbClr val="96607D"/>
       </a:folHlink>
     </a:clrScheme>
     <a:fontScheme name="Office">
       <a:majorFont>
-        <a:latin typeface="Calibri"/>
+        <a:latin typeface="Aptos Display" panose="02110004020202020204"/>
         <a:ea typeface=""/>
         <a:cs typeface=""/>
-        <a:font script="Jpan" typeface="ＭＳ Ｐゴシック"/>
+        <a:font script="Jpan" typeface="游ゴシック Light"/>
         <a:font script="Hang" typeface="맑은 고딕"/>
-        <a:font script="Hans" typeface="宋体"/>
+        <a:font script="Hans" typeface="等线 Light"/>
         <a:font script="Hant" typeface="新細明體"/>
         <a:font script="Arab" typeface="Times New Roman"/>
         <a:font script="Hebr" typeface="Times New Roman"/>
@@ -15146,14 +15346,31 @@
         <a:font script="Viet" typeface="Times New Roman"/>
         <a:font script="Uigh" typeface="Microsoft Uighur"/>
         <a:font script="Geor" typeface="Sylfaen"/>
+        <a:font script="Armn" typeface="Arial"/>
+        <a:font script="Bugi" typeface="Leelawadee UI"/>
+        <a:font script="Bopo" typeface="Microsoft JhengHei"/>
+        <a:font script="Java" typeface="Javanese Text"/>
+        <a:font script="Lisu" typeface="Segoe UI"/>
+        <a:font script="Mymr" typeface="Myanmar Text"/>
+        <a:font script="Nkoo" typeface="Ebrima"/>
+        <a:font script="Olck" typeface="Nirmala UI"/>
+        <a:font script="Osma" typeface="Ebrima"/>
+        <a:font script="Phag" typeface="Phagspa"/>
+        <a:font script="Syrn" typeface="Estrangelo Edessa"/>
+        <a:font script="Syrj" typeface="Estrangelo Edessa"/>
+        <a:font script="Syre" typeface="Estrangelo Edessa"/>
+        <a:font script="Sora" typeface="Nirmala UI"/>
+        <a:font script="Tale" typeface="Microsoft Tai Le"/>
+        <a:font script="Talu" typeface="Microsoft New Tai Lue"/>
+        <a:font script="Tfng" typeface="Ebrima"/>
       </a:majorFont>
       <a:minorFont>
-        <a:latin typeface="Calibri"/>
+        <a:latin typeface="Aptos" panose="02110004020202020204"/>
         <a:ea typeface=""/>
         <a:cs typeface=""/>
-        <a:font script="Jpan" typeface="ＭＳ Ｐゴシック"/>
+        <a:font script="Jpan" typeface="游ゴシック"/>
         <a:font script="Hang" typeface="맑은 고딕"/>
-        <a:font script="Hans" typeface="宋体"/>
+        <a:font script="Hans" typeface="等线"/>
         <a:font script="Hant" typeface="新細明體"/>
         <a:font script="Arab" typeface="Arial"/>
         <a:font script="Hebr" typeface="Arial"/>
@@ -15181,6 +15398,23 @@
         <a:font script="Viet" typeface="Arial"/>
         <a:font script="Uigh" typeface="Microsoft Uighur"/>
         <a:font script="Geor" typeface="Sylfaen"/>
+        <a:font script="Armn" typeface="Arial"/>
+        <a:font script="Bugi" typeface="Leelawadee UI"/>
+        <a:font script="Bopo" typeface="Microsoft JhengHei"/>
+        <a:font script="Java" typeface="Javanese Text"/>
+        <a:font script="Lisu" typeface="Segoe UI"/>
+        <a:font script="Mymr" typeface="Myanmar Text"/>
+        <a:font script="Nkoo" typeface="Ebrima"/>
+        <a:font script="Olck" typeface="Nirmala UI"/>
+        <a:font script="Osma" typeface="Ebrima"/>
+        <a:font script="Phag" typeface="Phagspa"/>
+        <a:font script="Syrn" typeface="Estrangelo Edessa"/>
+        <a:font script="Syrj" typeface="Estrangelo Edessa"/>
+        <a:font script="Syre" typeface="Estrangelo Edessa"/>
+        <a:font script="Sora" typeface="Nirmala UI"/>
+        <a:font script="Tale" typeface="Microsoft Tai Le"/>
+        <a:font script="Talu" typeface="Microsoft New Tai Lue"/>
+        <a:font script="Tfng" typeface="Ebrima"/>
       </a:minorFont>
     </a:fontScheme>
     <a:fmtScheme name="Office">
@@ -15192,180 +15426,136 @@
           <a:gsLst>
             <a:gs pos="0">
               <a:schemeClr val="phClr">
-                <a:tint val="50000"/>
-                <a:satMod val="300000"/>
+                <a:lumMod val="110000"/>
+                <a:satMod val="105000"/>
+                <a:tint val="67000"/>
               </a:schemeClr>
             </a:gs>
-            <a:gs pos="35000">
+            <a:gs pos="50000">
               <a:schemeClr val="phClr">
-                <a:tint val="37000"/>
-                <a:satMod val="300000"/>
+                <a:lumMod val="105000"/>
+                <a:satMod val="103000"/>
+                <a:tint val="73000"/>
               </a:schemeClr>
             </a:gs>
             <a:gs pos="100000">
               <a:schemeClr val="phClr">
-                <a:tint val="15000"/>
-                <a:satMod val="350000"/>
+                <a:lumMod val="105000"/>
+                <a:satMod val="109000"/>
+                <a:tint val="81000"/>
               </a:schemeClr>
             </a:gs>
           </a:gsLst>
-          <a:lin ang="16200000" scaled="1"/>
+          <a:lin ang="5400000" scaled="0"/>
         </a:gradFill>
         <a:gradFill rotWithShape="1">
           <a:gsLst>
             <a:gs pos="0">
               <a:schemeClr val="phClr">
-                <a:tint val="100000"/>
+                <a:satMod val="103000"/>
+                <a:lumMod val="102000"/>
+                <a:tint val="94000"/>
+              </a:schemeClr>
+            </a:gs>
+            <a:gs pos="50000">
+              <a:schemeClr val="phClr">
+                <a:satMod val="110000"/>
+                <a:lumMod val="100000"/>
                 <a:shade val="100000"/>
-                <a:satMod val="130000"/>
               </a:schemeClr>
             </a:gs>
             <a:gs pos="100000">
               <a:schemeClr val="phClr">
-                <a:tint val="50000"/>
-                <a:shade val="100000"/>
-                <a:satMod val="350000"/>
+                <a:lumMod val="99000"/>
+                <a:satMod val="120000"/>
+                <a:shade val="78000"/>
               </a:schemeClr>
             </a:gs>
           </a:gsLst>
-          <a:lin ang="16200000" scaled="0"/>
+          <a:lin ang="5400000" scaled="0"/>
         </a:gradFill>
       </a:fillStyleLst>
       <a:lnStyleLst>
-        <a:ln w="9525" cap="flat" cmpd="sng" algn="ctr">
+        <a:ln w="12700" cap="flat" cmpd="sng" algn="ctr">
           <a:solidFill>
-            <a:schemeClr val="phClr">
-              <a:shade val="95000"/>
-              <a:satMod val="105000"/>
-            </a:schemeClr>
+            <a:schemeClr val="phClr"/>
           </a:solidFill>
           <a:prstDash val="solid"/>
+          <a:miter lim="800000"/>
+        </a:ln>
+        <a:ln w="19050" cap="flat" cmpd="sng" algn="ctr">
+          <a:solidFill>
+            <a:schemeClr val="phClr"/>
+          </a:solidFill>
+          <a:prstDash val="solid"/>
+          <a:miter lim="800000"/>
         </a:ln>
         <a:ln w="25400" cap="flat" cmpd="sng" algn="ctr">
           <a:solidFill>
             <a:schemeClr val="phClr"/>
           </a:solidFill>
           <a:prstDash val="solid"/>
-        </a:ln>
-        <a:ln w="38100" cap="flat" cmpd="sng" algn="ctr">
-          <a:solidFill>
-            <a:schemeClr val="phClr"/>
-          </a:solidFill>
-          <a:prstDash val="solid"/>
+          <a:miter lim="800000"/>
         </a:ln>
       </a:lnStyleLst>
       <a:effectStyleLst>
         <a:effectStyle>
+          <a:effectLst/>
+        </a:effectStyle>
+        <a:effectStyle>
+          <a:effectLst/>
+        </a:effectStyle>
+        <a:effectStyle>
           <a:effectLst>
-            <a:outerShdw blurRad="40000" dist="20000" dir="5400000" rotWithShape="0">
+            <a:outerShdw blurRad="57150" dist="19050" dir="5400000" algn="ctr" rotWithShape="0">
               <a:srgbClr val="000000">
-                <a:alpha val="38000"/>
+                <a:alpha val="63000"/>
               </a:srgbClr>
             </a:outerShdw>
           </a:effectLst>
-        </a:effectStyle>
-        <a:effectStyle>
-          <a:effectLst>
-            <a:outerShdw blurRad="40000" dist="23000" dir="5400000" rotWithShape="0">
-              <a:srgbClr val="000000">
-                <a:alpha val="35000"/>
-              </a:srgbClr>
-            </a:outerShdw>
-          </a:effectLst>
-        </a:effectStyle>
-        <a:effectStyle>
-          <a:effectLst>
-            <a:outerShdw blurRad="40000" dist="23000" dir="5400000" rotWithShape="0">
-              <a:srgbClr val="000000">
-                <a:alpha val="35000"/>
-              </a:srgbClr>
-            </a:outerShdw>
-          </a:effectLst>
-          <a:scene3d>
-            <a:camera prst="orthographicFront">
-              <a:rot lat="0" lon="0" rev="0"/>
-            </a:camera>
-            <a:lightRig rig="threePt" dir="t">
-              <a:rot lat="0" lon="0" rev="1200000"/>
-            </a:lightRig>
-          </a:scene3d>
-          <a:sp3d>
-            <a:bevelT w="63500" h="25400"/>
-          </a:sp3d>
         </a:effectStyle>
       </a:effectStyleLst>
       <a:bgFillStyleLst>
         <a:solidFill>
           <a:schemeClr val="phClr"/>
         </a:solidFill>
+        <a:solidFill>
+          <a:schemeClr val="phClr">
+            <a:tint val="95000"/>
+            <a:satMod val="170000"/>
+          </a:schemeClr>
+        </a:solidFill>
         <a:gradFill rotWithShape="1">
           <a:gsLst>
             <a:gs pos="0">
               <a:schemeClr val="phClr">
-                <a:tint val="40000"/>
-                <a:satMod val="350000"/>
+                <a:tint val="93000"/>
+                <a:satMod val="150000"/>
+                <a:shade val="98000"/>
+                <a:lumMod val="102000"/>
               </a:schemeClr>
             </a:gs>
-            <a:gs pos="40000">
+            <a:gs pos="50000">
               <a:schemeClr val="phClr">
-                <a:tint val="45000"/>
-                <a:shade val="99000"/>
-                <a:satMod val="350000"/>
+                <a:tint val="98000"/>
+                <a:satMod val="130000"/>
+                <a:shade val="90000"/>
+                <a:lumMod val="103000"/>
               </a:schemeClr>
             </a:gs>
             <a:gs pos="100000">
               <a:schemeClr val="phClr">
-                <a:shade val="20000"/>
-                <a:satMod val="255000"/>
+                <a:shade val="63000"/>
+                <a:satMod val="120000"/>
               </a:schemeClr>
             </a:gs>
           </a:gsLst>
-          <a:path path="circle">
-            <a:fillToRect l="50000" t="-80000" r="50000" b="180000"/>
-          </a:path>
-        </a:gradFill>
-        <a:gradFill rotWithShape="1">
-          <a:gsLst>
-            <a:gs pos="0">
-              <a:schemeClr val="phClr">
-                <a:tint val="80000"/>
-                <a:satMod val="300000"/>
-              </a:schemeClr>
-            </a:gs>
-            <a:gs pos="100000">
-              <a:schemeClr val="phClr">
-                <a:shade val="30000"/>
-                <a:satMod val="200000"/>
-              </a:schemeClr>
-            </a:gs>
-          </a:gsLst>
-          <a:path path="circle">
-            <a:fillToRect l="50000" t="50000" r="50000" b="50000"/>
-          </a:path>
+          <a:lin ang="5400000" scaled="0"/>
         </a:gradFill>
       </a:bgFillStyleLst>
     </a:fmtScheme>
   </a:themeElements>
   <a:objectDefaults>
-    <a:spDef>
-      <a:spPr/>
-      <a:bodyPr/>
-      <a:lstStyle/>
-      <a:style>
-        <a:lnRef idx="1">
-          <a:schemeClr val="accent1"/>
-        </a:lnRef>
-        <a:fillRef idx="3">
-          <a:schemeClr val="accent1"/>
-        </a:fillRef>
-        <a:effectRef idx="2">
-          <a:schemeClr val="accent1"/>
-        </a:effectRef>
-        <a:fontRef idx="minor">
-          <a:schemeClr val="lt1"/>
-        </a:fontRef>
-      </a:style>
-    </a:spDef>
     <a:lnDef>
       <a:spPr/>
       <a:bodyPr/>
@@ -15387,5 +15577,10 @@
     </a:lnDef>
   </a:objectDefaults>
   <a:extraClrSchemeLst/>
+  <a:extLst>
+    <a:ext uri="{05A4C25C-085E-4340-85A3-A5531E510DB2}">
+      <thm15:themeFamily xmlns:thm15="http://schemas.microsoft.com/office/thememl/2012/main" name="Office Theme" id="{2E142A2C-CD16-42D6-873A-C26D2A0506FA}" vid="{1BDDFF52-6CD6-40A5-AB3C-68EB2F1E4D0A}"/>
+    </a:ext>
+  </a:extLst>
 </a:theme>
 </file>
--- a/S1-CL1-Cloud-Design-Build/delivery/topic_05/Topic_05_Slides.pptx
+++ b/S1-CL1-Cloud-Design-Build/delivery/topic_05/Topic_05_Slides.pptx
@@ -569,7 +569,7 @@
           </a:p>
           <a:p>
             <a:r>
-              <a:t>Misconception to pre-empt: "the marks are all in the document." No — Part B assesses the live</a:t>
+              <a:t>Misconception to pre-empt: "it is all in the document." No — Part B assesses the live</a:t>
             </a:r>
           </a:p>
           <a:p>
@@ -854,7 +854,7 @@
           </a:p>
           <a:p>
             <a:r>
-              <a:t>deliberately tests the reasoning behind your recommendation. Under-preparing for it forfeits marks.</a:t>
+              <a:t>deliberately tests the reasoning behind your recommendation. Under-preparing for it puts a satisfactory result at risk.</a:t>
             </a:r>
           </a:p>
           <a:p>
